--- a/comop-pptx-prototype/templates/comop-template.pptx
+++ b/comop-pptx-prototype/templates/comop-template.pptx
@@ -26408,42 +26408,6 @@
           </a:p>
         </p:txBody>
       </p:sp>
-      <p:pic>
-        <p:nvPicPr>
-          <p:cNvPr id="305" name="Google Shape;305;g3072d353d33_0_186"/>
-          <p:cNvPicPr preferRelativeResize="0"/>
-          <p:nvPr/>
-        </p:nvPicPr>
-        <p:blipFill>
-          <a:blip r:embed="rId3">
-            <a:alphaModFix/>
-          </a:blip>
-          <a:stretch>
-            <a:fillRect/>
-          </a:stretch>
-        </p:blipFill>
-        <p:spPr>
-          <a:xfrm>
-            <a:off x="7274250" y="1819800"/>
-            <a:ext cx="1788900" cy="1254885"/>
-          </a:xfrm>
-          <a:prstGeom prst="rect">
-            <a:avLst/>
-          </a:prstGeom>
-          <a:solidFill>
-            <a:srgbClr val="FFFFFF"/>
-          </a:solidFill>
-          <a:ln w="9525" cap="flat" cmpd="sng">
-            <a:solidFill>
-              <a:srgbClr val="0E2356"/>
-            </a:solidFill>
-            <a:prstDash val="solid"/>
-            <a:miter lim="8000"/>
-            <a:headEnd type="none" w="sm" len="sm"/>
-            <a:tailEnd type="none" w="sm" len="sm"/>
-          </a:ln>
-        </p:spPr>
-      </p:pic>
       <p:sp>
         <p:nvSpPr>
           <p:cNvPr id="306" name="Google Shape;306;g3072d353d33_0_186"/>
@@ -31631,34 +31595,6 @@
           </p:txBody>
         </p:sp>
       </p:grpSp>
-      <p:pic>
-        <p:nvPicPr>
-          <p:cNvPr id="371" name="Google Shape;371;g3072d353d33_0_212"/>
-          <p:cNvPicPr preferRelativeResize="0"/>
-          <p:nvPr/>
-        </p:nvPicPr>
-        <p:blipFill>
-          <a:blip r:embed="rId3">
-            <a:alphaModFix/>
-          </a:blip>
-          <a:stretch>
-            <a:fillRect/>
-          </a:stretch>
-        </p:blipFill>
-        <p:spPr>
-          <a:xfrm>
-            <a:off x="396400" y="1014450"/>
-            <a:ext cx="5570299" cy="2613793"/>
-          </a:xfrm>
-          <a:prstGeom prst="rect">
-            <a:avLst/>
-          </a:prstGeom>
-          <a:noFill/>
-          <a:ln>
-            <a:noFill/>
-          </a:ln>
-        </p:spPr>
-      </p:pic>
       <p:sp>
         <p:nvSpPr>
           <p:cNvPr id="372" name="Google Shape;372;g3072d353d33_0_212"/>
@@ -31945,654 +31881,6 @@
           </a:p>
         </p:txBody>
       </p:sp>
-      <p:graphicFrame>
-        <p:nvGraphicFramePr>
-          <p:cNvPr id="375" name="Google Shape;375;g3072d353d33_0_212"/>
-          <p:cNvGraphicFramePr/>
-          <p:nvPr/>
-        </p:nvGraphicFramePr>
-        <p:xfrm>
-          <a:off x="155327" y="3879095"/>
-          <a:ext cx="8901300" cy="775360"/>
-        </p:xfrm>
-        <a:graphic>
-          <a:graphicData uri="http://schemas.openxmlformats.org/drawingml/2006/table">
-            <a:tbl>
-              <a:tblPr>
-                <a:noFill/>
-                <a:tableStyleId>{0E937493-311C-4B09-AB42-98F83098D3E6}</a:tableStyleId>
-              </a:tblPr>
-              <a:tblGrid>
-                <a:gridCol w="580825">
-                  <a:extLst>
-                    <a:ext uri="{9D8B030D-6E8A-4147-A177-3AD203B41FA5}">
-                      <a16:colId xmlns:a16="http://schemas.microsoft.com/office/drawing/2014/main" val="20000"/>
-                    </a:ext>
-                  </a:extLst>
-                </a:gridCol>
-                <a:gridCol w="5230550">
-                  <a:extLst>
-                    <a:ext uri="{9D8B030D-6E8A-4147-A177-3AD203B41FA5}">
-                      <a16:colId xmlns:a16="http://schemas.microsoft.com/office/drawing/2014/main" val="20001"/>
-                    </a:ext>
-                  </a:extLst>
-                </a:gridCol>
-                <a:gridCol w="3089925">
-                  <a:extLst>
-                    <a:ext uri="{9D8B030D-6E8A-4147-A177-3AD203B41FA5}">
-                      <a16:colId xmlns:a16="http://schemas.microsoft.com/office/drawing/2014/main" val="20002"/>
-                    </a:ext>
-                  </a:extLst>
-                </a:gridCol>
-              </a:tblGrid>
-              <a:tr h="188125">
-                <a:tc>
-                  <a:txBody>
-                    <a:bodyPr/>
-                    <a:lstStyle/>
-                    <a:p>
-                      <a:pPr marL="0" marR="0" lvl="0" indent="0" algn="ctr" rtl="0">
-                        <a:lnSpc>
-                          <a:spcPct val="100000"/>
-                        </a:lnSpc>
-                        <a:spcBef>
-                          <a:spcPts val="0"/>
-                        </a:spcBef>
-                        <a:spcAft>
-                          <a:spcPts val="0"/>
-                        </a:spcAft>
-                        <a:buClr>
-                          <a:srgbClr val="FFFFFF"/>
-                        </a:buClr>
-                        <a:buSzPts val="1400"/>
-                        <a:buFont typeface="Outfit"/>
-                        <a:buNone/>
-                      </a:pPr>
-                      <a:r>
-                        <a:rPr lang="en-US" sz="1400" b="1" i="0" u="none" strike="noStrike" cap="none">
-                          <a:solidFill>
-                            <a:srgbClr val="FFFFFF"/>
-                          </a:solidFill>
-                          <a:latin typeface="Outfit"/>
-                          <a:ea typeface="Outfit"/>
-                          <a:cs typeface="Outfit"/>
-                          <a:sym typeface="Outfit"/>
-                        </a:rPr>
-                        <a:t>🕭</a:t>
-                      </a:r>
-                      <a:endParaRPr sz="2000" b="1" u="none" strike="noStrike" cap="none">
-                        <a:solidFill>
-                          <a:srgbClr val="FFFFFF"/>
-                        </a:solidFill>
-                        <a:latin typeface="Outfit"/>
-                        <a:ea typeface="Outfit"/>
-                        <a:cs typeface="Outfit"/>
-                        <a:sym typeface="Outfit"/>
-                      </a:endParaRPr>
-                    </a:p>
-                  </a:txBody>
-                  <a:tcPr marL="68575" marR="68575" marT="0" marB="0" anchor="ctr">
-                    <a:lnL w="12700" cap="flat" cmpd="sng">
-                      <a:solidFill>
-                        <a:srgbClr val="0E2356"/>
-                      </a:solidFill>
-                      <a:prstDash val="solid"/>
-                      <a:round/>
-                      <a:headEnd type="none" w="sm" len="sm"/>
-                      <a:tailEnd type="none" w="sm" len="sm"/>
-                    </a:lnL>
-                    <a:lnR w="12700" cap="flat" cmpd="sng">
-                      <a:solidFill>
-                        <a:srgbClr val="0E2356"/>
-                      </a:solidFill>
-                      <a:prstDash val="solid"/>
-                      <a:round/>
-                      <a:headEnd type="none" w="sm" len="sm"/>
-                      <a:tailEnd type="none" w="sm" len="sm"/>
-                    </a:lnR>
-                    <a:lnT w="12700" cap="flat" cmpd="sng">
-                      <a:solidFill>
-                        <a:srgbClr val="0E2356"/>
-                      </a:solidFill>
-                      <a:prstDash val="solid"/>
-                      <a:round/>
-                      <a:headEnd type="none" w="sm" len="sm"/>
-                      <a:tailEnd type="none" w="sm" len="sm"/>
-                    </a:lnT>
-                    <a:lnB w="12700" cap="flat" cmpd="sng">
-                      <a:solidFill>
-                        <a:srgbClr val="0E2356"/>
-                      </a:solidFill>
-                      <a:prstDash val="solid"/>
-                      <a:round/>
-                      <a:headEnd type="none" w="sm" len="sm"/>
-                      <a:tailEnd type="none" w="sm" len="sm"/>
-                    </a:lnB>
-                    <a:solidFill>
-                      <a:srgbClr val="C5D9E8"/>
-                    </a:solidFill>
-                  </a:tcPr>
-                </a:tc>
-                <a:tc>
-                  <a:txBody>
-                    <a:bodyPr/>
-                    <a:lstStyle/>
-                    <a:p>
-                      <a:pPr marL="0" marR="0" lvl="0" indent="0" algn="ctr" rtl="0">
-                        <a:lnSpc>
-                          <a:spcPct val="100000"/>
-                        </a:lnSpc>
-                        <a:spcBef>
-                          <a:spcPts val="0"/>
-                        </a:spcBef>
-                        <a:spcAft>
-                          <a:spcPts val="0"/>
-                        </a:spcAft>
-                        <a:buClr>
-                          <a:srgbClr val="0E2356"/>
-                        </a:buClr>
-                        <a:buSzPts val="700"/>
-                        <a:buFont typeface="Outfit"/>
-                        <a:buNone/>
-                      </a:pPr>
-                      <a:r>
-                        <a:rPr lang="en-US" sz="900" b="1" i="0" u="none" strike="noStrike" cap="none">
-                          <a:solidFill>
-                            <a:srgbClr val="0E2356"/>
-                          </a:solidFill>
-                          <a:latin typeface="Outfit"/>
-                          <a:ea typeface="Outfit"/>
-                          <a:cs typeface="Outfit"/>
-                          <a:sym typeface="Outfit"/>
-                        </a:rPr>
-                        <a:t>Sujets pour décision</a:t>
-                      </a:r>
-                      <a:r>
-                        <a:rPr lang="en-US" sz="900" b="1">
-                          <a:latin typeface="Outfit"/>
-                          <a:ea typeface="Outfit"/>
-                          <a:cs typeface="Outfit"/>
-                          <a:sym typeface="Outfit"/>
-                        </a:rPr>
-                        <a:t>(s)</a:t>
-                      </a:r>
-                      <a:endParaRPr sz="900" b="1" i="0" u="none" strike="noStrike" cap="none">
-                        <a:solidFill>
-                          <a:srgbClr val="0E2356"/>
-                        </a:solidFill>
-                        <a:latin typeface="Outfit"/>
-                        <a:ea typeface="Outfit"/>
-                        <a:cs typeface="Outfit"/>
-                        <a:sym typeface="Outfit"/>
-                      </a:endParaRPr>
-                    </a:p>
-                  </a:txBody>
-                  <a:tcPr marL="68575" marR="68575" marT="0" marB="0" anchor="ctr">
-                    <a:lnL w="12700" cap="flat" cmpd="sng">
-                      <a:solidFill>
-                        <a:srgbClr val="0E2356"/>
-                      </a:solidFill>
-                      <a:prstDash val="solid"/>
-                      <a:round/>
-                      <a:headEnd type="none" w="sm" len="sm"/>
-                      <a:tailEnd type="none" w="sm" len="sm"/>
-                    </a:lnL>
-                    <a:lnR w="12700" cap="flat" cmpd="sng">
-                      <a:solidFill>
-                        <a:srgbClr val="0E2356"/>
-                      </a:solidFill>
-                      <a:prstDash val="solid"/>
-                      <a:round/>
-                      <a:headEnd type="none" w="sm" len="sm"/>
-                      <a:tailEnd type="none" w="sm" len="sm"/>
-                    </a:lnR>
-                    <a:lnT w="12700" cap="flat" cmpd="sng">
-                      <a:solidFill>
-                        <a:srgbClr val="0E2356"/>
-                      </a:solidFill>
-                      <a:prstDash val="solid"/>
-                      <a:round/>
-                      <a:headEnd type="none" w="sm" len="sm"/>
-                      <a:tailEnd type="none" w="sm" len="sm"/>
-                    </a:lnT>
-                    <a:lnB w="12700" cap="flat" cmpd="sng">
-                      <a:solidFill>
-                        <a:srgbClr val="0E2356"/>
-                      </a:solidFill>
-                      <a:prstDash val="solid"/>
-                      <a:round/>
-                      <a:headEnd type="none" w="sm" len="sm"/>
-                      <a:tailEnd type="none" w="sm" len="sm"/>
-                    </a:lnB>
-                    <a:solidFill>
-                      <a:srgbClr val="C5D9E8"/>
-                    </a:solidFill>
-                  </a:tcPr>
-                </a:tc>
-                <a:tc>
-                  <a:txBody>
-                    <a:bodyPr/>
-                    <a:lstStyle/>
-                    <a:p>
-                      <a:pPr marL="82550" marR="0" lvl="0" indent="-82550" algn="ctr" rtl="0">
-                        <a:lnSpc>
-                          <a:spcPct val="100000"/>
-                        </a:lnSpc>
-                        <a:spcBef>
-                          <a:spcPts val="0"/>
-                        </a:spcBef>
-                        <a:spcAft>
-                          <a:spcPts val="0"/>
-                        </a:spcAft>
-                        <a:buClr>
-                          <a:srgbClr val="0E2356"/>
-                        </a:buClr>
-                        <a:buSzPts val="700"/>
-                        <a:buFont typeface="Outfit"/>
-                        <a:buNone/>
-                      </a:pPr>
-                      <a:r>
-                        <a:rPr lang="en-US" sz="700" b="1" i="0" u="none" strike="noStrike" cap="none">
-                          <a:solidFill>
-                            <a:srgbClr val="0E2356"/>
-                          </a:solidFill>
-                          <a:latin typeface="Outfit"/>
-                          <a:ea typeface="Outfit"/>
-                          <a:cs typeface="Outfit"/>
-                          <a:sym typeface="Outfit"/>
-                        </a:rPr>
-                        <a:t>Décision(s) </a:t>
-                      </a:r>
-                      <a:r>
-                        <a:rPr lang="en-US" sz="700" b="1">
-                          <a:latin typeface="Outfit"/>
-                          <a:ea typeface="Outfit"/>
-                          <a:cs typeface="Outfit"/>
-                          <a:sym typeface="Outfit"/>
-                        </a:rPr>
-                        <a:t>prises en séance</a:t>
-                      </a:r>
-                      <a:endParaRPr sz="1400" u="none" strike="noStrike" cap="none"/>
-                    </a:p>
-                  </a:txBody>
-                  <a:tcPr marL="68575" marR="68575" marT="0" marB="0" anchor="ctr">
-                    <a:lnL w="12700" cap="flat" cmpd="sng">
-                      <a:solidFill>
-                        <a:srgbClr val="0E2356"/>
-                      </a:solidFill>
-                      <a:prstDash val="solid"/>
-                      <a:round/>
-                      <a:headEnd type="none" w="sm" len="sm"/>
-                      <a:tailEnd type="none" w="sm" len="sm"/>
-                    </a:lnL>
-                    <a:lnR w="12700" cap="flat" cmpd="sng">
-                      <a:solidFill>
-                        <a:srgbClr val="0E2356"/>
-                      </a:solidFill>
-                      <a:prstDash val="solid"/>
-                      <a:round/>
-                      <a:headEnd type="none" w="sm" len="sm"/>
-                      <a:tailEnd type="none" w="sm" len="sm"/>
-                    </a:lnR>
-                    <a:lnT w="12700" cap="flat" cmpd="sng">
-                      <a:solidFill>
-                        <a:srgbClr val="0E2356"/>
-                      </a:solidFill>
-                      <a:prstDash val="solid"/>
-                      <a:round/>
-                      <a:headEnd type="none" w="sm" len="sm"/>
-                      <a:tailEnd type="none" w="sm" len="sm"/>
-                    </a:lnT>
-                    <a:lnB w="12700" cap="flat" cmpd="sng">
-                      <a:solidFill>
-                        <a:srgbClr val="0E2356"/>
-                      </a:solidFill>
-                      <a:prstDash val="solid"/>
-                      <a:round/>
-                      <a:headEnd type="none" w="sm" len="sm"/>
-                      <a:tailEnd type="none" w="sm" len="sm"/>
-                    </a:lnB>
-                    <a:solidFill>
-                      <a:srgbClr val="C5D9E8"/>
-                    </a:solidFill>
-                  </a:tcPr>
-                </a:tc>
-                <a:extLst>
-                  <a:ext uri="{0D108BD9-81ED-4DB2-BD59-A6C34878D82A}">
-                    <a16:rowId xmlns:a16="http://schemas.microsoft.com/office/drawing/2014/main" val="10000"/>
-                  </a:ext>
-                </a:extLst>
-              </a:tr>
-              <a:tr h="279000">
-                <a:tc gridSpan="2">
-                  <a:txBody>
-                    <a:bodyPr/>
-                    <a:lstStyle/>
-                    <a:p>
-                      <a:pPr marL="0" marR="0" lvl="0" indent="0" algn="l" rtl="0">
-                        <a:lnSpc>
-                          <a:spcPct val="100000"/>
-                        </a:lnSpc>
-                        <a:spcBef>
-                          <a:spcPts val="0"/>
-                        </a:spcBef>
-                        <a:spcAft>
-                          <a:spcPts val="0"/>
-                        </a:spcAft>
-                        <a:buClr>
-                          <a:srgbClr val="0E2356"/>
-                        </a:buClr>
-                        <a:buSzPts val="800"/>
-                        <a:buFont typeface="Outfit"/>
-                        <a:buNone/>
-                      </a:pPr>
-                      <a:r>
-                        <a:rPr lang="en-US" sz="800"/>
-                        <a:t>{{sujets_decision}}</a:t>
-                      </a:r>
-                      <a:endParaRPr sz="1400" u="none" strike="noStrike" cap="none"/>
-                    </a:p>
-                  </a:txBody>
-                  <a:tcPr marL="45725" marR="45725" marT="45725" marB="45725" anchor="ctr">
-                    <a:lnL w="12700" cap="flat" cmpd="sng">
-                      <a:solidFill>
-                        <a:srgbClr val="0E2356"/>
-                      </a:solidFill>
-                      <a:prstDash val="solid"/>
-                      <a:round/>
-                      <a:headEnd type="none" w="sm" len="sm"/>
-                      <a:tailEnd type="none" w="sm" len="sm"/>
-                    </a:lnL>
-                    <a:lnR w="12700" cap="flat" cmpd="sng">
-                      <a:solidFill>
-                        <a:srgbClr val="0E2356"/>
-                      </a:solidFill>
-                      <a:prstDash val="solid"/>
-                      <a:round/>
-                      <a:headEnd type="none" w="sm" len="sm"/>
-                      <a:tailEnd type="none" w="sm" len="sm"/>
-                    </a:lnR>
-                    <a:lnT w="12700" cap="flat" cmpd="sng">
-                      <a:solidFill>
-                        <a:srgbClr val="0E2356"/>
-                      </a:solidFill>
-                      <a:prstDash val="solid"/>
-                      <a:round/>
-                      <a:headEnd type="none" w="sm" len="sm"/>
-                      <a:tailEnd type="none" w="sm" len="sm"/>
-                    </a:lnT>
-                    <a:lnB w="12700" cap="flat" cmpd="sng">
-                      <a:solidFill>
-                        <a:srgbClr val="0E2356"/>
-                      </a:solidFill>
-                      <a:prstDash val="solid"/>
-                      <a:round/>
-                      <a:headEnd type="none" w="sm" len="sm"/>
-                      <a:tailEnd type="none" w="sm" len="sm"/>
-                    </a:lnB>
-                  </a:tcPr>
-                </a:tc>
-                <a:tc hMerge="1">
-                  <a:txBody>
-                    <a:bodyPr/>
-                    <a:lstStyle/>
-                    <a:p>
-                      <a:endParaRPr lang="fr-FR"/>
-                    </a:p>
-                  </a:txBody>
-                  <a:tcPr/>
-                </a:tc>
-                <a:tc>
-                  <a:txBody>
-                    <a:bodyPr/>
-                    <a:lstStyle/>
-                    <a:p>
-                      <a:pPr marL="0" marR="0" lvl="0" indent="0" algn="l" rtl="0">
-                        <a:lnSpc>
-                          <a:spcPct val="100000"/>
-                        </a:lnSpc>
-                        <a:spcBef>
-                          <a:spcPts val="0"/>
-                        </a:spcBef>
-                        <a:spcAft>
-                          <a:spcPts val="0"/>
-                        </a:spcAft>
-                        <a:buClr>
-                          <a:srgbClr val="0E2356"/>
-                        </a:buClr>
-                        <a:buSzPts val="800"/>
-                        <a:buFont typeface="Outfit"/>
-                        <a:buNone/>
-                      </a:pPr>
-                      <a:endParaRPr sz="1400" u="none" strike="noStrike" cap="none"/>
-                    </a:p>
-                  </a:txBody>
-                  <a:tcPr marL="68575" marR="68575" marT="0" marB="0" anchor="ctr">
-                    <a:lnL w="12700" cap="flat" cmpd="sng">
-                      <a:solidFill>
-                        <a:srgbClr val="0E2356"/>
-                      </a:solidFill>
-                      <a:prstDash val="solid"/>
-                      <a:round/>
-                      <a:headEnd type="none" w="sm" len="sm"/>
-                      <a:tailEnd type="none" w="sm" len="sm"/>
-                    </a:lnL>
-                    <a:lnR w="12700" cap="flat" cmpd="sng">
-                      <a:solidFill>
-                        <a:srgbClr val="0E2356"/>
-                      </a:solidFill>
-                      <a:prstDash val="solid"/>
-                      <a:round/>
-                      <a:headEnd type="none" w="sm" len="sm"/>
-                      <a:tailEnd type="none" w="sm" len="sm"/>
-                    </a:lnR>
-                    <a:lnT w="12700" cap="flat" cmpd="sng">
-                      <a:solidFill>
-                        <a:srgbClr val="0E2356"/>
-                      </a:solidFill>
-                      <a:prstDash val="solid"/>
-                      <a:round/>
-                      <a:headEnd type="none" w="sm" len="sm"/>
-                      <a:tailEnd type="none" w="sm" len="sm"/>
-                    </a:lnT>
-                    <a:lnB w="12700" cap="flat" cmpd="sng">
-                      <a:solidFill>
-                        <a:srgbClr val="0E2356"/>
-                      </a:solidFill>
-                      <a:prstDash val="solid"/>
-                      <a:round/>
-                      <a:headEnd type="none" w="sm" len="sm"/>
-                      <a:tailEnd type="none" w="sm" len="sm"/>
-                    </a:lnB>
-                  </a:tcPr>
-                </a:tc>
-                <a:extLst>
-                  <a:ext uri="{0D108BD9-81ED-4DB2-BD59-A6C34878D82A}">
-                    <a16:rowId xmlns:a16="http://schemas.microsoft.com/office/drawing/2014/main" val="10001"/>
-                  </a:ext>
-                </a:extLst>
-              </a:tr>
-              <a:tr h="283000">
-                <a:tc gridSpan="2">
-                  <a:txBody>
-                    <a:bodyPr/>
-                    <a:lstStyle/>
-                    <a:p>
-                      <a:pPr marL="0" marR="0" lvl="0" indent="0" algn="l" rtl="0">
-                        <a:lnSpc>
-                          <a:spcPct val="100000"/>
-                        </a:lnSpc>
-                        <a:spcBef>
-                          <a:spcPts val="0"/>
-                        </a:spcBef>
-                        <a:spcAft>
-                          <a:spcPts val="0"/>
-                        </a:spcAft>
-                        <a:buClr>
-                          <a:srgbClr val="0E2356"/>
-                        </a:buClr>
-                        <a:buSzPts val="800"/>
-                        <a:buFont typeface="Outfit"/>
-                        <a:buNone/>
-                      </a:pPr>
-                      <a:r>
-                        <a:rPr lang="en-US" sz="800"/>
-                        <a:t>{{decisions}}</a:t>
-                      </a:r>
-                      <a:endParaRPr sz="800" b="0" i="0" u="none" strike="noStrike" cap="none">
-                        <a:solidFill>
-                          <a:srgbClr val="0E2356"/>
-                        </a:solidFill>
-                        <a:latin typeface="Outfit"/>
-                        <a:ea typeface="Outfit"/>
-                        <a:cs typeface="Outfit"/>
-                        <a:sym typeface="Outfit"/>
-                      </a:endParaRPr>
-                    </a:p>
-                  </a:txBody>
-                  <a:tcPr marL="45725" marR="45725" marT="45725" marB="45725" anchor="ctr">
-                    <a:lnL w="12700" cap="flat" cmpd="sng">
-                      <a:solidFill>
-                        <a:srgbClr val="0E2356"/>
-                      </a:solidFill>
-                      <a:prstDash val="solid"/>
-                      <a:round/>
-                      <a:headEnd type="none" w="sm" len="sm"/>
-                      <a:tailEnd type="none" w="sm" len="sm"/>
-                    </a:lnL>
-                    <a:lnR w="12700" cap="flat" cmpd="sng">
-                      <a:solidFill>
-                        <a:srgbClr val="0E2356"/>
-                      </a:solidFill>
-                      <a:prstDash val="solid"/>
-                      <a:round/>
-                      <a:headEnd type="none" w="sm" len="sm"/>
-                      <a:tailEnd type="none" w="sm" len="sm"/>
-                    </a:lnR>
-                    <a:lnT w="12700" cap="flat" cmpd="sng">
-                      <a:solidFill>
-                        <a:srgbClr val="0E2356"/>
-                      </a:solidFill>
-                      <a:prstDash val="solid"/>
-                      <a:round/>
-                      <a:headEnd type="none" w="sm" len="sm"/>
-                      <a:tailEnd type="none" w="sm" len="sm"/>
-                    </a:lnT>
-                    <a:lnB w="12700" cap="flat" cmpd="sng">
-                      <a:solidFill>
-                        <a:srgbClr val="0E2356"/>
-                      </a:solidFill>
-                      <a:prstDash val="solid"/>
-                      <a:round/>
-                      <a:headEnd type="none" w="sm" len="sm"/>
-                      <a:tailEnd type="none" w="sm" len="sm"/>
-                    </a:lnB>
-                  </a:tcPr>
-                </a:tc>
-                <a:tc hMerge="1">
-                  <a:txBody>
-                    <a:bodyPr/>
-                    <a:lstStyle/>
-                    <a:p>
-                      <a:endParaRPr lang="fr-FR"/>
-                    </a:p>
-                  </a:txBody>
-                  <a:tcPr/>
-                </a:tc>
-                <a:tc>
-                  <a:txBody>
-                    <a:bodyPr/>
-                    <a:lstStyle/>
-                    <a:p>
-                      <a:pPr marL="0" marR="0" lvl="0" indent="0" algn="l" rtl="0">
-                        <a:lnSpc>
-                          <a:spcPct val="100000"/>
-                        </a:lnSpc>
-                        <a:spcBef>
-                          <a:spcPts val="0"/>
-                        </a:spcBef>
-                        <a:spcAft>
-                          <a:spcPts val="0"/>
-                        </a:spcAft>
-                        <a:buClr>
-                          <a:srgbClr val="0E2356"/>
-                        </a:buClr>
-                        <a:buSzPts val="800"/>
-                        <a:buFont typeface="Outfit"/>
-                        <a:buNone/>
-                      </a:pPr>
-                      <a:r>
-                        <a:rPr lang="en-US" sz="800" b="0" i="0" u="none" strike="noStrike" cap="none">
-                          <a:solidFill>
-                            <a:srgbClr val="0E2356"/>
-                          </a:solidFill>
-                          <a:latin typeface="Outfit"/>
-                          <a:ea typeface="Outfit"/>
-                          <a:cs typeface="Outfit"/>
-                          <a:sym typeface="Outfit"/>
-                        </a:rPr>
-                        <a:t>{{chantiers_3_mois}} - {{jalons_livrables}} - {{avancement_chantiers}} - {{difficultes_roadmap}}</a:t>
-                      </a:r>
-                      <a:endParaRPr sz="800" b="0" i="0" u="none" strike="noStrike" cap="none">
-                        <a:solidFill>
-                          <a:srgbClr val="0E2356"/>
-                        </a:solidFill>
-                        <a:latin typeface="Outfit"/>
-                        <a:ea typeface="Outfit"/>
-                        <a:cs typeface="Outfit"/>
-                        <a:sym typeface="Outfit"/>
-                      </a:endParaRPr>
-                    </a:p>
-                  </a:txBody>
-                  <a:tcPr marL="68575" marR="68575" marT="0" marB="0" anchor="ctr">
-                    <a:lnL w="12700" cap="flat" cmpd="sng">
-                      <a:solidFill>
-                        <a:srgbClr val="0E2356"/>
-                      </a:solidFill>
-                      <a:prstDash val="solid"/>
-                      <a:round/>
-                      <a:headEnd type="none" w="sm" len="sm"/>
-                      <a:tailEnd type="none" w="sm" len="sm"/>
-                    </a:lnL>
-                    <a:lnR w="12700" cap="flat" cmpd="sng">
-                      <a:solidFill>
-                        <a:srgbClr val="0E2356"/>
-                      </a:solidFill>
-                      <a:prstDash val="solid"/>
-                      <a:round/>
-                      <a:headEnd type="none" w="sm" len="sm"/>
-                      <a:tailEnd type="none" w="sm" len="sm"/>
-                    </a:lnR>
-                    <a:lnT w="12700" cap="flat" cmpd="sng">
-                      <a:solidFill>
-                        <a:srgbClr val="0E2356"/>
-                      </a:solidFill>
-                      <a:prstDash val="solid"/>
-                      <a:round/>
-                      <a:headEnd type="none" w="sm" len="sm"/>
-                      <a:tailEnd type="none" w="sm" len="sm"/>
-                    </a:lnT>
-                    <a:lnB w="12700" cap="flat" cmpd="sng">
-                      <a:solidFill>
-                        <a:srgbClr val="0E2356"/>
-                      </a:solidFill>
-                      <a:prstDash val="solid"/>
-                      <a:round/>
-                      <a:headEnd type="none" w="sm" len="sm"/>
-                      <a:tailEnd type="none" w="sm" len="sm"/>
-                    </a:lnB>
-                  </a:tcPr>
-                </a:tc>
-                <a:extLst>
-                  <a:ext uri="{0D108BD9-81ED-4DB2-BD59-A6C34878D82A}">
-                    <a16:rowId xmlns:a16="http://schemas.microsoft.com/office/drawing/2014/main" val="10002"/>
-                  </a:ext>
-                </a:extLst>
-              </a:tr>
-            </a:tbl>
-          </a:graphicData>
-        </a:graphic>
-      </p:graphicFrame>
       <p:sp>
         <p:nvSpPr>
           <p:cNvPr id="376" name="Google Shape;376;g3072d353d33_0_212"/>

--- a/comop-pptx-prototype/templates/comop-template.pptx
+++ b/comop-pptx-prototype/templates/comop-template.pptx
@@ -1,1193 +1,5 @@
 
-<file path=docProps\app.xml><?xml version="1.0" encoding="utf-8"?>
-<Properties xmlns="http://schemas.openxmlformats.org/officeDocument/2006/extended-properties" xmlns:vt="http://schemas.openxmlformats.org/officeDocument/2006/docPropsVTypes">
-  <TotalTime>0</TotalTime>
-  <Words>175</Words>
-  <Application>Microsoft Office PowerPoint</Application>
-  <PresentationFormat>On-screen Show (16:9)</PresentationFormat>
-  <Paragraphs>62</Paragraphs>
-  <Slides>3</Slides>
-  <Notes>4</Notes>
-  <HiddenSlides>0</HiddenSlides>
-  <MMClips>0</MMClips>
-  <ScaleCrop>false</ScaleCrop>
-  <HeadingPairs>
-    <vt:vector size="6" baseType="variant">
-      <vt:variant>
-        <vt:lpstr>Fonts Used</vt:lpstr>
-      </vt:variant>
-      <vt:variant>
-        <vt:i4>14</vt:i4>
-      </vt:variant>
-      <vt:variant>
-        <vt:lpstr>Theme</vt:lpstr>
-      </vt:variant>
-      <vt:variant>
-        <vt:i4>1</vt:i4>
-      </vt:variant>
-      <vt:variant>
-        <vt:lpstr>Slide Titles</vt:lpstr>
-      </vt:variant>
-      <vt:variant>
-        <vt:i4>4</vt:i4>
-      </vt:variant>
-    </vt:vector>
-  </HeadingPairs>
-  <TitlesOfParts>
-    <vt:vector size="19" baseType="lpstr">
-      <vt:lpstr>Arial Black</vt:lpstr>
-      <vt:lpstr>Cambria Math</vt:lpstr>
-      <vt:lpstr>Courier New</vt:lpstr>
-      <vt:lpstr>Helvetica Neue</vt:lpstr>
-      <vt:lpstr>Century Gothic</vt:lpstr>
-      <vt:lpstr>Merriweather Sans</vt:lpstr>
-      <vt:lpstr>Cabin Condensed</vt:lpstr>
-      <vt:lpstr>Montserrat SemiBold</vt:lpstr>
-      <vt:lpstr>Arial</vt:lpstr>
-      <vt:lpstr>Noto Sans</vt:lpstr>
-      <vt:lpstr>Calibri</vt:lpstr>
-      <vt:lpstr>Verdana</vt:lpstr>
-      <vt:lpstr>Arial Narrow</vt:lpstr>
-      <vt:lpstr>Noto Sans Symbols</vt:lpstr>
-      <vt:lpstr>Conception personnalisée</vt:lpstr>
-      <vt:lpstr>Pilotage Agile AG2R</vt:lpstr>
-      <vt:lpstr>MAQUETTE support COPIL - slide 1</vt:lpstr>
-      <vt:lpstr>MAQUETTE support COPIL - slide 2</vt:lpstr>
-      <vt:lpstr>MAQUETTE support COPIL - slide 3</vt:lpstr>
-    </vt:vector>
-  </TitlesOfParts>
-  <LinksUpToDate>false</LinksUpToDate>
-  <SharedDoc>false</SharedDoc>
-  <HyperlinksChanged>false</HyperlinksChanged>
-  <AppVersion>16.0000</AppVersion>
-</Properties>
-</file>
-
-<file path=docProps\core.xml><?xml version="1.0" encoding="utf-8"?>
-<cp:coreProperties xmlns:cp="http://schemas.openxmlformats.org/package/2006/metadata/core-properties" xmlns:dc="http://purl.org/dc/elements/1.1/" xmlns:dcterms="http://purl.org/dc/terms/" xmlns:dcmitype="http://purl.org/dc/dcmitype/" xmlns:xsi="http://www.w3.org/2001/XMLSchema-instance">
-  <dc:creator>HUBE-LAURENT Estelle (BPCE-IT - NON REFERENCEE)</dc:creator>
-  <cp:lastModifiedBy>Camus, Claude</cp:lastModifiedBy>
-  <cp:revision>2</cp:revision>
-  <dcterms:modified xsi:type="dcterms:W3CDTF">2026-06-04T12:53:47Z</dcterms:modified>
-</cp:coreProperties>
-</file>
-
-<file path=docProps\custom.xml><?xml version="1.0" encoding="utf-8"?>
-<Properties xmlns="http://schemas.openxmlformats.org/officeDocument/2006/custom-properties" xmlns:vt="http://schemas.openxmlformats.org/officeDocument/2006/docPropsVTypes">
-  <property fmtid="{D5CDD505-2E9C-101B-9397-08002B2CF9AE}" pid="2" name="ContentTypeId">
-    <vt:lpwstr>0x0101009B429FF754AB974C8E15D9875A4AF84E</vt:lpwstr>
-  </property>
-  <property fmtid="{D5CDD505-2E9C-101B-9397-08002B2CF9AE}" pid="3" name="MSIP_Label_48a19f0c-bea1-442e-a475-ed109d9ec508_Enabled">
-    <vt:lpwstr>true</vt:lpwstr>
-  </property>
-  <property fmtid="{D5CDD505-2E9C-101B-9397-08002B2CF9AE}" pid="4" name="MSIP_Label_48a19f0c-bea1-442e-a475-ed109d9ec508_SetDate">
-    <vt:lpwstr>2023-01-30T16:00:26Z</vt:lpwstr>
-  </property>
-  <property fmtid="{D5CDD505-2E9C-101B-9397-08002B2CF9AE}" pid="5" name="MSIP_Label_48a19f0c-bea1-442e-a475-ed109d9ec508_Method">
-    <vt:lpwstr>Standard</vt:lpwstr>
-  </property>
-  <property fmtid="{D5CDD505-2E9C-101B-9397-08002B2CF9AE}" pid="6" name="MSIP_Label_48a19f0c-bea1-442e-a475-ed109d9ec508_Name">
-    <vt:lpwstr>48a19f0c-bea1-442e-a475-ed109d9ec508</vt:lpwstr>
-  </property>
-  <property fmtid="{D5CDD505-2E9C-101B-9397-08002B2CF9AE}" pid="7" name="MSIP_Label_48a19f0c-bea1-442e-a475-ed109d9ec508_SiteId">
-    <vt:lpwstr>d5bb6d35-8a82-4329-b49a-5030bd6497ab</vt:lpwstr>
-  </property>
-  <property fmtid="{D5CDD505-2E9C-101B-9397-08002B2CF9AE}" pid="8" name="MSIP_Label_48a19f0c-bea1-442e-a475-ed109d9ec508_ActionId">
-    <vt:lpwstr>d0ef2f85-f3a6-476b-a51d-604a3da2267b</vt:lpwstr>
-  </property>
-  <property fmtid="{D5CDD505-2E9C-101B-9397-08002B2CF9AE}" pid="9" name="MSIP_Label_48a19f0c-bea1-442e-a475-ed109d9ec508_ContentBits">
-    <vt:lpwstr>0</vt:lpwstr>
-  </property>
-  <property fmtid="{D5CDD505-2E9C-101B-9397-08002B2CF9AE}" pid="10" name="MediaServiceImageTags">
-    <vt:lpwstr/>
-  </property>
-</Properties>
-</file>
-
-<file path=ppt\notesMasters\notesMaster1.xml><?xml version="1.0" encoding="utf-8"?>
-<p:notesMaster xmlns:a="http://schemas.openxmlformats.org/drawingml/2006/main" xmlns:r="http://schemas.openxmlformats.org/officeDocument/2006/relationships" xmlns:p="http://schemas.openxmlformats.org/presentationml/2006/main">
-  <p:cSld>
-    <p:bg>
-      <p:bgPr>
-        <a:solidFill>
-          <a:schemeClr val="lt1"/>
-        </a:solidFill>
-        <a:effectLst/>
-      </p:bgPr>
-    </p:bg>
-    <p:spTree>
-      <p:nvGrpSpPr>
-        <p:cNvPr id="1" name="Shape 2"/>
-        <p:cNvGrpSpPr/>
-        <p:nvPr/>
-      </p:nvGrpSpPr>
-      <p:grpSpPr>
-        <a:xfrm>
-          <a:off x="0" y="0"/>
-          <a:ext cx="0" cy="0"/>
-          <a:chOff x="0" y="0"/>
-          <a:chExt cx="0" cy="0"/>
-        </a:xfrm>
-      </p:grpSpPr>
-      <p:sp>
-        <p:nvSpPr>
-          <p:cNvPr id="3" name="Google Shape;3;n"/>
-          <p:cNvSpPr>
-            <a:spLocks noGrp="1" noRot="1" noChangeAspect="1"/>
-          </p:cNvSpPr>
-          <p:nvPr>
-            <p:ph type="sldImg" idx="2"/>
-          </p:nvPr>
-        </p:nvSpPr>
-        <p:spPr>
-          <a:xfrm>
-            <a:off x="381309" y="685800"/>
-            <a:ext cx="6096000" cy="3429000"/>
-          </a:xfrm>
-          <a:custGeom>
-            <a:avLst/>
-            <a:gdLst/>
-            <a:ahLst/>
-            <a:cxnLst/>
-            <a:rect l="l" t="t" r="r" b="b"/>
-            <a:pathLst>
-              <a:path w="120000" h="120000" extrusionOk="0">
-                <a:moveTo>
-                  <a:pt x="0" y="0"/>
-                </a:moveTo>
-                <a:lnTo>
-                  <a:pt x="120000" y="0"/>
-                </a:lnTo>
-                <a:lnTo>
-                  <a:pt x="120000" y="120000"/>
-                </a:lnTo>
-                <a:lnTo>
-                  <a:pt x="0" y="120000"/>
-                </a:lnTo>
-                <a:close/>
-              </a:path>
-            </a:pathLst>
-          </a:custGeom>
-          <a:noFill/>
-          <a:ln w="9525" cap="flat" cmpd="sng">
-            <a:solidFill>
-              <a:srgbClr val="000000"/>
-            </a:solidFill>
-            <a:prstDash val="solid"/>
-            <a:round/>
-            <a:headEnd type="none" w="sm" len="sm"/>
-            <a:tailEnd type="none" w="sm" len="sm"/>
-          </a:ln>
-        </p:spPr>
-      </p:sp>
-      <p:sp>
-        <p:nvSpPr>
-          <p:cNvPr id="4" name="Google Shape;4;n"/>
-          <p:cNvSpPr txBox="1">
-            <a:spLocks noGrp="1"/>
-          </p:cNvSpPr>
-          <p:nvPr>
-            <p:ph type="body" idx="1"/>
-          </p:nvPr>
-        </p:nvSpPr>
-        <p:spPr>
-          <a:xfrm>
-            <a:off x="685800" y="4343400"/>
-            <a:ext cx="5486400" cy="4114800"/>
-          </a:xfrm>
-          <a:prstGeom prst="rect">
-            <a:avLst/>
-          </a:prstGeom>
-          <a:noFill/>
-          <a:ln>
-            <a:noFill/>
-          </a:ln>
-        </p:spPr>
-        <p:txBody>
-          <a:bodyPr spcFirstLastPara="1" wrap="square" lIns="91425" tIns="91425" rIns="91425" bIns="91425" anchor="t" anchorCtr="0">
-            <a:noAutofit/>
-          </a:bodyPr>
-          <a:lstStyle>
-            <a:lvl1pPr marL="457200" marR="0" lvl="0" indent="-317500" algn="l" rtl="0">
-              <a:lnSpc>
-                <a:spcPct val="100000"/>
-              </a:lnSpc>
-              <a:spcBef>
-                <a:spcPts val="0"/>
-              </a:spcBef>
-              <a:spcAft>
-                <a:spcPts val="0"/>
-              </a:spcAft>
-              <a:buClr>
-                <a:schemeClr val="accent6"/>
-              </a:buClr>
-              <a:buSzPts val="1400"/>
-              <a:buFont typeface="Century Gothic"/>
-              <a:buChar char="๏"/>
-              <a:defRPr sz="1400" b="0" i="0" u="none" strike="noStrike" cap="none">
-                <a:solidFill>
-                  <a:schemeClr val="dk1"/>
-                </a:solidFill>
-                <a:latin typeface="Century Gothic"/>
-                <a:ea typeface="Century Gothic"/>
-                <a:cs typeface="Century Gothic"/>
-                <a:sym typeface="Century Gothic"/>
-              </a:defRPr>
-            </a:lvl1pPr>
-            <a:lvl2pPr marL="914400" marR="0" lvl="1" indent="-304800" algn="l" rtl="0">
-              <a:lnSpc>
-                <a:spcPct val="100000"/>
-              </a:lnSpc>
-              <a:spcBef>
-                <a:spcPts val="0"/>
-              </a:spcBef>
-              <a:spcAft>
-                <a:spcPts val="0"/>
-              </a:spcAft>
-              <a:buClr>
-                <a:schemeClr val="accent6"/>
-              </a:buClr>
-              <a:buSzPts val="1200"/>
-              <a:buFont typeface="Century Gothic"/>
-              <a:buChar char="&gt;"/>
-              <a:defRPr sz="1200" b="0" i="0" u="none" strike="noStrike" cap="none">
-                <a:solidFill>
-                  <a:schemeClr val="dk1"/>
-                </a:solidFill>
-                <a:latin typeface="Century Gothic"/>
-                <a:ea typeface="Century Gothic"/>
-                <a:cs typeface="Century Gothic"/>
-                <a:sym typeface="Century Gothic"/>
-              </a:defRPr>
-            </a:lvl2pPr>
-            <a:lvl3pPr marL="1371600" marR="0" lvl="2" indent="-292100" algn="l" rtl="0">
-              <a:lnSpc>
-                <a:spcPct val="100000"/>
-              </a:lnSpc>
-              <a:spcBef>
-                <a:spcPts val="0"/>
-              </a:spcBef>
-              <a:spcAft>
-                <a:spcPts val="0"/>
-              </a:spcAft>
-              <a:buClr>
-                <a:schemeClr val="accent6"/>
-              </a:buClr>
-              <a:buSzPts val="1000"/>
-              <a:buFont typeface="Century Gothic"/>
-              <a:buChar char="+"/>
-              <a:defRPr sz="1000" b="0" i="0" u="none" strike="noStrike" cap="none">
-                <a:solidFill>
-                  <a:schemeClr val="dk1"/>
-                </a:solidFill>
-                <a:latin typeface="Century Gothic"/>
-                <a:ea typeface="Century Gothic"/>
-                <a:cs typeface="Century Gothic"/>
-                <a:sym typeface="Century Gothic"/>
-              </a:defRPr>
-            </a:lvl3pPr>
-            <a:lvl4pPr marL="1828800" marR="0" lvl="3" indent="-285750" algn="l" rtl="0">
-              <a:lnSpc>
-                <a:spcPct val="100000"/>
-              </a:lnSpc>
-              <a:spcBef>
-                <a:spcPts val="0"/>
-              </a:spcBef>
-              <a:spcAft>
-                <a:spcPts val="0"/>
-              </a:spcAft>
-              <a:buClr>
-                <a:schemeClr val="accent6"/>
-              </a:buClr>
-              <a:buSzPts val="900"/>
-              <a:buFont typeface="Courier New"/>
-              <a:buChar char="o"/>
-              <a:defRPr sz="900" b="0" i="0" u="none" strike="noStrike" cap="none">
-                <a:solidFill>
-                  <a:schemeClr val="dk1"/>
-                </a:solidFill>
-                <a:latin typeface="Century Gothic"/>
-                <a:ea typeface="Century Gothic"/>
-                <a:cs typeface="Century Gothic"/>
-                <a:sym typeface="Century Gothic"/>
-              </a:defRPr>
-            </a:lvl4pPr>
-            <a:lvl5pPr marL="2286000" marR="0" lvl="4" indent="-279400" algn="l" rtl="0">
-              <a:lnSpc>
-                <a:spcPct val="100000"/>
-              </a:lnSpc>
-              <a:spcBef>
-                <a:spcPts val="0"/>
-              </a:spcBef>
-              <a:spcAft>
-                <a:spcPts val="0"/>
-              </a:spcAft>
-              <a:buClr>
-                <a:schemeClr val="accent6"/>
-              </a:buClr>
-              <a:buSzPts val="800"/>
-              <a:buFont typeface="Century Gothic"/>
-              <a:buChar char="○"/>
-              <a:defRPr sz="800" b="0" i="0" u="none" strike="noStrike" cap="none">
-                <a:solidFill>
-                  <a:schemeClr val="dk1"/>
-                </a:solidFill>
-                <a:latin typeface="Century Gothic"/>
-                <a:ea typeface="Century Gothic"/>
-                <a:cs typeface="Century Gothic"/>
-                <a:sym typeface="Century Gothic"/>
-              </a:defRPr>
-            </a:lvl5pPr>
-            <a:lvl6pPr marL="2743200" marR="0" lvl="5" indent="-273050" algn="l" rtl="0">
-              <a:lnSpc>
-                <a:spcPct val="100000"/>
-              </a:lnSpc>
-              <a:spcBef>
-                <a:spcPts val="0"/>
-              </a:spcBef>
-              <a:spcAft>
-                <a:spcPts val="0"/>
-              </a:spcAft>
-              <a:buClr>
-                <a:schemeClr val="accent6"/>
-              </a:buClr>
-              <a:buSzPts val="700"/>
-              <a:buFont typeface="Century Gothic"/>
-              <a:buChar char="○"/>
-              <a:defRPr sz="700" b="0" i="0" u="none" strike="noStrike" cap="none">
-                <a:solidFill>
-                  <a:schemeClr val="dk1"/>
-                </a:solidFill>
-                <a:latin typeface="Century Gothic"/>
-                <a:ea typeface="Century Gothic"/>
-                <a:cs typeface="Century Gothic"/>
-                <a:sym typeface="Century Gothic"/>
-              </a:defRPr>
-            </a:lvl6pPr>
-            <a:lvl7pPr marL="3200400" marR="0" lvl="6" indent="-266700" algn="l" rtl="0">
-              <a:lnSpc>
-                <a:spcPct val="100000"/>
-              </a:lnSpc>
-              <a:spcBef>
-                <a:spcPts val="0"/>
-              </a:spcBef>
-              <a:spcAft>
-                <a:spcPts val="0"/>
-              </a:spcAft>
-              <a:buClr>
-                <a:schemeClr val="accent6"/>
-              </a:buClr>
-              <a:buSzPts val="600"/>
-              <a:buFont typeface="Century Gothic"/>
-              <a:buChar char="○"/>
-              <a:defRPr sz="600" b="0" i="0" u="none" strike="noStrike" cap="none">
-                <a:solidFill>
-                  <a:schemeClr val="dk1"/>
-                </a:solidFill>
-                <a:latin typeface="Century Gothic"/>
-                <a:ea typeface="Century Gothic"/>
-                <a:cs typeface="Century Gothic"/>
-                <a:sym typeface="Century Gothic"/>
-              </a:defRPr>
-            </a:lvl7pPr>
-            <a:lvl8pPr marL="3657600" marR="0" lvl="7" indent="-266700" algn="l" rtl="0">
-              <a:lnSpc>
-                <a:spcPct val="100000"/>
-              </a:lnSpc>
-              <a:spcBef>
-                <a:spcPts val="0"/>
-              </a:spcBef>
-              <a:spcAft>
-                <a:spcPts val="0"/>
-              </a:spcAft>
-              <a:buClr>
-                <a:schemeClr val="accent6"/>
-              </a:buClr>
-              <a:buSzPts val="600"/>
-              <a:buFont typeface="Century Gothic"/>
-              <a:buChar char="○"/>
-              <a:defRPr sz="600" b="0" i="0" u="none" strike="noStrike" cap="none">
-                <a:solidFill>
-                  <a:schemeClr val="dk1"/>
-                </a:solidFill>
-                <a:latin typeface="Century Gothic"/>
-                <a:ea typeface="Century Gothic"/>
-                <a:cs typeface="Century Gothic"/>
-                <a:sym typeface="Century Gothic"/>
-              </a:defRPr>
-            </a:lvl8pPr>
-            <a:lvl9pPr marL="4114800" marR="0" lvl="8" indent="-266700" algn="l" rtl="0">
-              <a:lnSpc>
-                <a:spcPct val="100000"/>
-              </a:lnSpc>
-              <a:spcBef>
-                <a:spcPts val="0"/>
-              </a:spcBef>
-              <a:spcAft>
-                <a:spcPts val="0"/>
-              </a:spcAft>
-              <a:buClr>
-                <a:schemeClr val="accent6"/>
-              </a:buClr>
-              <a:buSzPts val="600"/>
-              <a:buFont typeface="Century Gothic"/>
-              <a:buChar char="○"/>
-              <a:defRPr sz="600" b="0" i="0" u="none" strike="noStrike" cap="none">
-                <a:solidFill>
-                  <a:schemeClr val="accent6"/>
-                </a:solidFill>
-                <a:latin typeface="Century Gothic"/>
-                <a:ea typeface="Century Gothic"/>
-                <a:cs typeface="Century Gothic"/>
-                <a:sym typeface="Century Gothic"/>
-              </a:defRPr>
-            </a:lvl9pPr>
-          </a:lstStyle>
-          <a:p>
-            <a:endParaRPr/>
-          </a:p>
-        </p:txBody>
-      </p:sp>
-    </p:spTree>
-  </p:cSld>
-  <p:clrMap bg1="lt1" tx1="dk1" bg2="dk2" tx2="lt2" accent1="accent1" accent2="accent2" accent3="accent3" accent4="accent4" accent5="accent5" accent6="accent6" hlink="hlink" folHlink="folHlink"/>
-  <p:notesStyle>
-    <a:defPPr marR="0" lvl="0" algn="l" rtl="0">
-      <a:lnSpc>
-        <a:spcPct val="100000"/>
-      </a:lnSpc>
-      <a:spcBef>
-        <a:spcPts val="0"/>
-      </a:spcBef>
-      <a:spcAft>
-        <a:spcPts val="0"/>
-      </a:spcAft>
-    </a:defPPr>
-    <a:lvl1pPr marR="0" lvl="0" algn="l" rtl="0">
-      <a:lnSpc>
-        <a:spcPct val="100000"/>
-      </a:lnSpc>
-      <a:spcBef>
-        <a:spcPts val="0"/>
-      </a:spcBef>
-      <a:spcAft>
-        <a:spcPts val="0"/>
-      </a:spcAft>
-      <a:buClr>
-        <a:srgbClr val="000000"/>
-      </a:buClr>
-      <a:buFont typeface="Arial"/>
-      <a:defRPr sz="1400" b="0" i="0" u="none" strike="noStrike" cap="none">
-        <a:solidFill>
-          <a:srgbClr val="000000"/>
-        </a:solidFill>
-        <a:latin typeface="Arial"/>
-        <a:ea typeface="Arial"/>
-        <a:cs typeface="Arial"/>
-        <a:sym typeface="Arial"/>
-      </a:defRPr>
-    </a:lvl1pPr>
-    <a:lvl2pPr marR="0" lvl="1" algn="l" rtl="0">
-      <a:lnSpc>
-        <a:spcPct val="100000"/>
-      </a:lnSpc>
-      <a:spcBef>
-        <a:spcPts val="0"/>
-      </a:spcBef>
-      <a:spcAft>
-        <a:spcPts val="0"/>
-      </a:spcAft>
-      <a:buClr>
-        <a:srgbClr val="000000"/>
-      </a:buClr>
-      <a:buFont typeface="Arial"/>
-      <a:defRPr sz="1400" b="0" i="0" u="none" strike="noStrike" cap="none">
-        <a:solidFill>
-          <a:srgbClr val="000000"/>
-        </a:solidFill>
-        <a:latin typeface="Arial"/>
-        <a:ea typeface="Arial"/>
-        <a:cs typeface="Arial"/>
-        <a:sym typeface="Arial"/>
-      </a:defRPr>
-    </a:lvl2pPr>
-    <a:lvl3pPr marR="0" lvl="2" algn="l" rtl="0">
-      <a:lnSpc>
-        <a:spcPct val="100000"/>
-      </a:lnSpc>
-      <a:spcBef>
-        <a:spcPts val="0"/>
-      </a:spcBef>
-      <a:spcAft>
-        <a:spcPts val="0"/>
-      </a:spcAft>
-      <a:buClr>
-        <a:srgbClr val="000000"/>
-      </a:buClr>
-      <a:buFont typeface="Arial"/>
-      <a:defRPr sz="1400" b="0" i="0" u="none" strike="noStrike" cap="none">
-        <a:solidFill>
-          <a:srgbClr val="000000"/>
-        </a:solidFill>
-        <a:latin typeface="Arial"/>
-        <a:ea typeface="Arial"/>
-        <a:cs typeface="Arial"/>
-        <a:sym typeface="Arial"/>
-      </a:defRPr>
-    </a:lvl3pPr>
-    <a:lvl4pPr marR="0" lvl="3" algn="l" rtl="0">
-      <a:lnSpc>
-        <a:spcPct val="100000"/>
-      </a:lnSpc>
-      <a:spcBef>
-        <a:spcPts val="0"/>
-      </a:spcBef>
-      <a:spcAft>
-        <a:spcPts val="0"/>
-      </a:spcAft>
-      <a:buClr>
-        <a:srgbClr val="000000"/>
-      </a:buClr>
-      <a:buFont typeface="Arial"/>
-      <a:defRPr sz="1400" b="0" i="0" u="none" strike="noStrike" cap="none">
-        <a:solidFill>
-          <a:srgbClr val="000000"/>
-        </a:solidFill>
-        <a:latin typeface="Arial"/>
-        <a:ea typeface="Arial"/>
-        <a:cs typeface="Arial"/>
-        <a:sym typeface="Arial"/>
-      </a:defRPr>
-    </a:lvl4pPr>
-    <a:lvl5pPr marR="0" lvl="4" algn="l" rtl="0">
-      <a:lnSpc>
-        <a:spcPct val="100000"/>
-      </a:lnSpc>
-      <a:spcBef>
-        <a:spcPts val="0"/>
-      </a:spcBef>
-      <a:spcAft>
-        <a:spcPts val="0"/>
-      </a:spcAft>
-      <a:buClr>
-        <a:srgbClr val="000000"/>
-      </a:buClr>
-      <a:buFont typeface="Arial"/>
-      <a:defRPr sz="1400" b="0" i="0" u="none" strike="noStrike" cap="none">
-        <a:solidFill>
-          <a:srgbClr val="000000"/>
-        </a:solidFill>
-        <a:latin typeface="Arial"/>
-        <a:ea typeface="Arial"/>
-        <a:cs typeface="Arial"/>
-        <a:sym typeface="Arial"/>
-      </a:defRPr>
-    </a:lvl5pPr>
-    <a:lvl6pPr marR="0" lvl="5" algn="l" rtl="0">
-      <a:lnSpc>
-        <a:spcPct val="100000"/>
-      </a:lnSpc>
-      <a:spcBef>
-        <a:spcPts val="0"/>
-      </a:spcBef>
-      <a:spcAft>
-        <a:spcPts val="0"/>
-      </a:spcAft>
-      <a:buClr>
-        <a:srgbClr val="000000"/>
-      </a:buClr>
-      <a:buFont typeface="Arial"/>
-      <a:defRPr sz="1400" b="0" i="0" u="none" strike="noStrike" cap="none">
-        <a:solidFill>
-          <a:srgbClr val="000000"/>
-        </a:solidFill>
-        <a:latin typeface="Arial"/>
-        <a:ea typeface="Arial"/>
-        <a:cs typeface="Arial"/>
-        <a:sym typeface="Arial"/>
-      </a:defRPr>
-    </a:lvl6pPr>
-    <a:lvl7pPr marR="0" lvl="6" algn="l" rtl="0">
-      <a:lnSpc>
-        <a:spcPct val="100000"/>
-      </a:lnSpc>
-      <a:spcBef>
-        <a:spcPts val="0"/>
-      </a:spcBef>
-      <a:spcAft>
-        <a:spcPts val="0"/>
-      </a:spcAft>
-      <a:buClr>
-        <a:srgbClr val="000000"/>
-      </a:buClr>
-      <a:buFont typeface="Arial"/>
-      <a:defRPr sz="1400" b="0" i="0" u="none" strike="noStrike" cap="none">
-        <a:solidFill>
-          <a:srgbClr val="000000"/>
-        </a:solidFill>
-        <a:latin typeface="Arial"/>
-        <a:ea typeface="Arial"/>
-        <a:cs typeface="Arial"/>
-        <a:sym typeface="Arial"/>
-      </a:defRPr>
-    </a:lvl7pPr>
-    <a:lvl8pPr marR="0" lvl="7" algn="l" rtl="0">
-      <a:lnSpc>
-        <a:spcPct val="100000"/>
-      </a:lnSpc>
-      <a:spcBef>
-        <a:spcPts val="0"/>
-      </a:spcBef>
-      <a:spcAft>
-        <a:spcPts val="0"/>
-      </a:spcAft>
-      <a:buClr>
-        <a:srgbClr val="000000"/>
-      </a:buClr>
-      <a:buFont typeface="Arial"/>
-      <a:defRPr sz="1400" b="0" i="0" u="none" strike="noStrike" cap="none">
-        <a:solidFill>
-          <a:srgbClr val="000000"/>
-        </a:solidFill>
-        <a:latin typeface="Arial"/>
-        <a:ea typeface="Arial"/>
-        <a:cs typeface="Arial"/>
-        <a:sym typeface="Arial"/>
-      </a:defRPr>
-    </a:lvl8pPr>
-    <a:lvl9pPr marR="0" lvl="8" algn="l" rtl="0">
-      <a:lnSpc>
-        <a:spcPct val="100000"/>
-      </a:lnSpc>
-      <a:spcBef>
-        <a:spcPts val="0"/>
-      </a:spcBef>
-      <a:spcAft>
-        <a:spcPts val="0"/>
-      </a:spcAft>
-      <a:buClr>
-        <a:srgbClr val="000000"/>
-      </a:buClr>
-      <a:buFont typeface="Arial"/>
-      <a:defRPr sz="1400" b="0" i="0" u="none" strike="noStrike" cap="none">
-        <a:solidFill>
-          <a:srgbClr val="000000"/>
-        </a:solidFill>
-        <a:latin typeface="Arial"/>
-        <a:ea typeface="Arial"/>
-        <a:cs typeface="Arial"/>
-        <a:sym typeface="Arial"/>
-      </a:defRPr>
-    </a:lvl9pPr>
-  </p:notesStyle>
-</p:notesMaster>
-</file>
-
-<file path=ppt\notesSlides\notesSlide1.xml><?xml version="1.0" encoding="utf-8"?>
-<p:notes xmlns:a="http://schemas.openxmlformats.org/drawingml/2006/main" xmlns:r="http://schemas.openxmlformats.org/officeDocument/2006/relationships" xmlns:p="http://schemas.openxmlformats.org/presentationml/2006/main" showMasterSp="0" showMasterPhAnim="0">
-  <p:cSld>
-    <p:spTree>
-      <p:nvGrpSpPr>
-        <p:cNvPr id="1" name="Shape 206"/>
-        <p:cNvGrpSpPr/>
-        <p:nvPr/>
-      </p:nvGrpSpPr>
-      <p:grpSpPr>
-        <a:xfrm>
-          <a:off x="0" y="0"/>
-          <a:ext cx="0" cy="0"/>
-          <a:chOff x="0" y="0"/>
-          <a:chExt cx="0" cy="0"/>
-        </a:xfrm>
-      </p:grpSpPr>
-      <p:sp>
-        <p:nvSpPr>
-          <p:cNvPr id="207" name="Google Shape;207;g20c3afcc4d7_0_44918:notes"/>
-          <p:cNvSpPr txBox="1">
-            <a:spLocks noGrp="1"/>
-          </p:cNvSpPr>
-          <p:nvPr>
-            <p:ph type="body" idx="1"/>
-          </p:nvPr>
-        </p:nvSpPr>
-        <p:spPr>
-          <a:xfrm>
-            <a:off x="679780" y="4689516"/>
-            <a:ext cx="5438100" cy="4442700"/>
-          </a:xfrm>
-          <a:prstGeom prst="rect">
-            <a:avLst/>
-          </a:prstGeom>
-          <a:noFill/>
-          <a:ln>
-            <a:noFill/>
-          </a:ln>
-        </p:spPr>
-        <p:txBody>
-          <a:bodyPr spcFirstLastPara="1" wrap="square" lIns="91425" tIns="91425" rIns="91425" bIns="91425" anchor="t" anchorCtr="0">
-            <a:noAutofit/>
-          </a:bodyPr>
-          <a:lstStyle/>
-          <a:p>
-            <a:pPr marL="0" lvl="0" indent="0" algn="l" rtl="0">
-              <a:lnSpc>
-                <a:spcPct val="100000"/>
-              </a:lnSpc>
-              <a:spcBef>
-                <a:spcPts val="0"/>
-              </a:spcBef>
-              <a:spcAft>
-                <a:spcPts val="0"/>
-              </a:spcAft>
-              <a:buSzPts val="1400"/>
-              <a:buNone/>
-            </a:pPr>
-            <a:endParaRPr/>
-          </a:p>
-        </p:txBody>
-      </p:sp>
-      <p:sp>
-        <p:nvSpPr>
-          <p:cNvPr id="208" name="Google Shape;208;g20c3afcc4d7_0_44918:notes"/>
-          <p:cNvSpPr>
-            <a:spLocks noGrp="1" noRot="1" noChangeAspect="1"/>
-          </p:cNvSpPr>
-          <p:nvPr>
-            <p:ph type="sldImg" idx="2"/>
-          </p:nvPr>
-        </p:nvSpPr>
-        <p:spPr>
-          <a:xfrm>
-            <a:off x="103188" y="738188"/>
-            <a:ext cx="6591300" cy="3708400"/>
-          </a:xfrm>
-          <a:custGeom>
-            <a:avLst/>
-            <a:gdLst/>
-            <a:ahLst/>
-            <a:cxnLst/>
-            <a:rect l="l" t="t" r="r" b="b"/>
-            <a:pathLst>
-              <a:path w="120000" h="120000" extrusionOk="0">
-                <a:moveTo>
-                  <a:pt x="0" y="0"/>
-                </a:moveTo>
-                <a:lnTo>
-                  <a:pt x="120000" y="0"/>
-                </a:lnTo>
-                <a:lnTo>
-                  <a:pt x="120000" y="120000"/>
-                </a:lnTo>
-                <a:lnTo>
-                  <a:pt x="0" y="120000"/>
-                </a:lnTo>
-                <a:close/>
-              </a:path>
-            </a:pathLst>
-          </a:custGeom>
-          <a:noFill/>
-          <a:ln w="9525" cap="flat" cmpd="sng">
-            <a:solidFill>
-              <a:srgbClr val="000000"/>
-            </a:solidFill>
-            <a:prstDash val="solid"/>
-            <a:round/>
-            <a:headEnd type="none" w="sm" len="sm"/>
-            <a:tailEnd type="none" w="sm" len="sm"/>
-          </a:ln>
-        </p:spPr>
-      </p:sp>
-    </p:spTree>
-  </p:cSld>
-  <p:clrMapOvr>
-    <a:masterClrMapping/>
-  </p:clrMapOvr>
-</p:notes>
-</file>
-
-<file path=ppt\notesSlides\notesSlide2.xml><?xml version="1.0" encoding="utf-8"?>
-<p:notes xmlns:a="http://schemas.openxmlformats.org/drawingml/2006/main" xmlns:r="http://schemas.openxmlformats.org/officeDocument/2006/relationships" xmlns:p="http://schemas.openxmlformats.org/presentationml/2006/main" showMasterSp="0" showMasterPhAnim="0">
-  <p:cSld>
-    <p:spTree>
-      <p:nvGrpSpPr>
-        <p:cNvPr id="1" name="Shape 291"/>
-        <p:cNvGrpSpPr/>
-        <p:nvPr/>
-      </p:nvGrpSpPr>
-      <p:grpSpPr>
-        <a:xfrm>
-          <a:off x="0" y="0"/>
-          <a:ext cx="0" cy="0"/>
-          <a:chOff x="0" y="0"/>
-          <a:chExt cx="0" cy="0"/>
-        </a:xfrm>
-      </p:grpSpPr>
-      <p:sp>
-        <p:nvSpPr>
-          <p:cNvPr id="292" name="Google Shape;292;g3072d353d33_0_186:notes"/>
-          <p:cNvSpPr txBox="1">
-            <a:spLocks noGrp="1"/>
-          </p:cNvSpPr>
-          <p:nvPr>
-            <p:ph type="body" idx="1"/>
-          </p:nvPr>
-        </p:nvSpPr>
-        <p:spPr>
-          <a:xfrm>
-            <a:off x="691886" y="4022836"/>
-            <a:ext cx="5535000" cy="3811200"/>
-          </a:xfrm>
-          <a:prstGeom prst="rect">
-            <a:avLst/>
-          </a:prstGeom>
-          <a:noFill/>
-          <a:ln>
-            <a:noFill/>
-          </a:ln>
-        </p:spPr>
-        <p:txBody>
-          <a:bodyPr spcFirstLastPara="1" wrap="square" lIns="91425" tIns="91425" rIns="91425" bIns="91425" anchor="t" anchorCtr="0">
-            <a:noAutofit/>
-          </a:bodyPr>
-          <a:lstStyle/>
-          <a:p>
-            <a:pPr marL="0" lvl="0" indent="0" algn="l" rtl="0">
-              <a:lnSpc>
-                <a:spcPct val="100000"/>
-              </a:lnSpc>
-              <a:spcBef>
-                <a:spcPts val="0"/>
-              </a:spcBef>
-              <a:spcAft>
-                <a:spcPts val="0"/>
-              </a:spcAft>
-              <a:buSzPts val="1400"/>
-              <a:buNone/>
-            </a:pPr>
-            <a:endParaRPr/>
-          </a:p>
-        </p:txBody>
-      </p:sp>
-      <p:sp>
-        <p:nvSpPr>
-          <p:cNvPr id="293" name="Google Shape;293;g3072d353d33_0_186:notes"/>
-          <p:cNvSpPr>
-            <a:spLocks noGrp="1" noRot="1" noChangeAspect="1"/>
-          </p:cNvSpPr>
-          <p:nvPr>
-            <p:ph type="sldImg" idx="2"/>
-          </p:nvPr>
-        </p:nvSpPr>
-        <p:spPr>
-          <a:xfrm>
-            <a:off x="635000" y="635000"/>
-            <a:ext cx="5648325" cy="3176588"/>
-          </a:xfrm>
-          <a:custGeom>
-            <a:avLst/>
-            <a:gdLst/>
-            <a:ahLst/>
-            <a:cxnLst/>
-            <a:rect l="l" t="t" r="r" b="b"/>
-            <a:pathLst>
-              <a:path w="120000" h="120000" extrusionOk="0">
-                <a:moveTo>
-                  <a:pt x="0" y="0"/>
-                </a:moveTo>
-                <a:lnTo>
-                  <a:pt x="120000" y="0"/>
-                </a:lnTo>
-                <a:lnTo>
-                  <a:pt x="120000" y="120000"/>
-                </a:lnTo>
-                <a:lnTo>
-                  <a:pt x="0" y="120000"/>
-                </a:lnTo>
-                <a:close/>
-              </a:path>
-            </a:pathLst>
-          </a:custGeom>
-          <a:noFill/>
-          <a:ln w="9525" cap="flat" cmpd="sng">
-            <a:solidFill>
-              <a:srgbClr val="000000"/>
-            </a:solidFill>
-            <a:prstDash val="solid"/>
-            <a:round/>
-            <a:headEnd type="none" w="sm" len="sm"/>
-            <a:tailEnd type="none" w="sm" len="sm"/>
-          </a:ln>
-        </p:spPr>
-      </p:sp>
-    </p:spTree>
-  </p:cSld>
-  <p:clrMapOvr>
-    <a:masterClrMapping/>
-  </p:clrMapOvr>
-</p:notes>
-</file>
-
-<file path=ppt\notesSlides\notesSlide3.xml><?xml version="1.0" encoding="utf-8"?>
-<p:notes xmlns:a="http://schemas.openxmlformats.org/drawingml/2006/main" xmlns:r="http://schemas.openxmlformats.org/officeDocument/2006/relationships" xmlns:p="http://schemas.openxmlformats.org/presentationml/2006/main" showMasterSp="0" showMasterPhAnim="0">
-  <p:cSld>
-    <p:spTree>
-      <p:nvGrpSpPr>
-        <p:cNvPr id="1" name="Shape 363"/>
-        <p:cNvGrpSpPr/>
-        <p:nvPr/>
-      </p:nvGrpSpPr>
-      <p:grpSpPr>
-        <a:xfrm>
-          <a:off x="0" y="0"/>
-          <a:ext cx="0" cy="0"/>
-          <a:chOff x="0" y="0"/>
-          <a:chExt cx="0" cy="0"/>
-        </a:xfrm>
-      </p:grpSpPr>
-      <p:sp>
-        <p:nvSpPr>
-          <p:cNvPr id="364" name="Google Shape;364;g3072d353d33_0_212:notes"/>
-          <p:cNvSpPr txBox="1">
-            <a:spLocks noGrp="1"/>
-          </p:cNvSpPr>
-          <p:nvPr>
-            <p:ph type="body" idx="1"/>
-          </p:nvPr>
-        </p:nvSpPr>
-        <p:spPr>
-          <a:xfrm>
-            <a:off x="691886" y="4022836"/>
-            <a:ext cx="5535000" cy="3811200"/>
-          </a:xfrm>
-          <a:prstGeom prst="rect">
-            <a:avLst/>
-          </a:prstGeom>
-          <a:noFill/>
-          <a:ln>
-            <a:noFill/>
-          </a:ln>
-        </p:spPr>
-        <p:txBody>
-          <a:bodyPr spcFirstLastPara="1" wrap="square" lIns="91425" tIns="91425" rIns="91425" bIns="91425" anchor="t" anchorCtr="0">
-            <a:noAutofit/>
-          </a:bodyPr>
-          <a:lstStyle/>
-          <a:p>
-            <a:pPr marL="0" lvl="0" indent="0" algn="l" rtl="0">
-              <a:lnSpc>
-                <a:spcPct val="100000"/>
-              </a:lnSpc>
-              <a:spcBef>
-                <a:spcPts val="0"/>
-              </a:spcBef>
-              <a:spcAft>
-                <a:spcPts val="0"/>
-              </a:spcAft>
-              <a:buSzPts val="1400"/>
-              <a:buNone/>
-            </a:pPr>
-            <a:endParaRPr/>
-          </a:p>
-        </p:txBody>
-      </p:sp>
-      <p:sp>
-        <p:nvSpPr>
-          <p:cNvPr id="365" name="Google Shape;365;g3072d353d33_0_212:notes"/>
-          <p:cNvSpPr>
-            <a:spLocks noGrp="1" noRot="1" noChangeAspect="1"/>
-          </p:cNvSpPr>
-          <p:nvPr>
-            <p:ph type="sldImg" idx="2"/>
-          </p:nvPr>
-        </p:nvSpPr>
-        <p:spPr>
-          <a:xfrm>
-            <a:off x="635000" y="635000"/>
-            <a:ext cx="5648325" cy="3176588"/>
-          </a:xfrm>
-          <a:custGeom>
-            <a:avLst/>
-            <a:gdLst/>
-            <a:ahLst/>
-            <a:cxnLst/>
-            <a:rect l="l" t="t" r="r" b="b"/>
-            <a:pathLst>
-              <a:path w="120000" h="120000" extrusionOk="0">
-                <a:moveTo>
-                  <a:pt x="0" y="0"/>
-                </a:moveTo>
-                <a:lnTo>
-                  <a:pt x="120000" y="0"/>
-                </a:lnTo>
-                <a:lnTo>
-                  <a:pt x="120000" y="120000"/>
-                </a:lnTo>
-                <a:lnTo>
-                  <a:pt x="0" y="120000"/>
-                </a:lnTo>
-                <a:close/>
-              </a:path>
-            </a:pathLst>
-          </a:custGeom>
-          <a:noFill/>
-          <a:ln w="9525" cap="flat" cmpd="sng">
-            <a:solidFill>
-              <a:srgbClr val="000000"/>
-            </a:solidFill>
-            <a:prstDash val="solid"/>
-            <a:round/>
-            <a:headEnd type="none" w="sm" len="sm"/>
-            <a:tailEnd type="none" w="sm" len="sm"/>
-          </a:ln>
-        </p:spPr>
-      </p:sp>
-    </p:spTree>
-  </p:cSld>
-  <p:clrMapOvr>
-    <a:masterClrMapping/>
-  </p:clrMapOvr>
-</p:notes>
-</file>
-
-<file path=ppt\notesSlides\notesSlide4.xml><?xml version="1.0" encoding="utf-8"?>
-<p:notes xmlns:a="http://schemas.openxmlformats.org/drawingml/2006/main" xmlns:r="http://schemas.openxmlformats.org/officeDocument/2006/relationships" xmlns:p="http://schemas.openxmlformats.org/presentationml/2006/main" showMasterSp="0" showMasterPhAnim="0">
-  <p:cSld>
-    <p:spTree>
-      <p:nvGrpSpPr>
-        <p:cNvPr id="1" name="Shape 432"/>
-        <p:cNvGrpSpPr/>
-        <p:nvPr/>
-      </p:nvGrpSpPr>
-      <p:grpSpPr>
-        <a:xfrm>
-          <a:off x="0" y="0"/>
-          <a:ext cx="0" cy="0"/>
-          <a:chOff x="0" y="0"/>
-          <a:chExt cx="0" cy="0"/>
-        </a:xfrm>
-      </p:grpSpPr>
-      <p:sp>
-        <p:nvSpPr>
-          <p:cNvPr id="433" name="Google Shape;433;g3072d353d33_0_216:notes"/>
-          <p:cNvSpPr txBox="1">
-            <a:spLocks noGrp="1"/>
-          </p:cNvSpPr>
-          <p:nvPr>
-            <p:ph type="body" idx="1"/>
-          </p:nvPr>
-        </p:nvSpPr>
-        <p:spPr>
-          <a:xfrm>
-            <a:off x="691886" y="4022836"/>
-            <a:ext cx="5535000" cy="3811200"/>
-          </a:xfrm>
-          <a:prstGeom prst="rect">
-            <a:avLst/>
-          </a:prstGeom>
-          <a:noFill/>
-          <a:ln>
-            <a:noFill/>
-          </a:ln>
-        </p:spPr>
-        <p:txBody>
-          <a:bodyPr spcFirstLastPara="1" wrap="square" lIns="91425" tIns="91425" rIns="91425" bIns="91425" anchor="t" anchorCtr="0">
-            <a:noAutofit/>
-          </a:bodyPr>
-          <a:lstStyle/>
-          <a:p>
-            <a:pPr marL="0" lvl="0" indent="0" algn="l" rtl="0">
-              <a:lnSpc>
-                <a:spcPct val="100000"/>
-              </a:lnSpc>
-              <a:spcBef>
-                <a:spcPts val="0"/>
-              </a:spcBef>
-              <a:spcAft>
-                <a:spcPts val="0"/>
-              </a:spcAft>
-              <a:buSzPts val="1400"/>
-              <a:buNone/>
-            </a:pPr>
-            <a:endParaRPr/>
-          </a:p>
-        </p:txBody>
-      </p:sp>
-      <p:sp>
-        <p:nvSpPr>
-          <p:cNvPr id="434" name="Google Shape;434;g3072d353d33_0_216:notes"/>
-          <p:cNvSpPr>
-            <a:spLocks noGrp="1" noRot="1" noChangeAspect="1"/>
-          </p:cNvSpPr>
-          <p:nvPr>
-            <p:ph type="sldImg" idx="2"/>
-          </p:nvPr>
-        </p:nvSpPr>
-        <p:spPr>
-          <a:xfrm>
-            <a:off x="635000" y="635000"/>
-            <a:ext cx="5648325" cy="3176588"/>
-          </a:xfrm>
-          <a:custGeom>
-            <a:avLst/>
-            <a:gdLst/>
-            <a:ahLst/>
-            <a:cxnLst/>
-            <a:rect l="l" t="t" r="r" b="b"/>
-            <a:pathLst>
-              <a:path w="120000" h="120000" extrusionOk="0">
-                <a:moveTo>
-                  <a:pt x="0" y="0"/>
-                </a:moveTo>
-                <a:lnTo>
-                  <a:pt x="120000" y="0"/>
-                </a:lnTo>
-                <a:lnTo>
-                  <a:pt x="120000" y="120000"/>
-                </a:lnTo>
-                <a:lnTo>
-                  <a:pt x="0" y="120000"/>
-                </a:lnTo>
-                <a:close/>
-              </a:path>
-            </a:pathLst>
-          </a:custGeom>
-          <a:noFill/>
-          <a:ln w="9525" cap="flat" cmpd="sng">
-            <a:solidFill>
-              <a:srgbClr val="000000"/>
-            </a:solidFill>
-            <a:prstDash val="solid"/>
-            <a:round/>
-            <a:headEnd type="none" w="sm" len="sm"/>
-            <a:tailEnd type="none" w="sm" len="sm"/>
-          </a:ln>
-        </p:spPr>
-      </p:sp>
-    </p:spTree>
-  </p:cSld>
-  <p:clrMapOvr>
-    <a:masterClrMapping/>
-  </p:clrMapOvr>
-</p:notes>
-</file>
-
-<file path=ppt\presProps.xml><?xml version="1.0" encoding="utf-8"?>
-<p:presentationPr xmlns:a="http://schemas.openxmlformats.org/drawingml/2006/main" xmlns:r="http://schemas.openxmlformats.org/officeDocument/2006/relationships" xmlns:p="http://schemas.openxmlformats.org/presentationml/2006/main">
-  <p:extLst>
-    <p:ext uri="{E76CE94A-603C-4142-B9EB-6D1370010A27}">
-      <p14:discardImageEditData xmlns:p14="http://schemas.microsoft.com/office/powerpoint/2010/main" val="0"/>
-    </p:ext>
-    <p:ext uri="{D31A062A-798A-4329-ABDD-BBA856620510}">
-      <p14:defaultImageDpi xmlns:p14="http://schemas.microsoft.com/office/powerpoint/2010/main" val="220"/>
-    </p:ext>
-    <p:ext uri="{FD5EFAAD-0ECE-453E-9831-46B23BE46B34}">
-      <p15:chartTrackingRefBased xmlns:p15="http://schemas.microsoft.com/office/powerpoint/2012/main" val="0"/>
-    </p:ext>
-  </p:extLst>
-</p:presentationPr>
-</file>
-
-<file path=ppt\presentation.xml><?xml version="1.0" encoding="utf-8"?>
+<file path=ppt/presentation.xml><?xml version="1.0" encoding="utf-8"?>
 <p:presentation xmlns:a="http://schemas.openxmlformats.org/drawingml/2006/main" xmlns:r="http://schemas.openxmlformats.org/officeDocument/2006/relationships" xmlns:p="http://schemas.openxmlformats.org/presentationml/2006/main" strictFirstAndLastChars="0" embedTrueTypeFonts="1" saveSubsetFonts="1" autoCompressPictures="0">
   <p:sldMasterIdLst>
     <p:sldMasterId id="2147483648" r:id="rId1"/>
@@ -1512,7 +324,1074 @@
 </p:presentation>
 </file>
 
-<file path=ppt\slideLayouts\slideLayout1.xml><?xml version="1.0" encoding="utf-8"?>
+<file path=ppt/notesMasters/notesMaster1.xml><?xml version="1.0" encoding="utf-8"?>
+<p:notesMaster xmlns:a="http://schemas.openxmlformats.org/drawingml/2006/main" xmlns:r="http://schemas.openxmlformats.org/officeDocument/2006/relationships" xmlns:p="http://schemas.openxmlformats.org/presentationml/2006/main">
+  <p:cSld>
+    <p:bg>
+      <p:bgPr>
+        <a:solidFill>
+          <a:schemeClr val="lt1"/>
+        </a:solidFill>
+        <a:effectLst/>
+      </p:bgPr>
+    </p:bg>
+    <p:spTree>
+      <p:nvGrpSpPr>
+        <p:cNvPr id="1" name="Shape 2"/>
+        <p:cNvGrpSpPr/>
+        <p:nvPr/>
+      </p:nvGrpSpPr>
+      <p:grpSpPr>
+        <a:xfrm>
+          <a:off x="0" y="0"/>
+          <a:ext cx="0" cy="0"/>
+          <a:chOff x="0" y="0"/>
+          <a:chExt cx="0" cy="0"/>
+        </a:xfrm>
+      </p:grpSpPr>
+      <p:sp>
+        <p:nvSpPr>
+          <p:cNvPr id="3" name="Google Shape;3;n"/>
+          <p:cNvSpPr>
+            <a:spLocks noGrp="1" noRot="1" noChangeAspect="1"/>
+          </p:cNvSpPr>
+          <p:nvPr>
+            <p:ph type="sldImg" idx="2"/>
+          </p:nvPr>
+        </p:nvSpPr>
+        <p:spPr>
+          <a:xfrm>
+            <a:off x="381309" y="685800"/>
+            <a:ext cx="6096000" cy="3429000"/>
+          </a:xfrm>
+          <a:custGeom>
+            <a:avLst/>
+            <a:gdLst/>
+            <a:ahLst/>
+            <a:cxnLst/>
+            <a:rect l="l" t="t" r="r" b="b"/>
+            <a:pathLst>
+              <a:path w="120000" h="120000" extrusionOk="0">
+                <a:moveTo>
+                  <a:pt x="0" y="0"/>
+                </a:moveTo>
+                <a:lnTo>
+                  <a:pt x="120000" y="0"/>
+                </a:lnTo>
+                <a:lnTo>
+                  <a:pt x="120000" y="120000"/>
+                </a:lnTo>
+                <a:lnTo>
+                  <a:pt x="0" y="120000"/>
+                </a:lnTo>
+                <a:close/>
+              </a:path>
+            </a:pathLst>
+          </a:custGeom>
+          <a:noFill/>
+          <a:ln w="9525" cap="flat" cmpd="sng">
+            <a:solidFill>
+              <a:srgbClr val="000000"/>
+            </a:solidFill>
+            <a:prstDash val="solid"/>
+            <a:round/>
+            <a:headEnd type="none" w="sm" len="sm"/>
+            <a:tailEnd type="none" w="sm" len="sm"/>
+          </a:ln>
+        </p:spPr>
+      </p:sp>
+      <p:sp>
+        <p:nvSpPr>
+          <p:cNvPr id="4" name="Google Shape;4;n"/>
+          <p:cNvSpPr txBox="1">
+            <a:spLocks noGrp="1"/>
+          </p:cNvSpPr>
+          <p:nvPr>
+            <p:ph type="body" idx="1"/>
+          </p:nvPr>
+        </p:nvSpPr>
+        <p:spPr>
+          <a:xfrm>
+            <a:off x="685800" y="4343400"/>
+            <a:ext cx="5486400" cy="4114800"/>
+          </a:xfrm>
+          <a:prstGeom prst="rect">
+            <a:avLst/>
+          </a:prstGeom>
+          <a:noFill/>
+          <a:ln>
+            <a:noFill/>
+          </a:ln>
+        </p:spPr>
+        <p:txBody>
+          <a:bodyPr spcFirstLastPara="1" wrap="square" lIns="91425" tIns="91425" rIns="91425" bIns="91425" anchor="t" anchorCtr="0">
+            <a:noAutofit/>
+          </a:bodyPr>
+          <a:lstStyle>
+            <a:lvl1pPr marL="457200" marR="0" lvl="0" indent="-317500" algn="l" rtl="0">
+              <a:lnSpc>
+                <a:spcPct val="100000"/>
+              </a:lnSpc>
+              <a:spcBef>
+                <a:spcPts val="0"/>
+              </a:spcBef>
+              <a:spcAft>
+                <a:spcPts val="0"/>
+              </a:spcAft>
+              <a:buClr>
+                <a:schemeClr val="accent6"/>
+              </a:buClr>
+              <a:buSzPts val="1400"/>
+              <a:buFont typeface="Century Gothic"/>
+              <a:buChar char="๏"/>
+              <a:defRPr sz="1400" b="0" i="0" u="none" strike="noStrike" cap="none">
+                <a:solidFill>
+                  <a:schemeClr val="dk1"/>
+                </a:solidFill>
+                <a:latin typeface="Century Gothic"/>
+                <a:ea typeface="Century Gothic"/>
+                <a:cs typeface="Century Gothic"/>
+                <a:sym typeface="Century Gothic"/>
+              </a:defRPr>
+            </a:lvl1pPr>
+            <a:lvl2pPr marL="914400" marR="0" lvl="1" indent="-304800" algn="l" rtl="0">
+              <a:lnSpc>
+                <a:spcPct val="100000"/>
+              </a:lnSpc>
+              <a:spcBef>
+                <a:spcPts val="0"/>
+              </a:spcBef>
+              <a:spcAft>
+                <a:spcPts val="0"/>
+              </a:spcAft>
+              <a:buClr>
+                <a:schemeClr val="accent6"/>
+              </a:buClr>
+              <a:buSzPts val="1200"/>
+              <a:buFont typeface="Century Gothic"/>
+              <a:buChar char="&gt;"/>
+              <a:defRPr sz="1200" b="0" i="0" u="none" strike="noStrike" cap="none">
+                <a:solidFill>
+                  <a:schemeClr val="dk1"/>
+                </a:solidFill>
+                <a:latin typeface="Century Gothic"/>
+                <a:ea typeface="Century Gothic"/>
+                <a:cs typeface="Century Gothic"/>
+                <a:sym typeface="Century Gothic"/>
+              </a:defRPr>
+            </a:lvl2pPr>
+            <a:lvl3pPr marL="1371600" marR="0" lvl="2" indent="-292100" algn="l" rtl="0">
+              <a:lnSpc>
+                <a:spcPct val="100000"/>
+              </a:lnSpc>
+              <a:spcBef>
+                <a:spcPts val="0"/>
+              </a:spcBef>
+              <a:spcAft>
+                <a:spcPts val="0"/>
+              </a:spcAft>
+              <a:buClr>
+                <a:schemeClr val="accent6"/>
+              </a:buClr>
+              <a:buSzPts val="1000"/>
+              <a:buFont typeface="Century Gothic"/>
+              <a:buChar char="+"/>
+              <a:defRPr sz="1000" b="0" i="0" u="none" strike="noStrike" cap="none">
+                <a:solidFill>
+                  <a:schemeClr val="dk1"/>
+                </a:solidFill>
+                <a:latin typeface="Century Gothic"/>
+                <a:ea typeface="Century Gothic"/>
+                <a:cs typeface="Century Gothic"/>
+                <a:sym typeface="Century Gothic"/>
+              </a:defRPr>
+            </a:lvl3pPr>
+            <a:lvl4pPr marL="1828800" marR="0" lvl="3" indent="-285750" algn="l" rtl="0">
+              <a:lnSpc>
+                <a:spcPct val="100000"/>
+              </a:lnSpc>
+              <a:spcBef>
+                <a:spcPts val="0"/>
+              </a:spcBef>
+              <a:spcAft>
+                <a:spcPts val="0"/>
+              </a:spcAft>
+              <a:buClr>
+                <a:schemeClr val="accent6"/>
+              </a:buClr>
+              <a:buSzPts val="900"/>
+              <a:buFont typeface="Courier New"/>
+              <a:buChar char="o"/>
+              <a:defRPr sz="900" b="0" i="0" u="none" strike="noStrike" cap="none">
+                <a:solidFill>
+                  <a:schemeClr val="dk1"/>
+                </a:solidFill>
+                <a:latin typeface="Century Gothic"/>
+                <a:ea typeface="Century Gothic"/>
+                <a:cs typeface="Century Gothic"/>
+                <a:sym typeface="Century Gothic"/>
+              </a:defRPr>
+            </a:lvl4pPr>
+            <a:lvl5pPr marL="2286000" marR="0" lvl="4" indent="-279400" algn="l" rtl="0">
+              <a:lnSpc>
+                <a:spcPct val="100000"/>
+              </a:lnSpc>
+              <a:spcBef>
+                <a:spcPts val="0"/>
+              </a:spcBef>
+              <a:spcAft>
+                <a:spcPts val="0"/>
+              </a:spcAft>
+              <a:buClr>
+                <a:schemeClr val="accent6"/>
+              </a:buClr>
+              <a:buSzPts val="800"/>
+              <a:buFont typeface="Century Gothic"/>
+              <a:buChar char="○"/>
+              <a:defRPr sz="800" b="0" i="0" u="none" strike="noStrike" cap="none">
+                <a:solidFill>
+                  <a:schemeClr val="dk1"/>
+                </a:solidFill>
+                <a:latin typeface="Century Gothic"/>
+                <a:ea typeface="Century Gothic"/>
+                <a:cs typeface="Century Gothic"/>
+                <a:sym typeface="Century Gothic"/>
+              </a:defRPr>
+            </a:lvl5pPr>
+            <a:lvl6pPr marL="2743200" marR="0" lvl="5" indent="-273050" algn="l" rtl="0">
+              <a:lnSpc>
+                <a:spcPct val="100000"/>
+              </a:lnSpc>
+              <a:spcBef>
+                <a:spcPts val="0"/>
+              </a:spcBef>
+              <a:spcAft>
+                <a:spcPts val="0"/>
+              </a:spcAft>
+              <a:buClr>
+                <a:schemeClr val="accent6"/>
+              </a:buClr>
+              <a:buSzPts val="700"/>
+              <a:buFont typeface="Century Gothic"/>
+              <a:buChar char="○"/>
+              <a:defRPr sz="700" b="0" i="0" u="none" strike="noStrike" cap="none">
+                <a:solidFill>
+                  <a:schemeClr val="dk1"/>
+                </a:solidFill>
+                <a:latin typeface="Century Gothic"/>
+                <a:ea typeface="Century Gothic"/>
+                <a:cs typeface="Century Gothic"/>
+                <a:sym typeface="Century Gothic"/>
+              </a:defRPr>
+            </a:lvl6pPr>
+            <a:lvl7pPr marL="3200400" marR="0" lvl="6" indent="-266700" algn="l" rtl="0">
+              <a:lnSpc>
+                <a:spcPct val="100000"/>
+              </a:lnSpc>
+              <a:spcBef>
+                <a:spcPts val="0"/>
+              </a:spcBef>
+              <a:spcAft>
+                <a:spcPts val="0"/>
+              </a:spcAft>
+              <a:buClr>
+                <a:schemeClr val="accent6"/>
+              </a:buClr>
+              <a:buSzPts val="600"/>
+              <a:buFont typeface="Century Gothic"/>
+              <a:buChar char="○"/>
+              <a:defRPr sz="600" b="0" i="0" u="none" strike="noStrike" cap="none">
+                <a:solidFill>
+                  <a:schemeClr val="dk1"/>
+                </a:solidFill>
+                <a:latin typeface="Century Gothic"/>
+                <a:ea typeface="Century Gothic"/>
+                <a:cs typeface="Century Gothic"/>
+                <a:sym typeface="Century Gothic"/>
+              </a:defRPr>
+            </a:lvl7pPr>
+            <a:lvl8pPr marL="3657600" marR="0" lvl="7" indent="-266700" algn="l" rtl="0">
+              <a:lnSpc>
+                <a:spcPct val="100000"/>
+              </a:lnSpc>
+              <a:spcBef>
+                <a:spcPts val="0"/>
+              </a:spcBef>
+              <a:spcAft>
+                <a:spcPts val="0"/>
+              </a:spcAft>
+              <a:buClr>
+                <a:schemeClr val="accent6"/>
+              </a:buClr>
+              <a:buSzPts val="600"/>
+              <a:buFont typeface="Century Gothic"/>
+              <a:buChar char="○"/>
+              <a:defRPr sz="600" b="0" i="0" u="none" strike="noStrike" cap="none">
+                <a:solidFill>
+                  <a:schemeClr val="dk1"/>
+                </a:solidFill>
+                <a:latin typeface="Century Gothic"/>
+                <a:ea typeface="Century Gothic"/>
+                <a:cs typeface="Century Gothic"/>
+                <a:sym typeface="Century Gothic"/>
+              </a:defRPr>
+            </a:lvl8pPr>
+            <a:lvl9pPr marL="4114800" marR="0" lvl="8" indent="-266700" algn="l" rtl="0">
+              <a:lnSpc>
+                <a:spcPct val="100000"/>
+              </a:lnSpc>
+              <a:spcBef>
+                <a:spcPts val="0"/>
+              </a:spcBef>
+              <a:spcAft>
+                <a:spcPts val="0"/>
+              </a:spcAft>
+              <a:buClr>
+                <a:schemeClr val="accent6"/>
+              </a:buClr>
+              <a:buSzPts val="600"/>
+              <a:buFont typeface="Century Gothic"/>
+              <a:buChar char="○"/>
+              <a:defRPr sz="600" b="0" i="0" u="none" strike="noStrike" cap="none">
+                <a:solidFill>
+                  <a:schemeClr val="accent6"/>
+                </a:solidFill>
+                <a:latin typeface="Century Gothic"/>
+                <a:ea typeface="Century Gothic"/>
+                <a:cs typeface="Century Gothic"/>
+                <a:sym typeface="Century Gothic"/>
+              </a:defRPr>
+            </a:lvl9pPr>
+          </a:lstStyle>
+          <a:p>
+            <a:endParaRPr/>
+          </a:p>
+        </p:txBody>
+      </p:sp>
+    </p:spTree>
+  </p:cSld>
+  <p:clrMap bg1="lt1" tx1="dk1" bg2="dk2" tx2="lt2" accent1="accent1" accent2="accent2" accent3="accent3" accent4="accent4" accent5="accent5" accent6="accent6" hlink="hlink" folHlink="folHlink"/>
+  <p:notesStyle>
+    <a:defPPr marR="0" lvl="0" algn="l" rtl="0">
+      <a:lnSpc>
+        <a:spcPct val="100000"/>
+      </a:lnSpc>
+      <a:spcBef>
+        <a:spcPts val="0"/>
+      </a:spcBef>
+      <a:spcAft>
+        <a:spcPts val="0"/>
+      </a:spcAft>
+    </a:defPPr>
+    <a:lvl1pPr marR="0" lvl="0" algn="l" rtl="0">
+      <a:lnSpc>
+        <a:spcPct val="100000"/>
+      </a:lnSpc>
+      <a:spcBef>
+        <a:spcPts val="0"/>
+      </a:spcBef>
+      <a:spcAft>
+        <a:spcPts val="0"/>
+      </a:spcAft>
+      <a:buClr>
+        <a:srgbClr val="000000"/>
+      </a:buClr>
+      <a:buFont typeface="Arial"/>
+      <a:defRPr sz="1400" b="0" i="0" u="none" strike="noStrike" cap="none">
+        <a:solidFill>
+          <a:srgbClr val="000000"/>
+        </a:solidFill>
+        <a:latin typeface="Arial"/>
+        <a:ea typeface="Arial"/>
+        <a:cs typeface="Arial"/>
+        <a:sym typeface="Arial"/>
+      </a:defRPr>
+    </a:lvl1pPr>
+    <a:lvl2pPr marR="0" lvl="1" algn="l" rtl="0">
+      <a:lnSpc>
+        <a:spcPct val="100000"/>
+      </a:lnSpc>
+      <a:spcBef>
+        <a:spcPts val="0"/>
+      </a:spcBef>
+      <a:spcAft>
+        <a:spcPts val="0"/>
+      </a:spcAft>
+      <a:buClr>
+        <a:srgbClr val="000000"/>
+      </a:buClr>
+      <a:buFont typeface="Arial"/>
+      <a:defRPr sz="1400" b="0" i="0" u="none" strike="noStrike" cap="none">
+        <a:solidFill>
+          <a:srgbClr val="000000"/>
+        </a:solidFill>
+        <a:latin typeface="Arial"/>
+        <a:ea typeface="Arial"/>
+        <a:cs typeface="Arial"/>
+        <a:sym typeface="Arial"/>
+      </a:defRPr>
+    </a:lvl2pPr>
+    <a:lvl3pPr marR="0" lvl="2" algn="l" rtl="0">
+      <a:lnSpc>
+        <a:spcPct val="100000"/>
+      </a:lnSpc>
+      <a:spcBef>
+        <a:spcPts val="0"/>
+      </a:spcBef>
+      <a:spcAft>
+        <a:spcPts val="0"/>
+      </a:spcAft>
+      <a:buClr>
+        <a:srgbClr val="000000"/>
+      </a:buClr>
+      <a:buFont typeface="Arial"/>
+      <a:defRPr sz="1400" b="0" i="0" u="none" strike="noStrike" cap="none">
+        <a:solidFill>
+          <a:srgbClr val="000000"/>
+        </a:solidFill>
+        <a:latin typeface="Arial"/>
+        <a:ea typeface="Arial"/>
+        <a:cs typeface="Arial"/>
+        <a:sym typeface="Arial"/>
+      </a:defRPr>
+    </a:lvl3pPr>
+    <a:lvl4pPr marR="0" lvl="3" algn="l" rtl="0">
+      <a:lnSpc>
+        <a:spcPct val="100000"/>
+      </a:lnSpc>
+      <a:spcBef>
+        <a:spcPts val="0"/>
+      </a:spcBef>
+      <a:spcAft>
+        <a:spcPts val="0"/>
+      </a:spcAft>
+      <a:buClr>
+        <a:srgbClr val="000000"/>
+      </a:buClr>
+      <a:buFont typeface="Arial"/>
+      <a:defRPr sz="1400" b="0" i="0" u="none" strike="noStrike" cap="none">
+        <a:solidFill>
+          <a:srgbClr val="000000"/>
+        </a:solidFill>
+        <a:latin typeface="Arial"/>
+        <a:ea typeface="Arial"/>
+        <a:cs typeface="Arial"/>
+        <a:sym typeface="Arial"/>
+      </a:defRPr>
+    </a:lvl4pPr>
+    <a:lvl5pPr marR="0" lvl="4" algn="l" rtl="0">
+      <a:lnSpc>
+        <a:spcPct val="100000"/>
+      </a:lnSpc>
+      <a:spcBef>
+        <a:spcPts val="0"/>
+      </a:spcBef>
+      <a:spcAft>
+        <a:spcPts val="0"/>
+      </a:spcAft>
+      <a:buClr>
+        <a:srgbClr val="000000"/>
+      </a:buClr>
+      <a:buFont typeface="Arial"/>
+      <a:defRPr sz="1400" b="0" i="0" u="none" strike="noStrike" cap="none">
+        <a:solidFill>
+          <a:srgbClr val="000000"/>
+        </a:solidFill>
+        <a:latin typeface="Arial"/>
+        <a:ea typeface="Arial"/>
+        <a:cs typeface="Arial"/>
+        <a:sym typeface="Arial"/>
+      </a:defRPr>
+    </a:lvl5pPr>
+    <a:lvl6pPr marR="0" lvl="5" algn="l" rtl="0">
+      <a:lnSpc>
+        <a:spcPct val="100000"/>
+      </a:lnSpc>
+      <a:spcBef>
+        <a:spcPts val="0"/>
+      </a:spcBef>
+      <a:spcAft>
+        <a:spcPts val="0"/>
+      </a:spcAft>
+      <a:buClr>
+        <a:srgbClr val="000000"/>
+      </a:buClr>
+      <a:buFont typeface="Arial"/>
+      <a:defRPr sz="1400" b="0" i="0" u="none" strike="noStrike" cap="none">
+        <a:solidFill>
+          <a:srgbClr val="000000"/>
+        </a:solidFill>
+        <a:latin typeface="Arial"/>
+        <a:ea typeface="Arial"/>
+        <a:cs typeface="Arial"/>
+        <a:sym typeface="Arial"/>
+      </a:defRPr>
+    </a:lvl6pPr>
+    <a:lvl7pPr marR="0" lvl="6" algn="l" rtl="0">
+      <a:lnSpc>
+        <a:spcPct val="100000"/>
+      </a:lnSpc>
+      <a:spcBef>
+        <a:spcPts val="0"/>
+      </a:spcBef>
+      <a:spcAft>
+        <a:spcPts val="0"/>
+      </a:spcAft>
+      <a:buClr>
+        <a:srgbClr val="000000"/>
+      </a:buClr>
+      <a:buFont typeface="Arial"/>
+      <a:defRPr sz="1400" b="0" i="0" u="none" strike="noStrike" cap="none">
+        <a:solidFill>
+          <a:srgbClr val="000000"/>
+        </a:solidFill>
+        <a:latin typeface="Arial"/>
+        <a:ea typeface="Arial"/>
+        <a:cs typeface="Arial"/>
+        <a:sym typeface="Arial"/>
+      </a:defRPr>
+    </a:lvl7pPr>
+    <a:lvl8pPr marR="0" lvl="7" algn="l" rtl="0">
+      <a:lnSpc>
+        <a:spcPct val="100000"/>
+      </a:lnSpc>
+      <a:spcBef>
+        <a:spcPts val="0"/>
+      </a:spcBef>
+      <a:spcAft>
+        <a:spcPts val="0"/>
+      </a:spcAft>
+      <a:buClr>
+        <a:srgbClr val="000000"/>
+      </a:buClr>
+      <a:buFont typeface="Arial"/>
+      <a:defRPr sz="1400" b="0" i="0" u="none" strike="noStrike" cap="none">
+        <a:solidFill>
+          <a:srgbClr val="000000"/>
+        </a:solidFill>
+        <a:latin typeface="Arial"/>
+        <a:ea typeface="Arial"/>
+        <a:cs typeface="Arial"/>
+        <a:sym typeface="Arial"/>
+      </a:defRPr>
+    </a:lvl8pPr>
+    <a:lvl9pPr marR="0" lvl="8" algn="l" rtl="0">
+      <a:lnSpc>
+        <a:spcPct val="100000"/>
+      </a:lnSpc>
+      <a:spcBef>
+        <a:spcPts val="0"/>
+      </a:spcBef>
+      <a:spcAft>
+        <a:spcPts val="0"/>
+      </a:spcAft>
+      <a:buClr>
+        <a:srgbClr val="000000"/>
+      </a:buClr>
+      <a:buFont typeface="Arial"/>
+      <a:defRPr sz="1400" b="0" i="0" u="none" strike="noStrike" cap="none">
+        <a:solidFill>
+          <a:srgbClr val="000000"/>
+        </a:solidFill>
+        <a:latin typeface="Arial"/>
+        <a:ea typeface="Arial"/>
+        <a:cs typeface="Arial"/>
+        <a:sym typeface="Arial"/>
+      </a:defRPr>
+    </a:lvl9pPr>
+  </p:notesStyle>
+</p:notesMaster>
+</file>
+
+<file path=ppt/notesSlides/notesSlide1.xml><?xml version="1.0" encoding="utf-8"?>
+<p:notes xmlns:a="http://schemas.openxmlformats.org/drawingml/2006/main" xmlns:r="http://schemas.openxmlformats.org/officeDocument/2006/relationships" xmlns:p="http://schemas.openxmlformats.org/presentationml/2006/main" showMasterSp="0" showMasterPhAnim="0">
+  <p:cSld>
+    <p:spTree>
+      <p:nvGrpSpPr>
+        <p:cNvPr id="1" name="Shape 206"/>
+        <p:cNvGrpSpPr/>
+        <p:nvPr/>
+      </p:nvGrpSpPr>
+      <p:grpSpPr>
+        <a:xfrm>
+          <a:off x="0" y="0"/>
+          <a:ext cx="0" cy="0"/>
+          <a:chOff x="0" y="0"/>
+          <a:chExt cx="0" cy="0"/>
+        </a:xfrm>
+      </p:grpSpPr>
+      <p:sp>
+        <p:nvSpPr>
+          <p:cNvPr id="207" name="Google Shape;207;g20c3afcc4d7_0_44918:notes"/>
+          <p:cNvSpPr txBox="1">
+            <a:spLocks noGrp="1"/>
+          </p:cNvSpPr>
+          <p:nvPr>
+            <p:ph type="body" idx="1"/>
+          </p:nvPr>
+        </p:nvSpPr>
+        <p:spPr>
+          <a:xfrm>
+            <a:off x="679780" y="4689516"/>
+            <a:ext cx="5438100" cy="4442700"/>
+          </a:xfrm>
+          <a:prstGeom prst="rect">
+            <a:avLst/>
+          </a:prstGeom>
+          <a:noFill/>
+          <a:ln>
+            <a:noFill/>
+          </a:ln>
+        </p:spPr>
+        <p:txBody>
+          <a:bodyPr spcFirstLastPara="1" wrap="square" lIns="91425" tIns="91425" rIns="91425" bIns="91425" anchor="t" anchorCtr="0">
+            <a:noAutofit/>
+          </a:bodyPr>
+          <a:lstStyle/>
+          <a:p>
+            <a:pPr marL="0" lvl="0" indent="0" algn="l" rtl="0">
+              <a:lnSpc>
+                <a:spcPct val="100000"/>
+              </a:lnSpc>
+              <a:spcBef>
+                <a:spcPts val="0"/>
+              </a:spcBef>
+              <a:spcAft>
+                <a:spcPts val="0"/>
+              </a:spcAft>
+              <a:buSzPts val="1400"/>
+              <a:buNone/>
+            </a:pPr>
+            <a:endParaRPr/>
+          </a:p>
+        </p:txBody>
+      </p:sp>
+      <p:sp>
+        <p:nvSpPr>
+          <p:cNvPr id="208" name="Google Shape;208;g20c3afcc4d7_0_44918:notes"/>
+          <p:cNvSpPr>
+            <a:spLocks noGrp="1" noRot="1" noChangeAspect="1"/>
+          </p:cNvSpPr>
+          <p:nvPr>
+            <p:ph type="sldImg" idx="2"/>
+          </p:nvPr>
+        </p:nvSpPr>
+        <p:spPr>
+          <a:xfrm>
+            <a:off x="103188" y="738188"/>
+            <a:ext cx="6591300" cy="3708400"/>
+          </a:xfrm>
+          <a:custGeom>
+            <a:avLst/>
+            <a:gdLst/>
+            <a:ahLst/>
+            <a:cxnLst/>
+            <a:rect l="l" t="t" r="r" b="b"/>
+            <a:pathLst>
+              <a:path w="120000" h="120000" extrusionOk="0">
+                <a:moveTo>
+                  <a:pt x="0" y="0"/>
+                </a:moveTo>
+                <a:lnTo>
+                  <a:pt x="120000" y="0"/>
+                </a:lnTo>
+                <a:lnTo>
+                  <a:pt x="120000" y="120000"/>
+                </a:lnTo>
+                <a:lnTo>
+                  <a:pt x="0" y="120000"/>
+                </a:lnTo>
+                <a:close/>
+              </a:path>
+            </a:pathLst>
+          </a:custGeom>
+          <a:noFill/>
+          <a:ln w="9525" cap="flat" cmpd="sng">
+            <a:solidFill>
+              <a:srgbClr val="000000"/>
+            </a:solidFill>
+            <a:prstDash val="solid"/>
+            <a:round/>
+            <a:headEnd type="none" w="sm" len="sm"/>
+            <a:tailEnd type="none" w="sm" len="sm"/>
+          </a:ln>
+        </p:spPr>
+      </p:sp>
+    </p:spTree>
+  </p:cSld>
+  <p:clrMapOvr>
+    <a:masterClrMapping/>
+  </p:clrMapOvr>
+</p:notes>
+</file>
+
+<file path=ppt/notesSlides/notesSlide2.xml><?xml version="1.0" encoding="utf-8"?>
+<p:notes xmlns:a="http://schemas.openxmlformats.org/drawingml/2006/main" xmlns:r="http://schemas.openxmlformats.org/officeDocument/2006/relationships" xmlns:p="http://schemas.openxmlformats.org/presentationml/2006/main" showMasterSp="0" showMasterPhAnim="0">
+  <p:cSld>
+    <p:spTree>
+      <p:nvGrpSpPr>
+        <p:cNvPr id="1" name="Shape 291"/>
+        <p:cNvGrpSpPr/>
+        <p:nvPr/>
+      </p:nvGrpSpPr>
+      <p:grpSpPr>
+        <a:xfrm>
+          <a:off x="0" y="0"/>
+          <a:ext cx="0" cy="0"/>
+          <a:chOff x="0" y="0"/>
+          <a:chExt cx="0" cy="0"/>
+        </a:xfrm>
+      </p:grpSpPr>
+      <p:sp>
+        <p:nvSpPr>
+          <p:cNvPr id="292" name="Google Shape;292;g3072d353d33_0_186:notes"/>
+          <p:cNvSpPr txBox="1">
+            <a:spLocks noGrp="1"/>
+          </p:cNvSpPr>
+          <p:nvPr>
+            <p:ph type="body" idx="1"/>
+          </p:nvPr>
+        </p:nvSpPr>
+        <p:spPr>
+          <a:xfrm>
+            <a:off x="691886" y="4022836"/>
+            <a:ext cx="5535000" cy="3811200"/>
+          </a:xfrm>
+          <a:prstGeom prst="rect">
+            <a:avLst/>
+          </a:prstGeom>
+          <a:noFill/>
+          <a:ln>
+            <a:noFill/>
+          </a:ln>
+        </p:spPr>
+        <p:txBody>
+          <a:bodyPr spcFirstLastPara="1" wrap="square" lIns="91425" tIns="91425" rIns="91425" bIns="91425" anchor="t" anchorCtr="0">
+            <a:noAutofit/>
+          </a:bodyPr>
+          <a:lstStyle/>
+          <a:p>
+            <a:pPr marL="0" lvl="0" indent="0" algn="l" rtl="0">
+              <a:lnSpc>
+                <a:spcPct val="100000"/>
+              </a:lnSpc>
+              <a:spcBef>
+                <a:spcPts val="0"/>
+              </a:spcBef>
+              <a:spcAft>
+                <a:spcPts val="0"/>
+              </a:spcAft>
+              <a:buSzPts val="1400"/>
+              <a:buNone/>
+            </a:pPr>
+            <a:endParaRPr/>
+          </a:p>
+        </p:txBody>
+      </p:sp>
+      <p:sp>
+        <p:nvSpPr>
+          <p:cNvPr id="293" name="Google Shape;293;g3072d353d33_0_186:notes"/>
+          <p:cNvSpPr>
+            <a:spLocks noGrp="1" noRot="1" noChangeAspect="1"/>
+          </p:cNvSpPr>
+          <p:nvPr>
+            <p:ph type="sldImg" idx="2"/>
+          </p:nvPr>
+        </p:nvSpPr>
+        <p:spPr>
+          <a:xfrm>
+            <a:off x="635000" y="635000"/>
+            <a:ext cx="5648325" cy="3176588"/>
+          </a:xfrm>
+          <a:custGeom>
+            <a:avLst/>
+            <a:gdLst/>
+            <a:ahLst/>
+            <a:cxnLst/>
+            <a:rect l="l" t="t" r="r" b="b"/>
+            <a:pathLst>
+              <a:path w="120000" h="120000" extrusionOk="0">
+                <a:moveTo>
+                  <a:pt x="0" y="0"/>
+                </a:moveTo>
+                <a:lnTo>
+                  <a:pt x="120000" y="0"/>
+                </a:lnTo>
+                <a:lnTo>
+                  <a:pt x="120000" y="120000"/>
+                </a:lnTo>
+                <a:lnTo>
+                  <a:pt x="0" y="120000"/>
+                </a:lnTo>
+                <a:close/>
+              </a:path>
+            </a:pathLst>
+          </a:custGeom>
+          <a:noFill/>
+          <a:ln w="9525" cap="flat" cmpd="sng">
+            <a:solidFill>
+              <a:srgbClr val="000000"/>
+            </a:solidFill>
+            <a:prstDash val="solid"/>
+            <a:round/>
+            <a:headEnd type="none" w="sm" len="sm"/>
+            <a:tailEnd type="none" w="sm" len="sm"/>
+          </a:ln>
+        </p:spPr>
+      </p:sp>
+    </p:spTree>
+  </p:cSld>
+  <p:clrMapOvr>
+    <a:masterClrMapping/>
+  </p:clrMapOvr>
+</p:notes>
+</file>
+
+<file path=ppt/notesSlides/notesSlide3.xml><?xml version="1.0" encoding="utf-8"?>
+<p:notes xmlns:a="http://schemas.openxmlformats.org/drawingml/2006/main" xmlns:r="http://schemas.openxmlformats.org/officeDocument/2006/relationships" xmlns:p="http://schemas.openxmlformats.org/presentationml/2006/main" showMasterSp="0" showMasterPhAnim="0">
+  <p:cSld>
+    <p:spTree>
+      <p:nvGrpSpPr>
+        <p:cNvPr id="1" name="Shape 363"/>
+        <p:cNvGrpSpPr/>
+        <p:nvPr/>
+      </p:nvGrpSpPr>
+      <p:grpSpPr>
+        <a:xfrm>
+          <a:off x="0" y="0"/>
+          <a:ext cx="0" cy="0"/>
+          <a:chOff x="0" y="0"/>
+          <a:chExt cx="0" cy="0"/>
+        </a:xfrm>
+      </p:grpSpPr>
+      <p:sp>
+        <p:nvSpPr>
+          <p:cNvPr id="364" name="Google Shape;364;g3072d353d33_0_212:notes"/>
+          <p:cNvSpPr txBox="1">
+            <a:spLocks noGrp="1"/>
+          </p:cNvSpPr>
+          <p:nvPr>
+            <p:ph type="body" idx="1"/>
+          </p:nvPr>
+        </p:nvSpPr>
+        <p:spPr>
+          <a:xfrm>
+            <a:off x="691886" y="4022836"/>
+            <a:ext cx="5535000" cy="3811200"/>
+          </a:xfrm>
+          <a:prstGeom prst="rect">
+            <a:avLst/>
+          </a:prstGeom>
+          <a:noFill/>
+          <a:ln>
+            <a:noFill/>
+          </a:ln>
+        </p:spPr>
+        <p:txBody>
+          <a:bodyPr spcFirstLastPara="1" wrap="square" lIns="91425" tIns="91425" rIns="91425" bIns="91425" anchor="t" anchorCtr="0">
+            <a:noAutofit/>
+          </a:bodyPr>
+          <a:lstStyle/>
+          <a:p>
+            <a:pPr marL="0" lvl="0" indent="0" algn="l" rtl="0">
+              <a:lnSpc>
+                <a:spcPct val="100000"/>
+              </a:lnSpc>
+              <a:spcBef>
+                <a:spcPts val="0"/>
+              </a:spcBef>
+              <a:spcAft>
+                <a:spcPts val="0"/>
+              </a:spcAft>
+              <a:buSzPts val="1400"/>
+              <a:buNone/>
+            </a:pPr>
+            <a:endParaRPr/>
+          </a:p>
+        </p:txBody>
+      </p:sp>
+      <p:sp>
+        <p:nvSpPr>
+          <p:cNvPr id="365" name="Google Shape;365;g3072d353d33_0_212:notes"/>
+          <p:cNvSpPr>
+            <a:spLocks noGrp="1" noRot="1" noChangeAspect="1"/>
+          </p:cNvSpPr>
+          <p:nvPr>
+            <p:ph type="sldImg" idx="2"/>
+          </p:nvPr>
+        </p:nvSpPr>
+        <p:spPr>
+          <a:xfrm>
+            <a:off x="635000" y="635000"/>
+            <a:ext cx="5648325" cy="3176588"/>
+          </a:xfrm>
+          <a:custGeom>
+            <a:avLst/>
+            <a:gdLst/>
+            <a:ahLst/>
+            <a:cxnLst/>
+            <a:rect l="l" t="t" r="r" b="b"/>
+            <a:pathLst>
+              <a:path w="120000" h="120000" extrusionOk="0">
+                <a:moveTo>
+                  <a:pt x="0" y="0"/>
+                </a:moveTo>
+                <a:lnTo>
+                  <a:pt x="120000" y="0"/>
+                </a:lnTo>
+                <a:lnTo>
+                  <a:pt x="120000" y="120000"/>
+                </a:lnTo>
+                <a:lnTo>
+                  <a:pt x="0" y="120000"/>
+                </a:lnTo>
+                <a:close/>
+              </a:path>
+            </a:pathLst>
+          </a:custGeom>
+          <a:noFill/>
+          <a:ln w="9525" cap="flat" cmpd="sng">
+            <a:solidFill>
+              <a:srgbClr val="000000"/>
+            </a:solidFill>
+            <a:prstDash val="solid"/>
+            <a:round/>
+            <a:headEnd type="none" w="sm" len="sm"/>
+            <a:tailEnd type="none" w="sm" len="sm"/>
+          </a:ln>
+        </p:spPr>
+      </p:sp>
+    </p:spTree>
+  </p:cSld>
+  <p:clrMapOvr>
+    <a:masterClrMapping/>
+  </p:clrMapOvr>
+</p:notes>
+</file>
+
+<file path=ppt/notesSlides/notesSlide4.xml><?xml version="1.0" encoding="utf-8"?>
+<p:notes xmlns:a="http://schemas.openxmlformats.org/drawingml/2006/main" xmlns:r="http://schemas.openxmlformats.org/officeDocument/2006/relationships" xmlns:p="http://schemas.openxmlformats.org/presentationml/2006/main" showMasterSp="0" showMasterPhAnim="0">
+  <p:cSld>
+    <p:spTree>
+      <p:nvGrpSpPr>
+        <p:cNvPr id="1" name="Shape 432"/>
+        <p:cNvGrpSpPr/>
+        <p:nvPr/>
+      </p:nvGrpSpPr>
+      <p:grpSpPr>
+        <a:xfrm>
+          <a:off x="0" y="0"/>
+          <a:ext cx="0" cy="0"/>
+          <a:chOff x="0" y="0"/>
+          <a:chExt cx="0" cy="0"/>
+        </a:xfrm>
+      </p:grpSpPr>
+      <p:sp>
+        <p:nvSpPr>
+          <p:cNvPr id="433" name="Google Shape;433;g3072d353d33_0_216:notes"/>
+          <p:cNvSpPr txBox="1">
+            <a:spLocks noGrp="1"/>
+          </p:cNvSpPr>
+          <p:nvPr>
+            <p:ph type="body" idx="1"/>
+          </p:nvPr>
+        </p:nvSpPr>
+        <p:spPr>
+          <a:xfrm>
+            <a:off x="691886" y="4022836"/>
+            <a:ext cx="5535000" cy="3811200"/>
+          </a:xfrm>
+          <a:prstGeom prst="rect">
+            <a:avLst/>
+          </a:prstGeom>
+          <a:noFill/>
+          <a:ln>
+            <a:noFill/>
+          </a:ln>
+        </p:spPr>
+        <p:txBody>
+          <a:bodyPr spcFirstLastPara="1" wrap="square" lIns="91425" tIns="91425" rIns="91425" bIns="91425" anchor="t" anchorCtr="0">
+            <a:noAutofit/>
+          </a:bodyPr>
+          <a:lstStyle/>
+          <a:p>
+            <a:pPr marL="0" lvl="0" indent="0" algn="l" rtl="0">
+              <a:lnSpc>
+                <a:spcPct val="100000"/>
+              </a:lnSpc>
+              <a:spcBef>
+                <a:spcPts val="0"/>
+              </a:spcBef>
+              <a:spcAft>
+                <a:spcPts val="0"/>
+              </a:spcAft>
+              <a:buSzPts val="1400"/>
+              <a:buNone/>
+            </a:pPr>
+            <a:endParaRPr/>
+          </a:p>
+        </p:txBody>
+      </p:sp>
+      <p:sp>
+        <p:nvSpPr>
+          <p:cNvPr id="434" name="Google Shape;434;g3072d353d33_0_216:notes"/>
+          <p:cNvSpPr>
+            <a:spLocks noGrp="1" noRot="1" noChangeAspect="1"/>
+          </p:cNvSpPr>
+          <p:nvPr>
+            <p:ph type="sldImg" idx="2"/>
+          </p:nvPr>
+        </p:nvSpPr>
+        <p:spPr>
+          <a:xfrm>
+            <a:off x="635000" y="635000"/>
+            <a:ext cx="5648325" cy="3176588"/>
+          </a:xfrm>
+          <a:custGeom>
+            <a:avLst/>
+            <a:gdLst/>
+            <a:ahLst/>
+            <a:cxnLst/>
+            <a:rect l="l" t="t" r="r" b="b"/>
+            <a:pathLst>
+              <a:path w="120000" h="120000" extrusionOk="0">
+                <a:moveTo>
+                  <a:pt x="0" y="0"/>
+                </a:moveTo>
+                <a:lnTo>
+                  <a:pt x="120000" y="0"/>
+                </a:lnTo>
+                <a:lnTo>
+                  <a:pt x="120000" y="120000"/>
+                </a:lnTo>
+                <a:lnTo>
+                  <a:pt x="0" y="120000"/>
+                </a:lnTo>
+                <a:close/>
+              </a:path>
+            </a:pathLst>
+          </a:custGeom>
+          <a:noFill/>
+          <a:ln w="9525" cap="flat" cmpd="sng">
+            <a:solidFill>
+              <a:srgbClr val="000000"/>
+            </a:solidFill>
+            <a:prstDash val="solid"/>
+            <a:round/>
+            <a:headEnd type="none" w="sm" len="sm"/>
+            <a:tailEnd type="none" w="sm" len="sm"/>
+          </a:ln>
+        </p:spPr>
+      </p:sp>
+    </p:spTree>
+  </p:cSld>
+  <p:clrMapOvr>
+    <a:masterClrMapping/>
+  </p:clrMapOvr>
+</p:notes>
+</file>
+
+<file path=ppt/slideLayouts/slideLayout1.xml><?xml version="1.0" encoding="utf-8"?>
 <p:sldLayout xmlns:a="http://schemas.openxmlformats.org/drawingml/2006/main" xmlns:r="http://schemas.openxmlformats.org/officeDocument/2006/relationships" xmlns:p="http://schemas.openxmlformats.org/presentationml/2006/main" showMasterSp="0" matchingName="3_Titre">
   <p:cSld name="3_Titre">
     <p:spTree>
@@ -2264,7 +2143,7 @@
 </p:sldLayout>
 </file>
 
-<file path=ppt\slideLayouts\slideLayout10.xml><?xml version="1.0" encoding="utf-8"?>
+<file path=ppt/slideLayouts/slideLayout10.xml><?xml version="1.0" encoding="utf-8"?>
 <p:sldLayout xmlns:a="http://schemas.openxmlformats.org/drawingml/2006/main" xmlns:r="http://schemas.openxmlformats.org/officeDocument/2006/relationships" xmlns:p="http://schemas.openxmlformats.org/presentationml/2006/main" showMasterSp="0" matchingName="51 - Chapitre [2]">
   <p:cSld name="51 - Chapitre [2]">
     <p:bg>
@@ -2756,7 +2635,7 @@
 </p:sldLayout>
 </file>
 
-<file path=ppt\slideLayouts\slideLayout11.xml><?xml version="1.0" encoding="utf-8"?>
+<file path=ppt/slideLayouts/slideLayout11.xml><?xml version="1.0" encoding="utf-8"?>
 <p:sldLayout xmlns:a="http://schemas.openxmlformats.org/drawingml/2006/main" xmlns:r="http://schemas.openxmlformats.org/officeDocument/2006/relationships" xmlns:p="http://schemas.openxmlformats.org/presentationml/2006/main" showMasterSp="0" matchingName="59 - There is a better way">
   <p:cSld name="59 - There is a better way">
     <p:bg>
@@ -2789,7 +2668,7 @@
 </p:sldLayout>
 </file>
 
-<file path=ppt\slideLayouts\slideLayout12.xml><?xml version="1.0" encoding="utf-8"?>
+<file path=ppt/slideLayouts/slideLayout12.xml><?xml version="1.0" encoding="utf-8"?>
 <p:sldLayout xmlns:a="http://schemas.openxmlformats.org/drawingml/2006/main" xmlns:r="http://schemas.openxmlformats.org/officeDocument/2006/relationships" xmlns:p="http://schemas.openxmlformats.org/presentationml/2006/main" matchingName="TItre et sous-titre">
   <p:cSld name="TItre et sous-titre">
     <p:spTree>
@@ -3459,7 +3338,7 @@
 </p:sldLayout>
 </file>
 
-<file path=ppt\slideLayouts\slideLayout13.xml><?xml version="1.0" encoding="utf-8"?>
+<file path=ppt/slideLayouts/slideLayout13.xml><?xml version="1.0" encoding="utf-8"?>
 <p:sldLayout xmlns:a="http://schemas.openxmlformats.org/drawingml/2006/main" xmlns:r="http://schemas.openxmlformats.org/officeDocument/2006/relationships" xmlns:p="http://schemas.openxmlformats.org/presentationml/2006/main" showMasterSp="0" matchingName="Titre, sous-titre et visuel">
   <p:cSld name="Titre, sous-titre et visuel">
     <p:spTree>
@@ -4699,7 +4578,7 @@
 </p:sldLayout>
 </file>
 
-<file path=ppt\slideLayouts\slideLayout14.xml><?xml version="1.0" encoding="utf-8"?>
+<file path=ppt/slideLayouts/slideLayout14.xml><?xml version="1.0" encoding="utf-8"?>
 <p:sldLayout xmlns:a="http://schemas.openxmlformats.org/drawingml/2006/main" xmlns:r="http://schemas.openxmlformats.org/officeDocument/2006/relationships" xmlns:p="http://schemas.openxmlformats.org/presentationml/2006/main" matchingName="2_Disposition personnalisée">
   <p:cSld name="2_Disposition personnalisée">
     <p:spTree>
@@ -5261,7 +5140,7 @@
 </p:sldLayout>
 </file>
 
-<file path=ppt\slideLayouts\slideLayout15.xml><?xml version="1.0" encoding="utf-8"?>
+<file path=ppt/slideLayouts/slideLayout15.xml><?xml version="1.0" encoding="utf-8"?>
 <p:sldLayout xmlns:a="http://schemas.openxmlformats.org/drawingml/2006/main" xmlns:r="http://schemas.openxmlformats.org/officeDocument/2006/relationships" xmlns:p="http://schemas.openxmlformats.org/presentationml/2006/main" matchingName="3_Disposition personnalisée 1">
   <p:cSld name="6_Disposition personnalisée_1">
     <p:spTree>
@@ -5999,7 +5878,7 @@
 </p:sldLayout>
 </file>
 
-<file path=ppt\slideLayouts\slideLayout16.xml><?xml version="1.0" encoding="utf-8"?>
+<file path=ppt/slideLayouts/slideLayout16.xml><?xml version="1.0" encoding="utf-8"?>
 <p:sldLayout xmlns:a="http://schemas.openxmlformats.org/drawingml/2006/main" xmlns:r="http://schemas.openxmlformats.org/officeDocument/2006/relationships" xmlns:p="http://schemas.openxmlformats.org/presentationml/2006/main" matchingName="3_Disposition personnalisée 2">
   <p:cSld name="6_Disposition personnalisée_2">
     <p:spTree>
@@ -6737,7 +6616,7 @@
 </p:sldLayout>
 </file>
 
-<file path=ppt\slideLayouts\slideLayout17.xml><?xml version="1.0" encoding="utf-8"?>
+<file path=ppt/slideLayouts/slideLayout17.xml><?xml version="1.0" encoding="utf-8"?>
 <p:sldLayout xmlns:a="http://schemas.openxmlformats.org/drawingml/2006/main" xmlns:r="http://schemas.openxmlformats.org/officeDocument/2006/relationships" xmlns:p="http://schemas.openxmlformats.org/presentationml/2006/main" matchingName="1_Titre, sous titre et contenu">
   <p:cSld name="1_Titre, sous titre et contenu">
     <p:spTree>
@@ -7847,7 +7726,7 @@
 </p:sldLayout>
 </file>
 
-<file path=ppt\slideLayouts\slideLayout18.xml><?xml version="1.0" encoding="utf-8"?>
+<file path=ppt/slideLayouts/slideLayout18.xml><?xml version="1.0" encoding="utf-8"?>
 <p:sldLayout xmlns:a="http://schemas.openxmlformats.org/drawingml/2006/main" xmlns:r="http://schemas.openxmlformats.org/officeDocument/2006/relationships" xmlns:p="http://schemas.openxmlformats.org/presentationml/2006/main" matchingName="Titre seul">
   <p:cSld name="Titre seul 2">
     <p:spTree>
@@ -8032,7 +7911,7 @@
 </p:sldLayout>
 </file>
 
-<file path=ppt\slideLayouts\slideLayout19.xml><?xml version="1.0" encoding="utf-8"?>
+<file path=ppt/slideLayouts/slideLayout19.xml><?xml version="1.0" encoding="utf-8"?>
 <p:sldLayout xmlns:a="http://schemas.openxmlformats.org/drawingml/2006/main" xmlns:r="http://schemas.openxmlformats.org/officeDocument/2006/relationships" xmlns:p="http://schemas.openxmlformats.org/presentationml/2006/main" matchingName="04/ TItre seul, sans ligne">
   <p:cSld name="04/ TItre seul, sans ligne">
     <p:spTree>
@@ -8566,7 +8445,7 @@
 </p:sldLayout>
 </file>
 
-<file path=ppt\slideLayouts\slideLayout2.xml><?xml version="1.0" encoding="utf-8"?>
+<file path=ppt/slideLayouts/slideLayout2.xml><?xml version="1.0" encoding="utf-8"?>
 <p:sldLayout xmlns:a="http://schemas.openxmlformats.org/drawingml/2006/main" xmlns:r="http://schemas.openxmlformats.org/officeDocument/2006/relationships" xmlns:p="http://schemas.openxmlformats.org/presentationml/2006/main" matchingName="2_Disposition personnalisée">
   <p:cSld name="2_Disposition personnalisée 3">
     <p:spTree>
@@ -9128,7 +9007,7 @@
 </p:sldLayout>
 </file>
 
-<file path=ppt\slideLayouts\slideLayout20.xml><?xml version="1.0" encoding="utf-8"?>
+<file path=ppt/slideLayouts/slideLayout20.xml><?xml version="1.0" encoding="utf-8"?>
 <p:sldLayout xmlns:a="http://schemas.openxmlformats.org/drawingml/2006/main" xmlns:r="http://schemas.openxmlformats.org/officeDocument/2006/relationships" xmlns:p="http://schemas.openxmlformats.org/presentationml/2006/main" matchingName="TItre et sous-titre, sans ligne">
   <p:cSld name="TItre et sous-titre, sans ligne">
     <p:spTree>
@@ -9847,7 +9726,7 @@
 </p:sldLayout>
 </file>
 
-<file path=ppt\slideLayouts\slideLayout21.xml><?xml version="1.0" encoding="utf-8"?>
+<file path=ppt/slideLayouts/slideLayout21.xml><?xml version="1.0" encoding="utf-8"?>
 <p:sldLayout xmlns:a="http://schemas.openxmlformats.org/drawingml/2006/main" xmlns:r="http://schemas.openxmlformats.org/officeDocument/2006/relationships" xmlns:p="http://schemas.openxmlformats.org/presentationml/2006/main" matchingName="2_Disposition personnalisée">
   <p:cSld name="2_Disposition personnalisée 2">
     <p:spTree>
@@ -10409,7 +10288,7 @@
 </p:sldLayout>
 </file>
 
-<file path=ppt\slideLayouts\slideLayout22.xml><?xml version="1.0" encoding="utf-8"?>
+<file path=ppt/slideLayouts/slideLayout22.xml><?xml version="1.0" encoding="utf-8"?>
 <p:sldLayout xmlns:a="http://schemas.openxmlformats.org/drawingml/2006/main" xmlns:r="http://schemas.openxmlformats.org/officeDocument/2006/relationships" xmlns:p="http://schemas.openxmlformats.org/presentationml/2006/main" matchingName="4_Disposition personnalisée">
   <p:cSld name="4_Disposition personnalisée 2">
     <p:spTree>
@@ -10796,7 +10675,7 @@
 </p:sldLayout>
 </file>
 
-<file path=ppt\slideLayouts\slideLayout23.xml><?xml version="1.0" encoding="utf-8"?>
+<file path=ppt/slideLayouts/slideLayout23.xml><?xml version="1.0" encoding="utf-8"?>
 <p:sldLayout xmlns:a="http://schemas.openxmlformats.org/drawingml/2006/main" xmlns:r="http://schemas.openxmlformats.org/officeDocument/2006/relationships" xmlns:p="http://schemas.openxmlformats.org/presentationml/2006/main" matchingName="3_Disposition personnalisée 1">
   <p:cSld name="6_Disposition personnalisée_1 2">
     <p:spTree>
@@ -11534,7 +11413,7 @@
 </p:sldLayout>
 </file>
 
-<file path=ppt\slideLayouts\slideLayout24.xml><?xml version="1.0" encoding="utf-8"?>
+<file path=ppt/slideLayouts/slideLayout24.xml><?xml version="1.0" encoding="utf-8"?>
 <p:sldLayout xmlns:a="http://schemas.openxmlformats.org/drawingml/2006/main" xmlns:r="http://schemas.openxmlformats.org/officeDocument/2006/relationships" xmlns:p="http://schemas.openxmlformats.org/presentationml/2006/main" matchingName="Titre seul">
   <p:cSld name="Titre seul 2 2">
     <p:spTree>
@@ -11719,7 +11598,7 @@
 </p:sldLayout>
 </file>
 
-<file path=ppt\slideLayouts\slideLayout25.xml><?xml version="1.0" encoding="utf-8"?>
+<file path=ppt/slideLayouts/slideLayout25.xml><?xml version="1.0" encoding="utf-8"?>
 <p:sldLayout xmlns:a="http://schemas.openxmlformats.org/drawingml/2006/main" xmlns:r="http://schemas.openxmlformats.org/officeDocument/2006/relationships" xmlns:p="http://schemas.openxmlformats.org/presentationml/2006/main" matchingName="TItre et sous-titre">
   <p:cSld name="TItre et sous-titre 2">
     <p:spTree>
@@ -12389,7 +12268,7 @@
 </p:sldLayout>
 </file>
 
-<file path=ppt\slideLayouts\slideLayout26.xml><?xml version="1.0" encoding="utf-8"?>
+<file path=ppt/slideLayouts/slideLayout26.xml><?xml version="1.0" encoding="utf-8"?>
 <p:sldLayout xmlns:a="http://schemas.openxmlformats.org/drawingml/2006/main" xmlns:r="http://schemas.openxmlformats.org/officeDocument/2006/relationships" xmlns:p="http://schemas.openxmlformats.org/presentationml/2006/main" matchingName="04/ TItre seul, sans ligne">
   <p:cSld name="04/ TItre seul, sans ligne 2">
     <p:spTree>
@@ -12923,7 +12802,7 @@
 </p:sldLayout>
 </file>
 
-<file path=ppt\slideLayouts\slideLayout27.xml><?xml version="1.0" encoding="utf-8"?>
+<file path=ppt/slideLayouts/slideLayout27.xml><?xml version="1.0" encoding="utf-8"?>
 <p:sldLayout xmlns:a="http://schemas.openxmlformats.org/drawingml/2006/main" xmlns:r="http://schemas.openxmlformats.org/officeDocument/2006/relationships" xmlns:p="http://schemas.openxmlformats.org/presentationml/2006/main" matchingName="TItre et sous-titre, sans ligne">
   <p:cSld name="TItre et sous-titre, sans ligne 2">
     <p:spTree>
@@ -13642,7 +13521,7 @@
 </p:sldLayout>
 </file>
 
-<file path=ppt\slideLayouts\slideLayout28.xml><?xml version="1.0" encoding="utf-8"?>
+<file path=ppt/slideLayouts/slideLayout28.xml><?xml version="1.0" encoding="utf-8"?>
 <p:sldLayout xmlns:a="http://schemas.openxmlformats.org/drawingml/2006/main" xmlns:r="http://schemas.openxmlformats.org/officeDocument/2006/relationships" xmlns:p="http://schemas.openxmlformats.org/presentationml/2006/main" matchingName="2_Disposition personnalisée">
   <p:cSld name="2_Disposition personnalisée 2 2">
     <p:spTree>
@@ -14204,7 +14083,7 @@
 </p:sldLayout>
 </file>
 
-<file path=ppt\slideLayouts\slideLayout29.xml><?xml version="1.0" encoding="utf-8"?>
+<file path=ppt/slideLayouts/slideLayout29.xml><?xml version="1.0" encoding="utf-8"?>
 <p:sldLayout xmlns:a="http://schemas.openxmlformats.org/drawingml/2006/main" xmlns:r="http://schemas.openxmlformats.org/officeDocument/2006/relationships" xmlns:p="http://schemas.openxmlformats.org/presentationml/2006/main" matchingName="3_Disposition personnalisée">
   <p:cSld name="3_Disposition personnalisée 2">
     <p:spTree>
@@ -14941,7 +14820,7 @@
 </p:sldLayout>
 </file>
 
-<file path=ppt\slideLayouts\slideLayout3.xml><?xml version="1.0" encoding="utf-8"?>
+<file path=ppt/slideLayouts/slideLayout3.xml><?xml version="1.0" encoding="utf-8"?>
 <p:sldLayout xmlns:a="http://schemas.openxmlformats.org/drawingml/2006/main" xmlns:r="http://schemas.openxmlformats.org/officeDocument/2006/relationships" xmlns:p="http://schemas.openxmlformats.org/presentationml/2006/main" matchingName="3_Disposition personnalisée">
   <p:cSld name="3_Disposition personnalisée">
     <p:spTree>
@@ -15678,7 +15557,7 @@
 </p:sldLayout>
 </file>
 
-<file path=ppt\slideLayouts\slideLayout30.xml><?xml version="1.0" encoding="utf-8"?>
+<file path=ppt/slideLayouts/slideLayout30.xml><?xml version="1.0" encoding="utf-8"?>
 <p:sldLayout xmlns:a="http://schemas.openxmlformats.org/drawingml/2006/main" xmlns:r="http://schemas.openxmlformats.org/officeDocument/2006/relationships" xmlns:p="http://schemas.openxmlformats.org/presentationml/2006/main" matchingName="4_Disposition personnalisée">
   <p:cSld name="4_Disposition personnalisée 2 2">
     <p:spTree>
@@ -16065,7 +15944,7 @@
 </p:sldLayout>
 </file>
 
-<file path=ppt\slideLayouts\slideLayout4.xml><?xml version="1.0" encoding="utf-8"?>
+<file path=ppt/slideLayouts/slideLayout4.xml><?xml version="1.0" encoding="utf-8"?>
 <p:sldLayout xmlns:a="http://schemas.openxmlformats.org/drawingml/2006/main" xmlns:r="http://schemas.openxmlformats.org/officeDocument/2006/relationships" xmlns:p="http://schemas.openxmlformats.org/presentationml/2006/main" matchingName="1_Sommaire">
   <p:cSld name="1_Sommaire 4">
     <p:spTree>
@@ -18573,7 +18452,7 @@
 </p:sldLayout>
 </file>
 
-<file path=ppt\slideLayouts\slideLayout5.xml><?xml version="1.0" encoding="utf-8"?>
+<file path=ppt/slideLayouts/slideLayout5.xml><?xml version="1.0" encoding="utf-8"?>
 <p:sldLayout xmlns:a="http://schemas.openxmlformats.org/drawingml/2006/main" xmlns:r="http://schemas.openxmlformats.org/officeDocument/2006/relationships" xmlns:p="http://schemas.openxmlformats.org/presentationml/2006/main" showMasterSp="0" matchingName="1_Titre 1">
   <p:cSld name="1_Titre 2_1">
     <p:spTree>
@@ -21681,7 +21560,7 @@
 </p:sldLayout>
 </file>
 
-<file path=ppt\slideLayouts\slideLayout6.xml><?xml version="1.0" encoding="utf-8"?>
+<file path=ppt/slideLayouts/slideLayout6.xml><?xml version="1.0" encoding="utf-8"?>
 <p:sldLayout xmlns:a="http://schemas.openxmlformats.org/drawingml/2006/main" xmlns:r="http://schemas.openxmlformats.org/officeDocument/2006/relationships" xmlns:p="http://schemas.openxmlformats.org/presentationml/2006/main" showMasterSp="0" matchingName="17/ Slide vide fond clair">
   <p:cSld name="17/ Slide vide fond clair">
     <p:bg>
@@ -21995,7 +21874,7 @@
 </p:sldLayout>
 </file>
 
-<file path=ppt\slideLayouts\slideLayout7.xml><?xml version="1.0" encoding="utf-8"?>
+<file path=ppt/slideLayouts/slideLayout7.xml><?xml version="1.0" encoding="utf-8"?>
 <p:sldLayout xmlns:a="http://schemas.openxmlformats.org/drawingml/2006/main" xmlns:r="http://schemas.openxmlformats.org/officeDocument/2006/relationships" xmlns:p="http://schemas.openxmlformats.org/presentationml/2006/main" showMasterSp="0" matchingName="06 - Slide vide">
   <p:cSld name="06 - Slide vide">
     <p:bg>
@@ -22028,7 +21907,7 @@
 </p:sldLayout>
 </file>
 
-<file path=ppt\slideLayouts\slideLayout8.xml><?xml version="1.0" encoding="utf-8"?>
+<file path=ppt/slideLayouts/slideLayout8.xml><?xml version="1.0" encoding="utf-8"?>
 <p:sldLayout xmlns:a="http://schemas.openxmlformats.org/drawingml/2006/main" xmlns:r="http://schemas.openxmlformats.org/officeDocument/2006/relationships" xmlns:p="http://schemas.openxmlformats.org/presentationml/2006/main" matchingName="02/ Titre, sous-titre et contenu">
   <p:cSld name="02/ Titre, sous-titre et contenu">
     <p:spTree>
@@ -22908,7 +22787,7 @@
 </p:sldLayout>
 </file>
 
-<file path=ppt\slideLayouts\slideLayout9.xml><?xml version="1.0" encoding="utf-8"?>
+<file path=ppt/slideLayouts/slideLayout9.xml><?xml version="1.0" encoding="utf-8"?>
 <p:sldLayout xmlns:a="http://schemas.openxmlformats.org/drawingml/2006/main" xmlns:r="http://schemas.openxmlformats.org/officeDocument/2006/relationships" xmlns:p="http://schemas.openxmlformats.org/presentationml/2006/main" matchingName="Disposition personnalisée">
   <p:cSld name="7_Disposition personnalisée">
     <p:spTree>
@@ -23810,7 +23689,7 @@
 </p:sldLayout>
 </file>
 
-<file path=ppt\slideMasters\slideMaster1.xml><?xml version="1.0" encoding="utf-8"?>
+<file path=ppt/slideMasters/slideMaster1.xml><?xml version="1.0" encoding="utf-8"?>
 <p:sldMaster xmlns:a="http://schemas.openxmlformats.org/drawingml/2006/main" xmlns:r="http://schemas.openxmlformats.org/officeDocument/2006/relationships" xmlns:p="http://schemas.openxmlformats.org/presentationml/2006/main">
   <p:cSld>
     <p:bg>
@@ -25353,7 +25232,7 @@
 </p:sldMaster>
 </file>
 
-<file path=ppt\slides\slide1.xml><?xml version="1.0" encoding="utf-8"?>
+<file path=ppt/slides/slide1.xml><?xml version="1.0" encoding="utf-8"?>
 <p:sld xmlns:a="http://schemas.openxmlformats.org/drawingml/2006/main" xmlns:r="http://schemas.openxmlformats.org/officeDocument/2006/relationships" xmlns:p="http://schemas.openxmlformats.org/presentationml/2006/main">
   <p:cSld>
     <p:spTree>
@@ -25440,7 +25319,7 @@
 </p:sld>
 </file>
 
-<file path=ppt\slides\slide2.xml><?xml version="1.0" encoding="utf-8"?>
+<file path=ppt/slides/slide2.xml><?xml version="1.0" encoding="utf-8"?>
 <p:sld xmlns:a="http://schemas.openxmlformats.org/drawingml/2006/main" xmlns:r="http://schemas.openxmlformats.org/officeDocument/2006/relationships" xmlns:p="http://schemas.openxmlformats.org/presentationml/2006/main">
   <p:cSld>
     <p:spTree>
@@ -31269,7 +31148,7 @@
 </p:sld>
 </file>
 
-<file path=ppt\slides\slide3.xml><?xml version="1.0" encoding="utf-8"?>
+<file path=ppt/slides/slide3.xml><?xml version="1.0" encoding="utf-8"?>
 <p:sld xmlns:a="http://schemas.openxmlformats.org/drawingml/2006/main" xmlns:r="http://schemas.openxmlformats.org/officeDocument/2006/relationships" xmlns:p="http://schemas.openxmlformats.org/presentationml/2006/main">
   <p:cSld>
     <p:spTree>
@@ -36583,7 +36462,7 @@
 </p:sld>
 </file>
 
-<file path=ppt\slides\slide4.xml><?xml version="1.0" encoding="utf-8"?>
+<file path=ppt/slides/slide4.xml><?xml version="1.0" encoding="utf-8"?>
 <p:sld xmlns:a="http://schemas.openxmlformats.org/drawingml/2006/main" xmlns:r="http://schemas.openxmlformats.org/officeDocument/2006/relationships" xmlns:p="http://schemas.openxmlformats.org/presentationml/2006/main">
   <p:cSld>
     <p:spTree>
@@ -42090,104 +41969,288 @@
 </p:sld>
 </file>
 
-<file path=ppt\tableStyles.xml><?xml version="1.0" encoding="utf-8"?>
-<a:tblStyleLst xmlns:a="http://schemas.openxmlformats.org/drawingml/2006/main" def="{0E937493-311C-4B09-AB42-98F83098D3E6}">
-  <a:tblStyle styleId="{0E937493-311C-4B09-AB42-98F83098D3E6}" styleName="Table_0">
-    <a:wholeTbl>
-      <a:tcTxStyle>
-        <a:font>
-          <a:latin typeface="Arial"/>
-          <a:ea typeface="Arial"/>
-          <a:cs typeface="Arial"/>
-        </a:font>
-        <a:srgbClr val="000000"/>
-      </a:tcTxStyle>
-      <a:tcStyle>
-        <a:tcBdr/>
-      </a:tcStyle>
-    </a:wholeTbl>
-    <a:band1H>
-      <a:tcTxStyle/>
-      <a:tcStyle>
-        <a:tcBdr/>
-      </a:tcStyle>
-    </a:band1H>
-    <a:band2H>
-      <a:tcTxStyle/>
-      <a:tcStyle>
-        <a:tcBdr/>
-      </a:tcStyle>
-    </a:band2H>
-    <a:band1V>
-      <a:tcTxStyle/>
-      <a:tcStyle>
-        <a:tcBdr/>
-      </a:tcStyle>
-    </a:band1V>
-    <a:band2V>
-      <a:tcTxStyle/>
-      <a:tcStyle>
-        <a:tcBdr/>
-      </a:tcStyle>
-    </a:band2V>
-    <a:lastCol>
-      <a:tcTxStyle/>
-      <a:tcStyle>
-        <a:tcBdr/>
-      </a:tcStyle>
-    </a:lastCol>
-    <a:firstCol>
-      <a:tcTxStyle/>
-      <a:tcStyle>
-        <a:tcBdr/>
-      </a:tcStyle>
-    </a:firstCol>
-    <a:lastRow>
-      <a:tcTxStyle/>
-      <a:tcStyle>
-        <a:tcBdr/>
-      </a:tcStyle>
-    </a:lastRow>
-    <a:seCell>
-      <a:tcTxStyle/>
-      <a:tcStyle>
-        <a:tcBdr/>
-      </a:tcStyle>
-    </a:seCell>
-    <a:swCell>
-      <a:tcTxStyle/>
-      <a:tcStyle>
-        <a:tcBdr/>
-      </a:tcStyle>
-    </a:swCell>
-    <a:firstRow>
-      <a:tcTxStyle/>
-      <a:tcStyle>
-        <a:tcBdr/>
-      </a:tcStyle>
-    </a:firstRow>
-    <a:neCell>
-      <a:tcTxStyle/>
-      <a:tcStyle>
-        <a:tcBdr/>
-      </a:tcStyle>
-    </a:neCell>
-    <a:nwCell>
-      <a:tcTxStyle/>
-      <a:tcStyle>
-        <a:tcBdr/>
-      </a:tcStyle>
-    </a:nwCell>
-  </a:tblStyle>
-</a:tblStyleLst>
+<file path=ppt/theme/theme1.xml><?xml version="1.0" encoding="utf-8"?>
+<a:theme xmlns:a="http://schemas.openxmlformats.org/drawingml/2006/main" name="Conception personnalisée">
+  <a:themeElements>
+    <a:clrScheme name="OCTO">
+      <a:dk1>
+        <a:srgbClr val="0E2356"/>
+      </a:dk1>
+      <a:lt1>
+        <a:srgbClr val="FFFFFF"/>
+      </a:lt1>
+      <a:dk2>
+        <a:srgbClr val="0E2356"/>
+      </a:dk2>
+      <a:lt2>
+        <a:srgbClr val="E8F0FF"/>
+      </a:lt2>
+      <a:accent1>
+        <a:srgbClr val="0E2356"/>
+      </a:accent1>
+      <a:accent2>
+        <a:srgbClr val="00D2DD"/>
+      </a:accent2>
+      <a:accent3>
+        <a:srgbClr val="DB4B4B"/>
+      </a:accent3>
+      <a:accent4>
+        <a:srgbClr val="0E2356"/>
+      </a:accent4>
+      <a:accent5>
+        <a:srgbClr val="0E2356"/>
+      </a:accent5>
+      <a:accent6>
+        <a:srgbClr val="00D2DD"/>
+      </a:accent6>
+      <a:hlink>
+        <a:srgbClr val="976C9D"/>
+      </a:hlink>
+      <a:folHlink>
+        <a:srgbClr val="00ABA4"/>
+      </a:folHlink>
+    </a:clrScheme>
+    <a:fontScheme name="OCTO Outfit">
+      <a:majorFont>
+        <a:latin typeface="Outfit"/>
+        <a:ea typeface=""/>
+        <a:cs typeface=""/>
+        <a:font script="Jpan" typeface="ＭＳ Ｐゴシック"/>
+        <a:font script="Hang" typeface="맑은 고딕"/>
+        <a:font script="Hans" typeface="宋体"/>
+        <a:font script="Hant" typeface="新細明體"/>
+        <a:font script="Arab" typeface="Times New Roman"/>
+        <a:font script="Hebr" typeface="Times New Roman"/>
+        <a:font script="Thai" typeface="Angsana New"/>
+        <a:font script="Ethi" typeface="Nyala"/>
+        <a:font script="Beng" typeface="Vrinda"/>
+        <a:font script="Gujr" typeface="Shruti"/>
+        <a:font script="Khmr" typeface="MoolBoran"/>
+        <a:font script="Knda" typeface="Tunga"/>
+        <a:font script="Guru" typeface="Raavi"/>
+        <a:font script="Cans" typeface="Euphemia"/>
+        <a:font script="Cher" typeface="Plantagenet Cherokee"/>
+        <a:font script="Yiii" typeface="Microsoft Yi Baiti"/>
+        <a:font script="Tibt" typeface="Microsoft Himalaya"/>
+        <a:font script="Thaa" typeface="MV Boli"/>
+        <a:font script="Deva" typeface="Mangal"/>
+        <a:font script="Telu" typeface="Gautami"/>
+        <a:font script="Taml" typeface="Latha"/>
+        <a:font script="Syrc" typeface="Estrangelo Edessa"/>
+        <a:font script="Orya" typeface="Kalinga"/>
+        <a:font script="Mlym" typeface="Kartika"/>
+        <a:font script="Laoo" typeface="DokChampa"/>
+        <a:font script="Sinh" typeface="Iskoola Pota"/>
+        <a:font script="Mong" typeface="Mongolian Baiti"/>
+        <a:font script="Viet" typeface="Times New Roman"/>
+        <a:font script="Uigh" typeface="Microsoft Uighur"/>
+        <a:font script="Geor" typeface="Sylfaen"/>
+      </a:majorFont>
+      <a:minorFont>
+        <a:latin typeface="Outfit"/>
+        <a:ea typeface=""/>
+        <a:cs typeface=""/>
+        <a:font script="Jpan" typeface="ＭＳ Ｐゴシック"/>
+        <a:font script="Hang" typeface="맑은 고딕"/>
+        <a:font script="Hans" typeface="宋体"/>
+        <a:font script="Hant" typeface="新細明體"/>
+        <a:font script="Arab" typeface="Outfit"/>
+        <a:font script="Hebr" typeface="Outfit"/>
+        <a:font script="Thai" typeface="Cordia New"/>
+        <a:font script="Ethi" typeface="Nyala"/>
+        <a:font script="Beng" typeface="Vrinda"/>
+        <a:font script="Gujr" typeface="Shruti"/>
+        <a:font script="Khmr" typeface="DaunPenh"/>
+        <a:font script="Knda" typeface="Tunga"/>
+        <a:font script="Guru" typeface="Raavi"/>
+        <a:font script="Cans" typeface="Euphemia"/>
+        <a:font script="Cher" typeface="Plantagenet Cherokee"/>
+        <a:font script="Yiii" typeface="Microsoft Yi Baiti"/>
+        <a:font script="Tibt" typeface="Microsoft Himalaya"/>
+        <a:font script="Thaa" typeface="MV Boli"/>
+        <a:font script="Deva" typeface="Mangal"/>
+        <a:font script="Telu" typeface="Gautami"/>
+        <a:font script="Taml" typeface="Latha"/>
+        <a:font script="Syrc" typeface="Estrangelo Edessa"/>
+        <a:font script="Orya" typeface="Kalinga"/>
+        <a:font script="Mlym" typeface="Kartika"/>
+        <a:font script="Laoo" typeface="DokChampa"/>
+        <a:font script="Sinh" typeface="Iskoola Pota"/>
+        <a:font script="Mong" typeface="Mongolian Baiti"/>
+        <a:font script="Viet" typeface="Outfit"/>
+        <a:font script="Uigh" typeface="Microsoft Uighur"/>
+        <a:font script="Geor" typeface="Sylfaen"/>
+      </a:minorFont>
+    </a:fontScheme>
+    <a:fmtScheme name="OCTO Outfit">
+      <a:fillStyleLst>
+        <a:solidFill>
+          <a:schemeClr val="phClr"/>
+        </a:solidFill>
+        <a:gradFill rotWithShape="1">
+          <a:gsLst>
+            <a:gs pos="0">
+              <a:schemeClr val="phClr">
+                <a:tint val="50000"/>
+                <a:satMod val="300000"/>
+              </a:schemeClr>
+            </a:gs>
+            <a:gs pos="35000">
+              <a:schemeClr val="phClr">
+                <a:tint val="37000"/>
+                <a:satMod val="300000"/>
+              </a:schemeClr>
+            </a:gs>
+            <a:gs pos="100000">
+              <a:schemeClr val="phClr">
+                <a:tint val="15000"/>
+                <a:satMod val="350000"/>
+              </a:schemeClr>
+            </a:gs>
+          </a:gsLst>
+          <a:lin ang="16200000" scaled="1"/>
+        </a:gradFill>
+        <a:gradFill rotWithShape="1">
+          <a:gsLst>
+            <a:gs pos="0">
+              <a:schemeClr val="phClr">
+                <a:tint val="100000"/>
+                <a:shade val="100000"/>
+                <a:satMod val="130000"/>
+              </a:schemeClr>
+            </a:gs>
+            <a:gs pos="100000">
+              <a:schemeClr val="phClr">
+                <a:tint val="50000"/>
+                <a:shade val="100000"/>
+                <a:satMod val="350000"/>
+              </a:schemeClr>
+            </a:gs>
+          </a:gsLst>
+          <a:lin ang="16200000" scaled="0"/>
+        </a:gradFill>
+      </a:fillStyleLst>
+      <a:lnStyleLst>
+        <a:ln w="9525" cap="flat" cmpd="sng" algn="ctr">
+          <a:solidFill>
+            <a:schemeClr val="phClr">
+              <a:shade val="95000"/>
+              <a:satMod val="105000"/>
+            </a:schemeClr>
+          </a:solidFill>
+          <a:prstDash val="solid"/>
+        </a:ln>
+        <a:ln w="25400" cap="flat" cmpd="sng" algn="ctr">
+          <a:solidFill>
+            <a:schemeClr val="phClr"/>
+          </a:solidFill>
+          <a:prstDash val="solid"/>
+        </a:ln>
+        <a:ln w="38100" cap="flat" cmpd="sng" algn="ctr">
+          <a:solidFill>
+            <a:schemeClr val="phClr"/>
+          </a:solidFill>
+          <a:prstDash val="solid"/>
+        </a:ln>
+      </a:lnStyleLst>
+      <a:effectStyleLst>
+        <a:effectStyle>
+          <a:effectLst>
+            <a:outerShdw blurRad="40000" dist="20000" dir="5400000" rotWithShape="0">
+              <a:srgbClr val="0E2356">
+                <a:alpha val="38000"/>
+              </a:srgbClr>
+            </a:outerShdw>
+          </a:effectLst>
+        </a:effectStyle>
+        <a:effectStyle>
+          <a:effectLst>
+            <a:outerShdw blurRad="40000" dist="23000" dir="5400000" rotWithShape="0">
+              <a:srgbClr val="0E2356">
+                <a:alpha val="35000"/>
+              </a:srgbClr>
+            </a:outerShdw>
+          </a:effectLst>
+        </a:effectStyle>
+        <a:effectStyle>
+          <a:effectLst>
+            <a:outerShdw blurRad="40000" dist="23000" dir="5400000" rotWithShape="0">
+              <a:srgbClr val="0E2356">
+                <a:alpha val="35000"/>
+              </a:srgbClr>
+            </a:outerShdw>
+          </a:effectLst>
+          <a:scene3d>
+            <a:camera prst="orthographicFront">
+              <a:rot lat="0" lon="0" rev="0"/>
+            </a:camera>
+            <a:lightRig rig="threePt" dir="t">
+              <a:rot lat="0" lon="0" rev="1200000"/>
+            </a:lightRig>
+          </a:scene3d>
+          <a:sp3d>
+            <a:bevelT w="63500" h="25400"/>
+          </a:sp3d>
+        </a:effectStyle>
+      </a:effectStyleLst>
+      <a:bgFillStyleLst>
+        <a:solidFill>
+          <a:schemeClr val="phClr"/>
+        </a:solidFill>
+        <a:gradFill rotWithShape="1">
+          <a:gsLst>
+            <a:gs pos="0">
+              <a:schemeClr val="phClr">
+                <a:tint val="40000"/>
+                <a:satMod val="350000"/>
+              </a:schemeClr>
+            </a:gs>
+            <a:gs pos="40000">
+              <a:schemeClr val="phClr">
+                <a:tint val="45000"/>
+                <a:shade val="99000"/>
+                <a:satMod val="350000"/>
+              </a:schemeClr>
+            </a:gs>
+            <a:gs pos="100000">
+              <a:schemeClr val="phClr">
+                <a:shade val="20000"/>
+                <a:satMod val="255000"/>
+              </a:schemeClr>
+            </a:gs>
+          </a:gsLst>
+          <a:path path="circle">
+            <a:fillToRect l="50000" t="-80000" r="50000" b="180000"/>
+          </a:path>
+        </a:gradFill>
+        <a:gradFill rotWithShape="1">
+          <a:gsLst>
+            <a:gs pos="0">
+              <a:schemeClr val="phClr">
+                <a:tint val="80000"/>
+                <a:satMod val="300000"/>
+              </a:schemeClr>
+            </a:gs>
+            <a:gs pos="100000">
+              <a:schemeClr val="phClr">
+                <a:shade val="30000"/>
+                <a:satMod val="200000"/>
+              </a:schemeClr>
+            </a:gs>
+          </a:gsLst>
+          <a:path path="circle">
+            <a:fillToRect l="50000" t="50000" r="50000" b="50000"/>
+          </a:path>
+        </a:gradFill>
+      </a:bgFillStyleLst>
+    </a:fmtScheme>
+  </a:themeElements>
+  <a:objectDefaults/>
+  <a:extraClrSchemeLst/>
+</a:theme>
 </file>
 
-<file path=ppt\theme\theme1.xml>﻿<?xml version="1.0" encoding="UTF-8" standalone="yes"?>
-<a:theme xmlns:a="http://schemas.openxmlformats.org/drawingml/2006/main" name="Conception personnalisée"><a:themeElements><a:clrScheme name="OCTO"><a:dk1><a:srgbClr val="0E2356"/></a:dk1><a:lt1><a:srgbClr val="FFFFFF"/></a:lt1><a:dk2><a:srgbClr val="0E2356"/></a:dk2><a:lt2><a:srgbClr val="E8F0FF"/></a:lt2><a:accent1><a:srgbClr val="0E2356"/></a:accent1><a:accent2><a:srgbClr val="00D2DD"/></a:accent2><a:accent3><a:srgbClr val="DB4B4B"/></a:accent3><a:accent4><a:srgbClr val="0E2356"/></a:accent4><a:accent5><a:srgbClr val="0E2356"/></a:accent5><a:accent6><a:srgbClr val="00D2DD"/></a:accent6><a:hlink><a:srgbClr val="976C9D"/></a:hlink><a:folHlink><a:srgbClr val="00ABA4"/></a:folHlink></a:clrScheme><a:fontScheme name="OCTO Outfit"><<a:majorFont>><a:latin typeface="Outfit"/><a:ea typeface=""/><a:cs typeface=""/><a:font script="Jpan" typeface="ＭＳ Ｐゴシック"/><a:font script="Hang" typeface="맑은 고딕"/><a:font script="Hans" typeface="宋体"/><a:font script="Hant" typeface="新細明體"/><a:font script="Arab" typeface="Times New Roman"/><a:font script="Hebr" typeface="Times New Roman"/><a:font script="Thai" typeface="Angsana New"/><a:font script="Ethi" typeface="Nyala"/><a:font script="Beng" typeface="Vrinda"/><a:font script="Gujr" typeface="Shruti"/><a:font script="Khmr" typeface="MoolBoran"/><a:font script="Knda" typeface="Tunga"/><a:font script="Guru" typeface="Raavi"/><a:font script="Cans" typeface="Euphemia"/><a:font script="Cher" typeface="Plantagenet Cherokee"/><a:font script="Yiii" typeface="Microsoft Yi Baiti"/><a:font script="Tibt" typeface="Microsoft Himalaya"/><a:font script="Thaa" typeface="MV Boli"/><a:font script="Deva" typeface="Mangal"/><a:font script="Telu" typeface="Gautami"/><a:font script="Taml" typeface="Latha"/><a:font script="Syrc" typeface="Estrangelo Edessa"/><a:font script="Orya" typeface="Kalinga"/><a:font script="Mlym" typeface="Kartika"/><a:font script="Laoo" typeface="DokChampa"/><a:font script="Sinh" typeface="Iskoola Pota"/><a:font script="Mong" typeface="Mongolian Baiti"/><a:font script="Viet" typeface="Times New Roman"/><a:font script="Uigh" typeface="Microsoft Uighur"/><a:font script="Geor" typeface="Sylfaen"/></a:majorFont><<a:minorFont>><a:latin typeface="Outfit"/><a:ea typeface=""/><a:cs typeface=""/><a:font script="Jpan" typeface="ＭＳ Ｐゴシック"/><a:font script="Hang" typeface="맑은 고딕"/><a:font script="Hans" typeface="宋体"/><a:font script="Hant" typeface="新細明體"/><a:font script="Arab" typeface="Outfit"/><a:font script="Hebr" typeface="Outfit"/><a:font script="Thai" typeface="Cordia New"/><a:font script="Ethi" typeface="Nyala"/><a:font script="Beng" typeface="Vrinda"/><a:font script="Gujr" typeface="Shruti"/><a:font script="Khmr" typeface="DaunPenh"/><a:font script="Knda" typeface="Tunga"/><a:font script="Guru" typeface="Raavi"/><a:font script="Cans" typeface="Euphemia"/><a:font script="Cher" typeface="Plantagenet Cherokee"/><a:font script="Yiii" typeface="Microsoft Yi Baiti"/><a:font script="Tibt" typeface="Microsoft Himalaya"/><a:font script="Thaa" typeface="MV Boli"/><a:font script="Deva" typeface="Mangal"/><a:font script="Telu" typeface="Gautami"/><a:font script="Taml" typeface="Latha"/><a:font script="Syrc" typeface="Estrangelo Edessa"/><a:font script="Orya" typeface="Kalinga"/><a:font script="Mlym" typeface="Kartika"/><a:font script="Laoo" typeface="DokChampa"/><a:font script="Sinh" typeface="Iskoola Pota"/><a:font script="Mong" typeface="Mongolian Baiti"/><a:font script="Viet" typeface="Outfit"/><a:font script="Uigh" typeface="Microsoft Uighur"/><a:font script="Geor" typeface="Sylfaen"/></a:minorFont></a:fontScheme><a:fmtScheme name="OCTO Outfit"><a:fillStyleLst><a:solidFill><a:schemeClr val="phClr"/></a:solidFill><a:gradFill rotWithShape="1"><a:gsLst><a:gs pos="0"><a:schemeClr val="phClr"><a:tint val="50000"/><a:satMod val="300000"/></a:schemeClr></a:gs><a:gs pos="35000"><a:schemeClr val="phClr"><a:tint val="37000"/><a:satMod val="300000"/></a:schemeClr></a:gs><a:gs pos="100000"><a:schemeClr val="phClr"><a:tint val="15000"/><a:satMod val="350000"/></a:schemeClr></a:gs></a:gsLst><a:lin ang="16200000" scaled="1"/></a:gradFill><a:gradFill rotWithShape="1"><a:gsLst><a:gs pos="0"><a:schemeClr val="phClr"><a:tint val="100000"/><a:shade val="100000"/><a:satMod val="130000"/></a:schemeClr></a:gs><a:gs pos="100000"><a:schemeClr val="phClr"><a:tint val="50000"/><a:shade val="100000"/><a:satMod val="350000"/></a:schemeClr></a:gs></a:gsLst><a:lin ang="16200000" scaled="0"/></a:gradFill></a:fillStyleLst><a:lnStyleLst><a:ln w="9525" cap="flat" cmpd="sng" algn="ctr"><a:solidFill><a:schemeClr val="phClr"><a:shade val="95000"/><a:satMod val="105000"/></a:schemeClr></a:solidFill><a:prstDash val="solid"/></a:ln><a:ln w="25400" cap="flat" cmpd="sng" algn="ctr"><a:solidFill><a:schemeClr val="phClr"/></a:solidFill><a:prstDash val="solid"/></a:ln><a:ln w="38100" cap="flat" cmpd="sng" algn="ctr"><a:solidFill><a:schemeClr val="phClr"/></a:solidFill><a:prstDash val="solid"/></a:ln></a:lnStyleLst><a:effectStyleLst><a:effectStyle><a:effectLst><a:outerShdw blurRad="40000" dist="20000" dir="5400000" rotWithShape="0"><a:srgbClr val="0E2356"><a:alpha val="38000"/></a:srgbClr></a:outerShdw></a:effectLst></a:effectStyle><a:effectStyle><a:effectLst><a:outerShdw blurRad="40000" dist="23000" dir="5400000" rotWithShape="0"><a:srgbClr val="0E2356"><a:alpha val="35000"/></a:srgbClr></a:outerShdw></a:effectLst></a:effectStyle><a:effectStyle><a:effectLst><a:outerShdw blurRad="40000" dist="23000" dir="5400000" rotWithShape="0"><a:srgbClr val="0E2356"><a:alpha val="35000"/></a:srgbClr></a:outerShdw></a:effectLst><a:scene3d><a:camera prst="orthographicFront"><a:rot lat="0" lon="0" rev="0"/></a:camera><a:lightRig rig="threePt" dir="t"><a:rot lat="0" lon="0" rev="1200000"/></a:lightRig></a:scene3d><a:sp3d><a:bevelT w="63500" h="25400"/></a:sp3d></a:effectStyle></a:effectStyleLst><a:bgFillStyleLst><a:solidFill><a:schemeClr val="phClr"/></a:solidFill><a:gradFill rotWithShape="1"><a:gsLst><a:gs pos="0"><a:schemeClr val="phClr"><a:tint val="40000"/><a:satMod val="350000"/></a:schemeClr></a:gs><a:gs pos="40000"><a:schemeClr val="phClr"><a:tint val="45000"/><a:shade val="99000"/><a:satMod val="350000"/></a:schemeClr></a:gs><a:gs pos="100000"><a:schemeClr val="phClr"><a:shade val="20000"/><a:satMod val="255000"/></a:schemeClr></a:gs></a:gsLst><a:path path="circle"><a:fillToRect l="50000" t="-80000" r="50000" b="180000"/></a:path></a:gradFill><a:gradFill rotWithShape="1"><a:gsLst><a:gs pos="0"><a:schemeClr val="phClr"><a:tint val="80000"/><a:satMod val="300000"/></a:schemeClr></a:gs><a:gs pos="100000"><a:schemeClr val="phClr"><a:shade val="30000"/><a:satMod val="200000"/></a:schemeClr></a:gs></a:gsLst><a:path path="circle"><a:fillToRect l="50000" t="50000" r="50000" b="50000"/></a:path></a:gradFill></a:bgFillStyleLst></a:fmtScheme></a:themeElements><a:objectDefaults/><a:extraClrSchemeLst/></a:theme>
-
-</file>
-
-<file path=ppt\theme\theme2.xml><?xml version="1.0" encoding="utf-8"?>
+<file path=ppt/theme/theme2.xml><?xml version="1.0" encoding="utf-8"?>
 <a:theme xmlns:a="http://schemas.openxmlformats.org/drawingml/2006/main">
   <a:themeElements>
     <a:clrScheme name="Custom">
@@ -42466,38 +42529,4 @@
   <a:objectDefaults/>
   <a:extraClrSchemeLst/>
 </a:theme>
-</file>
-
-<file path=ppt\viewProps.xml><?xml version="1.0" encoding="utf-8"?>
-<p:viewPr xmlns:a="http://schemas.openxmlformats.org/drawingml/2006/main" xmlns:r="http://schemas.openxmlformats.org/officeDocument/2006/relationships" xmlns:p="http://schemas.openxmlformats.org/presentationml/2006/main" lastView="sldThumbnailView">
-  <p:normalViewPr>
-    <p:restoredLeft sz="15620"/>
-    <p:restoredTop sz="94660"/>
-  </p:normalViewPr>
-  <p:slideViewPr>
-    <p:cSldViewPr snapToGrid="0">
-      <p:cViewPr varScale="1">
-        <p:scale>
-          <a:sx n="93" d="100"/>
-          <a:sy n="93" d="100"/>
-        </p:scale>
-        <p:origin x="252" y="56"/>
-      </p:cViewPr>
-      <p:guideLst>
-        <p:guide orient="horz"/>
-        <p:guide pos="2880"/>
-      </p:guideLst>
-    </p:cSldViewPr>
-  </p:slideViewPr>
-  <p:notesTextViewPr>
-    <p:cViewPr>
-      <p:scale>
-        <a:sx n="1" d="1"/>
-        <a:sy n="1" d="1"/>
-      </p:scale>
-      <p:origin x="0" y="0"/>
-    </p:cViewPr>
-  </p:notesTextViewPr>
-  <p:gridSpacing cx="72008" cy="72008"/>
-</p:viewPr>
 </file>
--- a/comop-pptx-prototype/templates/comop-template.pptx
+++ b/comop-pptx-prototype/templates/comop-template.pptx
@@ -1,5 +1,1193 @@
 
-<file path=ppt/presentation.xml><?xml version="1.0" encoding="utf-8"?>
+<file path=docProps\app.xml><?xml version="1.0" encoding="utf-8"?>
+<Properties xmlns="http://schemas.openxmlformats.org/officeDocument/2006/extended-properties" xmlns:vt="http://schemas.openxmlformats.org/officeDocument/2006/docPropsVTypes">
+  <TotalTime>0</TotalTime>
+  <Words>175</Words>
+  <Application>Microsoft Office PowerPoint</Application>
+  <PresentationFormat>On-screen Show (16:9)</PresentationFormat>
+  <Paragraphs>62</Paragraphs>
+  <Slides>3</Slides>
+  <Notes>4</Notes>
+  <HiddenSlides>0</HiddenSlides>
+  <MMClips>0</MMClips>
+  <ScaleCrop>false</ScaleCrop>
+  <HeadingPairs>
+    <vt:vector size="6" baseType="variant">
+      <vt:variant>
+        <vt:lpstr>Fonts Used</vt:lpstr>
+      </vt:variant>
+      <vt:variant>
+        <vt:i4>14</vt:i4>
+      </vt:variant>
+      <vt:variant>
+        <vt:lpstr>Theme</vt:lpstr>
+      </vt:variant>
+      <vt:variant>
+        <vt:i4>1</vt:i4>
+      </vt:variant>
+      <vt:variant>
+        <vt:lpstr>Slide Titles</vt:lpstr>
+      </vt:variant>
+      <vt:variant>
+        <vt:i4>4</vt:i4>
+      </vt:variant>
+    </vt:vector>
+  </HeadingPairs>
+  <TitlesOfParts>
+    <vt:vector size="19" baseType="lpstr">
+      <vt:lpstr>Arial Black</vt:lpstr>
+      <vt:lpstr>Cambria Math</vt:lpstr>
+      <vt:lpstr>Courier New</vt:lpstr>
+      <vt:lpstr>Helvetica Neue</vt:lpstr>
+      <vt:lpstr>Century Gothic</vt:lpstr>
+      <vt:lpstr>Merriweather Sans</vt:lpstr>
+      <vt:lpstr>Cabin Condensed</vt:lpstr>
+      <vt:lpstr>Montserrat SemiBold</vt:lpstr>
+      <vt:lpstr>Arial</vt:lpstr>
+      <vt:lpstr>Noto Sans</vt:lpstr>
+      <vt:lpstr>Calibri</vt:lpstr>
+      <vt:lpstr>Verdana</vt:lpstr>
+      <vt:lpstr>Arial Narrow</vt:lpstr>
+      <vt:lpstr>Noto Sans Symbols</vt:lpstr>
+      <vt:lpstr>Conception personnalisée</vt:lpstr>
+      <vt:lpstr>Pilotage Agile AG2R</vt:lpstr>
+      <vt:lpstr>MAQUETTE support COPIL - slide 1</vt:lpstr>
+      <vt:lpstr>MAQUETTE support COPIL - slide 2</vt:lpstr>
+      <vt:lpstr>MAQUETTE support COPIL - slide 3</vt:lpstr>
+    </vt:vector>
+  </TitlesOfParts>
+  <LinksUpToDate>false</LinksUpToDate>
+  <SharedDoc>false</SharedDoc>
+  <HyperlinksChanged>false</HyperlinksChanged>
+  <AppVersion>16.0000</AppVersion>
+</Properties>
+</file>
+
+<file path=docProps\core.xml><?xml version="1.0" encoding="utf-8"?>
+<cp:coreProperties xmlns:cp="http://schemas.openxmlformats.org/package/2006/metadata/core-properties" xmlns:dc="http://purl.org/dc/elements/1.1/" xmlns:dcterms="http://purl.org/dc/terms/" xmlns:dcmitype="http://purl.org/dc/dcmitype/" xmlns:xsi="http://www.w3.org/2001/XMLSchema-instance">
+  <dc:creator>HUBE-LAURENT Estelle (BPCE-IT - NON REFERENCEE)</dc:creator>
+  <cp:lastModifiedBy>Camus, Claude</cp:lastModifiedBy>
+  <cp:revision>2</cp:revision>
+  <dcterms:modified xsi:type="dcterms:W3CDTF">2026-06-04T12:53:47Z</dcterms:modified>
+</cp:coreProperties>
+</file>
+
+<file path=docProps\custom.xml><?xml version="1.0" encoding="utf-8"?>
+<Properties xmlns="http://schemas.openxmlformats.org/officeDocument/2006/custom-properties" xmlns:vt="http://schemas.openxmlformats.org/officeDocument/2006/docPropsVTypes">
+  <property fmtid="{D5CDD505-2E9C-101B-9397-08002B2CF9AE}" pid="2" name="ContentTypeId">
+    <vt:lpwstr>0x0101009B429FF754AB974C8E15D9875A4AF84E</vt:lpwstr>
+  </property>
+  <property fmtid="{D5CDD505-2E9C-101B-9397-08002B2CF9AE}" pid="3" name="MSIP_Label_48a19f0c-bea1-442e-a475-ed109d9ec508_Enabled">
+    <vt:lpwstr>true</vt:lpwstr>
+  </property>
+  <property fmtid="{D5CDD505-2E9C-101B-9397-08002B2CF9AE}" pid="4" name="MSIP_Label_48a19f0c-bea1-442e-a475-ed109d9ec508_SetDate">
+    <vt:lpwstr>2023-01-30T16:00:26Z</vt:lpwstr>
+  </property>
+  <property fmtid="{D5CDD505-2E9C-101B-9397-08002B2CF9AE}" pid="5" name="MSIP_Label_48a19f0c-bea1-442e-a475-ed109d9ec508_Method">
+    <vt:lpwstr>Standard</vt:lpwstr>
+  </property>
+  <property fmtid="{D5CDD505-2E9C-101B-9397-08002B2CF9AE}" pid="6" name="MSIP_Label_48a19f0c-bea1-442e-a475-ed109d9ec508_Name">
+    <vt:lpwstr>48a19f0c-bea1-442e-a475-ed109d9ec508</vt:lpwstr>
+  </property>
+  <property fmtid="{D5CDD505-2E9C-101B-9397-08002B2CF9AE}" pid="7" name="MSIP_Label_48a19f0c-bea1-442e-a475-ed109d9ec508_SiteId">
+    <vt:lpwstr>d5bb6d35-8a82-4329-b49a-5030bd6497ab</vt:lpwstr>
+  </property>
+  <property fmtid="{D5CDD505-2E9C-101B-9397-08002B2CF9AE}" pid="8" name="MSIP_Label_48a19f0c-bea1-442e-a475-ed109d9ec508_ActionId">
+    <vt:lpwstr>d0ef2f85-f3a6-476b-a51d-604a3da2267b</vt:lpwstr>
+  </property>
+  <property fmtid="{D5CDD505-2E9C-101B-9397-08002B2CF9AE}" pid="9" name="MSIP_Label_48a19f0c-bea1-442e-a475-ed109d9ec508_ContentBits">
+    <vt:lpwstr>0</vt:lpwstr>
+  </property>
+  <property fmtid="{D5CDD505-2E9C-101B-9397-08002B2CF9AE}" pid="10" name="MediaServiceImageTags">
+    <vt:lpwstr/>
+  </property>
+</Properties>
+</file>
+
+<file path=ppt\notesMasters\notesMaster1.xml><?xml version="1.0" encoding="utf-8"?>
+<p:notesMaster xmlns:a="http://schemas.openxmlformats.org/drawingml/2006/main" xmlns:r="http://schemas.openxmlformats.org/officeDocument/2006/relationships" xmlns:p="http://schemas.openxmlformats.org/presentationml/2006/main">
+  <p:cSld>
+    <p:bg>
+      <p:bgPr>
+        <a:solidFill>
+          <a:schemeClr val="lt1"/>
+        </a:solidFill>
+        <a:effectLst/>
+      </p:bgPr>
+    </p:bg>
+    <p:spTree>
+      <p:nvGrpSpPr>
+        <p:cNvPr id="1" name="Shape 2"/>
+        <p:cNvGrpSpPr/>
+        <p:nvPr/>
+      </p:nvGrpSpPr>
+      <p:grpSpPr>
+        <a:xfrm>
+          <a:off x="0" y="0"/>
+          <a:ext cx="0" cy="0"/>
+          <a:chOff x="0" y="0"/>
+          <a:chExt cx="0" cy="0"/>
+        </a:xfrm>
+      </p:grpSpPr>
+      <p:sp>
+        <p:nvSpPr>
+          <p:cNvPr id="3" name="Google Shape;3;n"/>
+          <p:cNvSpPr>
+            <a:spLocks noGrp="1" noRot="1" noChangeAspect="1"/>
+          </p:cNvSpPr>
+          <p:nvPr>
+            <p:ph type="sldImg" idx="2"/>
+          </p:nvPr>
+        </p:nvSpPr>
+        <p:spPr>
+          <a:xfrm>
+            <a:off x="381309" y="685800"/>
+            <a:ext cx="6096000" cy="3429000"/>
+          </a:xfrm>
+          <a:custGeom>
+            <a:avLst/>
+            <a:gdLst/>
+            <a:ahLst/>
+            <a:cxnLst/>
+            <a:rect l="l" t="t" r="r" b="b"/>
+            <a:pathLst>
+              <a:path w="120000" h="120000" extrusionOk="0">
+                <a:moveTo>
+                  <a:pt x="0" y="0"/>
+                </a:moveTo>
+                <a:lnTo>
+                  <a:pt x="120000" y="0"/>
+                </a:lnTo>
+                <a:lnTo>
+                  <a:pt x="120000" y="120000"/>
+                </a:lnTo>
+                <a:lnTo>
+                  <a:pt x="0" y="120000"/>
+                </a:lnTo>
+                <a:close/>
+              </a:path>
+            </a:pathLst>
+          </a:custGeom>
+          <a:noFill/>
+          <a:ln w="9525" cap="flat" cmpd="sng">
+            <a:solidFill>
+              <a:srgbClr val="000000"/>
+            </a:solidFill>
+            <a:prstDash val="solid"/>
+            <a:round/>
+            <a:headEnd type="none" w="sm" len="sm"/>
+            <a:tailEnd type="none" w="sm" len="sm"/>
+          </a:ln>
+        </p:spPr>
+      </p:sp>
+      <p:sp>
+        <p:nvSpPr>
+          <p:cNvPr id="4" name="Google Shape;4;n"/>
+          <p:cNvSpPr txBox="1">
+            <a:spLocks noGrp="1"/>
+          </p:cNvSpPr>
+          <p:nvPr>
+            <p:ph type="body" idx="1"/>
+          </p:nvPr>
+        </p:nvSpPr>
+        <p:spPr>
+          <a:xfrm>
+            <a:off x="685800" y="4343400"/>
+            <a:ext cx="5486400" cy="4114800"/>
+          </a:xfrm>
+          <a:prstGeom prst="rect">
+            <a:avLst/>
+          </a:prstGeom>
+          <a:noFill/>
+          <a:ln>
+            <a:noFill/>
+          </a:ln>
+        </p:spPr>
+        <p:txBody>
+          <a:bodyPr spcFirstLastPara="1" wrap="square" lIns="91425" tIns="91425" rIns="91425" bIns="91425" anchor="t" anchorCtr="0">
+            <a:noAutofit/>
+          </a:bodyPr>
+          <a:lstStyle>
+            <a:lvl1pPr marL="457200" marR="0" lvl="0" indent="-317500" algn="l" rtl="0">
+              <a:lnSpc>
+                <a:spcPct val="100000"/>
+              </a:lnSpc>
+              <a:spcBef>
+                <a:spcPts val="0"/>
+              </a:spcBef>
+              <a:spcAft>
+                <a:spcPts val="0"/>
+              </a:spcAft>
+              <a:buClr>
+                <a:schemeClr val="accent6"/>
+              </a:buClr>
+              <a:buSzPts val="1400"/>
+              <a:buFont typeface="Century Gothic"/>
+              <a:buChar char="๏"/>
+              <a:defRPr sz="1400" b="0" i="0" u="none" strike="noStrike" cap="none">
+                <a:solidFill>
+                  <a:schemeClr val="dk1"/>
+                </a:solidFill>
+                <a:latin typeface="Century Gothic"/>
+                <a:ea typeface="Century Gothic"/>
+                <a:cs typeface="Century Gothic"/>
+                <a:sym typeface="Century Gothic"/>
+              </a:defRPr>
+            </a:lvl1pPr>
+            <a:lvl2pPr marL="914400" marR="0" lvl="1" indent="-304800" algn="l" rtl="0">
+              <a:lnSpc>
+                <a:spcPct val="100000"/>
+              </a:lnSpc>
+              <a:spcBef>
+                <a:spcPts val="0"/>
+              </a:spcBef>
+              <a:spcAft>
+                <a:spcPts val="0"/>
+              </a:spcAft>
+              <a:buClr>
+                <a:schemeClr val="accent6"/>
+              </a:buClr>
+              <a:buSzPts val="1200"/>
+              <a:buFont typeface="Century Gothic"/>
+              <a:buChar char="&gt;"/>
+              <a:defRPr sz="1200" b="0" i="0" u="none" strike="noStrike" cap="none">
+                <a:solidFill>
+                  <a:schemeClr val="dk1"/>
+                </a:solidFill>
+                <a:latin typeface="Century Gothic"/>
+                <a:ea typeface="Century Gothic"/>
+                <a:cs typeface="Century Gothic"/>
+                <a:sym typeface="Century Gothic"/>
+              </a:defRPr>
+            </a:lvl2pPr>
+            <a:lvl3pPr marL="1371600" marR="0" lvl="2" indent="-292100" algn="l" rtl="0">
+              <a:lnSpc>
+                <a:spcPct val="100000"/>
+              </a:lnSpc>
+              <a:spcBef>
+                <a:spcPts val="0"/>
+              </a:spcBef>
+              <a:spcAft>
+                <a:spcPts val="0"/>
+              </a:spcAft>
+              <a:buClr>
+                <a:schemeClr val="accent6"/>
+              </a:buClr>
+              <a:buSzPts val="1000"/>
+              <a:buFont typeface="Century Gothic"/>
+              <a:buChar char="+"/>
+              <a:defRPr sz="1000" b="0" i="0" u="none" strike="noStrike" cap="none">
+                <a:solidFill>
+                  <a:schemeClr val="dk1"/>
+                </a:solidFill>
+                <a:latin typeface="Century Gothic"/>
+                <a:ea typeface="Century Gothic"/>
+                <a:cs typeface="Century Gothic"/>
+                <a:sym typeface="Century Gothic"/>
+              </a:defRPr>
+            </a:lvl3pPr>
+            <a:lvl4pPr marL="1828800" marR="0" lvl="3" indent="-285750" algn="l" rtl="0">
+              <a:lnSpc>
+                <a:spcPct val="100000"/>
+              </a:lnSpc>
+              <a:spcBef>
+                <a:spcPts val="0"/>
+              </a:spcBef>
+              <a:spcAft>
+                <a:spcPts val="0"/>
+              </a:spcAft>
+              <a:buClr>
+                <a:schemeClr val="accent6"/>
+              </a:buClr>
+              <a:buSzPts val="900"/>
+              <a:buFont typeface="Courier New"/>
+              <a:buChar char="o"/>
+              <a:defRPr sz="900" b="0" i="0" u="none" strike="noStrike" cap="none">
+                <a:solidFill>
+                  <a:schemeClr val="dk1"/>
+                </a:solidFill>
+                <a:latin typeface="Century Gothic"/>
+                <a:ea typeface="Century Gothic"/>
+                <a:cs typeface="Century Gothic"/>
+                <a:sym typeface="Century Gothic"/>
+              </a:defRPr>
+            </a:lvl4pPr>
+            <a:lvl5pPr marL="2286000" marR="0" lvl="4" indent="-279400" algn="l" rtl="0">
+              <a:lnSpc>
+                <a:spcPct val="100000"/>
+              </a:lnSpc>
+              <a:spcBef>
+                <a:spcPts val="0"/>
+              </a:spcBef>
+              <a:spcAft>
+                <a:spcPts val="0"/>
+              </a:spcAft>
+              <a:buClr>
+                <a:schemeClr val="accent6"/>
+              </a:buClr>
+              <a:buSzPts val="800"/>
+              <a:buFont typeface="Century Gothic"/>
+              <a:buChar char="○"/>
+              <a:defRPr sz="800" b="0" i="0" u="none" strike="noStrike" cap="none">
+                <a:solidFill>
+                  <a:schemeClr val="dk1"/>
+                </a:solidFill>
+                <a:latin typeface="Century Gothic"/>
+                <a:ea typeface="Century Gothic"/>
+                <a:cs typeface="Century Gothic"/>
+                <a:sym typeface="Century Gothic"/>
+              </a:defRPr>
+            </a:lvl5pPr>
+            <a:lvl6pPr marL="2743200" marR="0" lvl="5" indent="-273050" algn="l" rtl="0">
+              <a:lnSpc>
+                <a:spcPct val="100000"/>
+              </a:lnSpc>
+              <a:spcBef>
+                <a:spcPts val="0"/>
+              </a:spcBef>
+              <a:spcAft>
+                <a:spcPts val="0"/>
+              </a:spcAft>
+              <a:buClr>
+                <a:schemeClr val="accent6"/>
+              </a:buClr>
+              <a:buSzPts val="700"/>
+              <a:buFont typeface="Century Gothic"/>
+              <a:buChar char="○"/>
+              <a:defRPr sz="700" b="0" i="0" u="none" strike="noStrike" cap="none">
+                <a:solidFill>
+                  <a:schemeClr val="dk1"/>
+                </a:solidFill>
+                <a:latin typeface="Century Gothic"/>
+                <a:ea typeface="Century Gothic"/>
+                <a:cs typeface="Century Gothic"/>
+                <a:sym typeface="Century Gothic"/>
+              </a:defRPr>
+            </a:lvl6pPr>
+            <a:lvl7pPr marL="3200400" marR="0" lvl="6" indent="-266700" algn="l" rtl="0">
+              <a:lnSpc>
+                <a:spcPct val="100000"/>
+              </a:lnSpc>
+              <a:spcBef>
+                <a:spcPts val="0"/>
+              </a:spcBef>
+              <a:spcAft>
+                <a:spcPts val="0"/>
+              </a:spcAft>
+              <a:buClr>
+                <a:schemeClr val="accent6"/>
+              </a:buClr>
+              <a:buSzPts val="600"/>
+              <a:buFont typeface="Century Gothic"/>
+              <a:buChar char="○"/>
+              <a:defRPr sz="600" b="0" i="0" u="none" strike="noStrike" cap="none">
+                <a:solidFill>
+                  <a:schemeClr val="dk1"/>
+                </a:solidFill>
+                <a:latin typeface="Century Gothic"/>
+                <a:ea typeface="Century Gothic"/>
+                <a:cs typeface="Century Gothic"/>
+                <a:sym typeface="Century Gothic"/>
+              </a:defRPr>
+            </a:lvl7pPr>
+            <a:lvl8pPr marL="3657600" marR="0" lvl="7" indent="-266700" algn="l" rtl="0">
+              <a:lnSpc>
+                <a:spcPct val="100000"/>
+              </a:lnSpc>
+              <a:spcBef>
+                <a:spcPts val="0"/>
+              </a:spcBef>
+              <a:spcAft>
+                <a:spcPts val="0"/>
+              </a:spcAft>
+              <a:buClr>
+                <a:schemeClr val="accent6"/>
+              </a:buClr>
+              <a:buSzPts val="600"/>
+              <a:buFont typeface="Century Gothic"/>
+              <a:buChar char="○"/>
+              <a:defRPr sz="600" b="0" i="0" u="none" strike="noStrike" cap="none">
+                <a:solidFill>
+                  <a:schemeClr val="dk1"/>
+                </a:solidFill>
+                <a:latin typeface="Century Gothic"/>
+                <a:ea typeface="Century Gothic"/>
+                <a:cs typeface="Century Gothic"/>
+                <a:sym typeface="Century Gothic"/>
+              </a:defRPr>
+            </a:lvl8pPr>
+            <a:lvl9pPr marL="4114800" marR="0" lvl="8" indent="-266700" algn="l" rtl="0">
+              <a:lnSpc>
+                <a:spcPct val="100000"/>
+              </a:lnSpc>
+              <a:spcBef>
+                <a:spcPts val="0"/>
+              </a:spcBef>
+              <a:spcAft>
+                <a:spcPts val="0"/>
+              </a:spcAft>
+              <a:buClr>
+                <a:schemeClr val="accent6"/>
+              </a:buClr>
+              <a:buSzPts val="600"/>
+              <a:buFont typeface="Century Gothic"/>
+              <a:buChar char="○"/>
+              <a:defRPr sz="600" b="0" i="0" u="none" strike="noStrike" cap="none">
+                <a:solidFill>
+                  <a:schemeClr val="accent6"/>
+                </a:solidFill>
+                <a:latin typeface="Century Gothic"/>
+                <a:ea typeface="Century Gothic"/>
+                <a:cs typeface="Century Gothic"/>
+                <a:sym typeface="Century Gothic"/>
+              </a:defRPr>
+            </a:lvl9pPr>
+          </a:lstStyle>
+          <a:p>
+            <a:endParaRPr/>
+          </a:p>
+        </p:txBody>
+      </p:sp>
+    </p:spTree>
+  </p:cSld>
+  <p:clrMap bg1="lt1" tx1="dk1" bg2="dk2" tx2="lt2" accent1="accent1" accent2="accent2" accent3="accent3" accent4="accent4" accent5="accent5" accent6="accent6" hlink="hlink" folHlink="folHlink"/>
+  <p:notesStyle>
+    <a:defPPr marR="0" lvl="0" algn="l" rtl="0">
+      <a:lnSpc>
+        <a:spcPct val="100000"/>
+      </a:lnSpc>
+      <a:spcBef>
+        <a:spcPts val="0"/>
+      </a:spcBef>
+      <a:spcAft>
+        <a:spcPts val="0"/>
+      </a:spcAft>
+    </a:defPPr>
+    <a:lvl1pPr marR="0" lvl="0" algn="l" rtl="0">
+      <a:lnSpc>
+        <a:spcPct val="100000"/>
+      </a:lnSpc>
+      <a:spcBef>
+        <a:spcPts val="0"/>
+      </a:spcBef>
+      <a:spcAft>
+        <a:spcPts val="0"/>
+      </a:spcAft>
+      <a:buClr>
+        <a:srgbClr val="000000"/>
+      </a:buClr>
+      <a:buFont typeface="Arial"/>
+      <a:defRPr sz="1400" b="0" i="0" u="none" strike="noStrike" cap="none">
+        <a:solidFill>
+          <a:srgbClr val="000000"/>
+        </a:solidFill>
+        <a:latin typeface="Arial"/>
+        <a:ea typeface="Arial"/>
+        <a:cs typeface="Arial"/>
+        <a:sym typeface="Arial"/>
+      </a:defRPr>
+    </a:lvl1pPr>
+    <a:lvl2pPr marR="0" lvl="1" algn="l" rtl="0">
+      <a:lnSpc>
+        <a:spcPct val="100000"/>
+      </a:lnSpc>
+      <a:spcBef>
+        <a:spcPts val="0"/>
+      </a:spcBef>
+      <a:spcAft>
+        <a:spcPts val="0"/>
+      </a:spcAft>
+      <a:buClr>
+        <a:srgbClr val="000000"/>
+      </a:buClr>
+      <a:buFont typeface="Arial"/>
+      <a:defRPr sz="1400" b="0" i="0" u="none" strike="noStrike" cap="none">
+        <a:solidFill>
+          <a:srgbClr val="000000"/>
+        </a:solidFill>
+        <a:latin typeface="Arial"/>
+        <a:ea typeface="Arial"/>
+        <a:cs typeface="Arial"/>
+        <a:sym typeface="Arial"/>
+      </a:defRPr>
+    </a:lvl2pPr>
+    <a:lvl3pPr marR="0" lvl="2" algn="l" rtl="0">
+      <a:lnSpc>
+        <a:spcPct val="100000"/>
+      </a:lnSpc>
+      <a:spcBef>
+        <a:spcPts val="0"/>
+      </a:spcBef>
+      <a:spcAft>
+        <a:spcPts val="0"/>
+      </a:spcAft>
+      <a:buClr>
+        <a:srgbClr val="000000"/>
+      </a:buClr>
+      <a:buFont typeface="Arial"/>
+      <a:defRPr sz="1400" b="0" i="0" u="none" strike="noStrike" cap="none">
+        <a:solidFill>
+          <a:srgbClr val="000000"/>
+        </a:solidFill>
+        <a:latin typeface="Arial"/>
+        <a:ea typeface="Arial"/>
+        <a:cs typeface="Arial"/>
+        <a:sym typeface="Arial"/>
+      </a:defRPr>
+    </a:lvl3pPr>
+    <a:lvl4pPr marR="0" lvl="3" algn="l" rtl="0">
+      <a:lnSpc>
+        <a:spcPct val="100000"/>
+      </a:lnSpc>
+      <a:spcBef>
+        <a:spcPts val="0"/>
+      </a:spcBef>
+      <a:spcAft>
+        <a:spcPts val="0"/>
+      </a:spcAft>
+      <a:buClr>
+        <a:srgbClr val="000000"/>
+      </a:buClr>
+      <a:buFont typeface="Arial"/>
+      <a:defRPr sz="1400" b="0" i="0" u="none" strike="noStrike" cap="none">
+        <a:solidFill>
+          <a:srgbClr val="000000"/>
+        </a:solidFill>
+        <a:latin typeface="Arial"/>
+        <a:ea typeface="Arial"/>
+        <a:cs typeface="Arial"/>
+        <a:sym typeface="Arial"/>
+      </a:defRPr>
+    </a:lvl4pPr>
+    <a:lvl5pPr marR="0" lvl="4" algn="l" rtl="0">
+      <a:lnSpc>
+        <a:spcPct val="100000"/>
+      </a:lnSpc>
+      <a:spcBef>
+        <a:spcPts val="0"/>
+      </a:spcBef>
+      <a:spcAft>
+        <a:spcPts val="0"/>
+      </a:spcAft>
+      <a:buClr>
+        <a:srgbClr val="000000"/>
+      </a:buClr>
+      <a:buFont typeface="Arial"/>
+      <a:defRPr sz="1400" b="0" i="0" u="none" strike="noStrike" cap="none">
+        <a:solidFill>
+          <a:srgbClr val="000000"/>
+        </a:solidFill>
+        <a:latin typeface="Arial"/>
+        <a:ea typeface="Arial"/>
+        <a:cs typeface="Arial"/>
+        <a:sym typeface="Arial"/>
+      </a:defRPr>
+    </a:lvl5pPr>
+    <a:lvl6pPr marR="0" lvl="5" algn="l" rtl="0">
+      <a:lnSpc>
+        <a:spcPct val="100000"/>
+      </a:lnSpc>
+      <a:spcBef>
+        <a:spcPts val="0"/>
+      </a:spcBef>
+      <a:spcAft>
+        <a:spcPts val="0"/>
+      </a:spcAft>
+      <a:buClr>
+        <a:srgbClr val="000000"/>
+      </a:buClr>
+      <a:buFont typeface="Arial"/>
+      <a:defRPr sz="1400" b="0" i="0" u="none" strike="noStrike" cap="none">
+        <a:solidFill>
+          <a:srgbClr val="000000"/>
+        </a:solidFill>
+        <a:latin typeface="Arial"/>
+        <a:ea typeface="Arial"/>
+        <a:cs typeface="Arial"/>
+        <a:sym typeface="Arial"/>
+      </a:defRPr>
+    </a:lvl6pPr>
+    <a:lvl7pPr marR="0" lvl="6" algn="l" rtl="0">
+      <a:lnSpc>
+        <a:spcPct val="100000"/>
+      </a:lnSpc>
+      <a:spcBef>
+        <a:spcPts val="0"/>
+      </a:spcBef>
+      <a:spcAft>
+        <a:spcPts val="0"/>
+      </a:spcAft>
+      <a:buClr>
+        <a:srgbClr val="000000"/>
+      </a:buClr>
+      <a:buFont typeface="Arial"/>
+      <a:defRPr sz="1400" b="0" i="0" u="none" strike="noStrike" cap="none">
+        <a:solidFill>
+          <a:srgbClr val="000000"/>
+        </a:solidFill>
+        <a:latin typeface="Arial"/>
+        <a:ea typeface="Arial"/>
+        <a:cs typeface="Arial"/>
+        <a:sym typeface="Arial"/>
+      </a:defRPr>
+    </a:lvl7pPr>
+    <a:lvl8pPr marR="0" lvl="7" algn="l" rtl="0">
+      <a:lnSpc>
+        <a:spcPct val="100000"/>
+      </a:lnSpc>
+      <a:spcBef>
+        <a:spcPts val="0"/>
+      </a:spcBef>
+      <a:spcAft>
+        <a:spcPts val="0"/>
+      </a:spcAft>
+      <a:buClr>
+        <a:srgbClr val="000000"/>
+      </a:buClr>
+      <a:buFont typeface="Arial"/>
+      <a:defRPr sz="1400" b="0" i="0" u="none" strike="noStrike" cap="none">
+        <a:solidFill>
+          <a:srgbClr val="000000"/>
+        </a:solidFill>
+        <a:latin typeface="Arial"/>
+        <a:ea typeface="Arial"/>
+        <a:cs typeface="Arial"/>
+        <a:sym typeface="Arial"/>
+      </a:defRPr>
+    </a:lvl8pPr>
+    <a:lvl9pPr marR="0" lvl="8" algn="l" rtl="0">
+      <a:lnSpc>
+        <a:spcPct val="100000"/>
+      </a:lnSpc>
+      <a:spcBef>
+        <a:spcPts val="0"/>
+      </a:spcBef>
+      <a:spcAft>
+        <a:spcPts val="0"/>
+      </a:spcAft>
+      <a:buClr>
+        <a:srgbClr val="000000"/>
+      </a:buClr>
+      <a:buFont typeface="Arial"/>
+      <a:defRPr sz="1400" b="0" i="0" u="none" strike="noStrike" cap="none">
+        <a:solidFill>
+          <a:srgbClr val="000000"/>
+        </a:solidFill>
+        <a:latin typeface="Arial"/>
+        <a:ea typeface="Arial"/>
+        <a:cs typeface="Arial"/>
+        <a:sym typeface="Arial"/>
+      </a:defRPr>
+    </a:lvl9pPr>
+  </p:notesStyle>
+</p:notesMaster>
+</file>
+
+<file path=ppt\notesSlides\notesSlide1.xml><?xml version="1.0" encoding="utf-8"?>
+<p:notes xmlns:a="http://schemas.openxmlformats.org/drawingml/2006/main" xmlns:r="http://schemas.openxmlformats.org/officeDocument/2006/relationships" xmlns:p="http://schemas.openxmlformats.org/presentationml/2006/main" showMasterSp="0" showMasterPhAnim="0">
+  <p:cSld>
+    <p:spTree>
+      <p:nvGrpSpPr>
+        <p:cNvPr id="1" name="Shape 206"/>
+        <p:cNvGrpSpPr/>
+        <p:nvPr/>
+      </p:nvGrpSpPr>
+      <p:grpSpPr>
+        <a:xfrm>
+          <a:off x="0" y="0"/>
+          <a:ext cx="0" cy="0"/>
+          <a:chOff x="0" y="0"/>
+          <a:chExt cx="0" cy="0"/>
+        </a:xfrm>
+      </p:grpSpPr>
+      <p:sp>
+        <p:nvSpPr>
+          <p:cNvPr id="207" name="Google Shape;207;g20c3afcc4d7_0_44918:notes"/>
+          <p:cNvSpPr txBox="1">
+            <a:spLocks noGrp="1"/>
+          </p:cNvSpPr>
+          <p:nvPr>
+            <p:ph type="body" idx="1"/>
+          </p:nvPr>
+        </p:nvSpPr>
+        <p:spPr>
+          <a:xfrm>
+            <a:off x="679780" y="4689516"/>
+            <a:ext cx="5438100" cy="4442700"/>
+          </a:xfrm>
+          <a:prstGeom prst="rect">
+            <a:avLst/>
+          </a:prstGeom>
+          <a:noFill/>
+          <a:ln>
+            <a:noFill/>
+          </a:ln>
+        </p:spPr>
+        <p:txBody>
+          <a:bodyPr spcFirstLastPara="1" wrap="square" lIns="91425" tIns="91425" rIns="91425" bIns="91425" anchor="t" anchorCtr="0">
+            <a:noAutofit/>
+          </a:bodyPr>
+          <a:lstStyle/>
+          <a:p>
+            <a:pPr marL="0" lvl="0" indent="0" algn="l" rtl="0">
+              <a:lnSpc>
+                <a:spcPct val="100000"/>
+              </a:lnSpc>
+              <a:spcBef>
+                <a:spcPts val="0"/>
+              </a:spcBef>
+              <a:spcAft>
+                <a:spcPts val="0"/>
+              </a:spcAft>
+              <a:buSzPts val="1400"/>
+              <a:buNone/>
+            </a:pPr>
+            <a:endParaRPr/>
+          </a:p>
+        </p:txBody>
+      </p:sp>
+      <p:sp>
+        <p:nvSpPr>
+          <p:cNvPr id="208" name="Google Shape;208;g20c3afcc4d7_0_44918:notes"/>
+          <p:cNvSpPr>
+            <a:spLocks noGrp="1" noRot="1" noChangeAspect="1"/>
+          </p:cNvSpPr>
+          <p:nvPr>
+            <p:ph type="sldImg" idx="2"/>
+          </p:nvPr>
+        </p:nvSpPr>
+        <p:spPr>
+          <a:xfrm>
+            <a:off x="103188" y="738188"/>
+            <a:ext cx="6591300" cy="3708400"/>
+          </a:xfrm>
+          <a:custGeom>
+            <a:avLst/>
+            <a:gdLst/>
+            <a:ahLst/>
+            <a:cxnLst/>
+            <a:rect l="l" t="t" r="r" b="b"/>
+            <a:pathLst>
+              <a:path w="120000" h="120000" extrusionOk="0">
+                <a:moveTo>
+                  <a:pt x="0" y="0"/>
+                </a:moveTo>
+                <a:lnTo>
+                  <a:pt x="120000" y="0"/>
+                </a:lnTo>
+                <a:lnTo>
+                  <a:pt x="120000" y="120000"/>
+                </a:lnTo>
+                <a:lnTo>
+                  <a:pt x="0" y="120000"/>
+                </a:lnTo>
+                <a:close/>
+              </a:path>
+            </a:pathLst>
+          </a:custGeom>
+          <a:noFill/>
+          <a:ln w="9525" cap="flat" cmpd="sng">
+            <a:solidFill>
+              <a:srgbClr val="000000"/>
+            </a:solidFill>
+            <a:prstDash val="solid"/>
+            <a:round/>
+            <a:headEnd type="none" w="sm" len="sm"/>
+            <a:tailEnd type="none" w="sm" len="sm"/>
+          </a:ln>
+        </p:spPr>
+      </p:sp>
+    </p:spTree>
+  </p:cSld>
+  <p:clrMapOvr>
+    <a:masterClrMapping/>
+  </p:clrMapOvr>
+</p:notes>
+</file>
+
+<file path=ppt\notesSlides\notesSlide2.xml><?xml version="1.0" encoding="utf-8"?>
+<p:notes xmlns:a="http://schemas.openxmlformats.org/drawingml/2006/main" xmlns:r="http://schemas.openxmlformats.org/officeDocument/2006/relationships" xmlns:p="http://schemas.openxmlformats.org/presentationml/2006/main" showMasterSp="0" showMasterPhAnim="0">
+  <p:cSld>
+    <p:spTree>
+      <p:nvGrpSpPr>
+        <p:cNvPr id="1" name="Shape 291"/>
+        <p:cNvGrpSpPr/>
+        <p:nvPr/>
+      </p:nvGrpSpPr>
+      <p:grpSpPr>
+        <a:xfrm>
+          <a:off x="0" y="0"/>
+          <a:ext cx="0" cy="0"/>
+          <a:chOff x="0" y="0"/>
+          <a:chExt cx="0" cy="0"/>
+        </a:xfrm>
+      </p:grpSpPr>
+      <p:sp>
+        <p:nvSpPr>
+          <p:cNvPr id="292" name="Google Shape;292;g3072d353d33_0_186:notes"/>
+          <p:cNvSpPr txBox="1">
+            <a:spLocks noGrp="1"/>
+          </p:cNvSpPr>
+          <p:nvPr>
+            <p:ph type="body" idx="1"/>
+          </p:nvPr>
+        </p:nvSpPr>
+        <p:spPr>
+          <a:xfrm>
+            <a:off x="691886" y="4022836"/>
+            <a:ext cx="5535000" cy="3811200"/>
+          </a:xfrm>
+          <a:prstGeom prst="rect">
+            <a:avLst/>
+          </a:prstGeom>
+          <a:noFill/>
+          <a:ln>
+            <a:noFill/>
+          </a:ln>
+        </p:spPr>
+        <p:txBody>
+          <a:bodyPr spcFirstLastPara="1" wrap="square" lIns="91425" tIns="91425" rIns="91425" bIns="91425" anchor="t" anchorCtr="0">
+            <a:noAutofit/>
+          </a:bodyPr>
+          <a:lstStyle/>
+          <a:p>
+            <a:pPr marL="0" lvl="0" indent="0" algn="l" rtl="0">
+              <a:lnSpc>
+                <a:spcPct val="100000"/>
+              </a:lnSpc>
+              <a:spcBef>
+                <a:spcPts val="0"/>
+              </a:spcBef>
+              <a:spcAft>
+                <a:spcPts val="0"/>
+              </a:spcAft>
+              <a:buSzPts val="1400"/>
+              <a:buNone/>
+            </a:pPr>
+            <a:endParaRPr/>
+          </a:p>
+        </p:txBody>
+      </p:sp>
+      <p:sp>
+        <p:nvSpPr>
+          <p:cNvPr id="293" name="Google Shape;293;g3072d353d33_0_186:notes"/>
+          <p:cNvSpPr>
+            <a:spLocks noGrp="1" noRot="1" noChangeAspect="1"/>
+          </p:cNvSpPr>
+          <p:nvPr>
+            <p:ph type="sldImg" idx="2"/>
+          </p:nvPr>
+        </p:nvSpPr>
+        <p:spPr>
+          <a:xfrm>
+            <a:off x="635000" y="635000"/>
+            <a:ext cx="5648325" cy="3176588"/>
+          </a:xfrm>
+          <a:custGeom>
+            <a:avLst/>
+            <a:gdLst/>
+            <a:ahLst/>
+            <a:cxnLst/>
+            <a:rect l="l" t="t" r="r" b="b"/>
+            <a:pathLst>
+              <a:path w="120000" h="120000" extrusionOk="0">
+                <a:moveTo>
+                  <a:pt x="0" y="0"/>
+                </a:moveTo>
+                <a:lnTo>
+                  <a:pt x="120000" y="0"/>
+                </a:lnTo>
+                <a:lnTo>
+                  <a:pt x="120000" y="120000"/>
+                </a:lnTo>
+                <a:lnTo>
+                  <a:pt x="0" y="120000"/>
+                </a:lnTo>
+                <a:close/>
+              </a:path>
+            </a:pathLst>
+          </a:custGeom>
+          <a:noFill/>
+          <a:ln w="9525" cap="flat" cmpd="sng">
+            <a:solidFill>
+              <a:srgbClr val="000000"/>
+            </a:solidFill>
+            <a:prstDash val="solid"/>
+            <a:round/>
+            <a:headEnd type="none" w="sm" len="sm"/>
+            <a:tailEnd type="none" w="sm" len="sm"/>
+          </a:ln>
+        </p:spPr>
+      </p:sp>
+    </p:spTree>
+  </p:cSld>
+  <p:clrMapOvr>
+    <a:masterClrMapping/>
+  </p:clrMapOvr>
+</p:notes>
+</file>
+
+<file path=ppt\notesSlides\notesSlide3.xml><?xml version="1.0" encoding="utf-8"?>
+<p:notes xmlns:a="http://schemas.openxmlformats.org/drawingml/2006/main" xmlns:r="http://schemas.openxmlformats.org/officeDocument/2006/relationships" xmlns:p="http://schemas.openxmlformats.org/presentationml/2006/main" showMasterSp="0" showMasterPhAnim="0">
+  <p:cSld>
+    <p:spTree>
+      <p:nvGrpSpPr>
+        <p:cNvPr id="1" name="Shape 363"/>
+        <p:cNvGrpSpPr/>
+        <p:nvPr/>
+      </p:nvGrpSpPr>
+      <p:grpSpPr>
+        <a:xfrm>
+          <a:off x="0" y="0"/>
+          <a:ext cx="0" cy="0"/>
+          <a:chOff x="0" y="0"/>
+          <a:chExt cx="0" cy="0"/>
+        </a:xfrm>
+      </p:grpSpPr>
+      <p:sp>
+        <p:nvSpPr>
+          <p:cNvPr id="364" name="Google Shape;364;g3072d353d33_0_212:notes"/>
+          <p:cNvSpPr txBox="1">
+            <a:spLocks noGrp="1"/>
+          </p:cNvSpPr>
+          <p:nvPr>
+            <p:ph type="body" idx="1"/>
+          </p:nvPr>
+        </p:nvSpPr>
+        <p:spPr>
+          <a:xfrm>
+            <a:off x="691886" y="4022836"/>
+            <a:ext cx="5535000" cy="3811200"/>
+          </a:xfrm>
+          <a:prstGeom prst="rect">
+            <a:avLst/>
+          </a:prstGeom>
+          <a:noFill/>
+          <a:ln>
+            <a:noFill/>
+          </a:ln>
+        </p:spPr>
+        <p:txBody>
+          <a:bodyPr spcFirstLastPara="1" wrap="square" lIns="91425" tIns="91425" rIns="91425" bIns="91425" anchor="t" anchorCtr="0">
+            <a:noAutofit/>
+          </a:bodyPr>
+          <a:lstStyle/>
+          <a:p>
+            <a:pPr marL="0" lvl="0" indent="0" algn="l" rtl="0">
+              <a:lnSpc>
+                <a:spcPct val="100000"/>
+              </a:lnSpc>
+              <a:spcBef>
+                <a:spcPts val="0"/>
+              </a:spcBef>
+              <a:spcAft>
+                <a:spcPts val="0"/>
+              </a:spcAft>
+              <a:buSzPts val="1400"/>
+              <a:buNone/>
+            </a:pPr>
+            <a:endParaRPr/>
+          </a:p>
+        </p:txBody>
+      </p:sp>
+      <p:sp>
+        <p:nvSpPr>
+          <p:cNvPr id="365" name="Google Shape;365;g3072d353d33_0_212:notes"/>
+          <p:cNvSpPr>
+            <a:spLocks noGrp="1" noRot="1" noChangeAspect="1"/>
+          </p:cNvSpPr>
+          <p:nvPr>
+            <p:ph type="sldImg" idx="2"/>
+          </p:nvPr>
+        </p:nvSpPr>
+        <p:spPr>
+          <a:xfrm>
+            <a:off x="635000" y="635000"/>
+            <a:ext cx="5648325" cy="3176588"/>
+          </a:xfrm>
+          <a:custGeom>
+            <a:avLst/>
+            <a:gdLst/>
+            <a:ahLst/>
+            <a:cxnLst/>
+            <a:rect l="l" t="t" r="r" b="b"/>
+            <a:pathLst>
+              <a:path w="120000" h="120000" extrusionOk="0">
+                <a:moveTo>
+                  <a:pt x="0" y="0"/>
+                </a:moveTo>
+                <a:lnTo>
+                  <a:pt x="120000" y="0"/>
+                </a:lnTo>
+                <a:lnTo>
+                  <a:pt x="120000" y="120000"/>
+                </a:lnTo>
+                <a:lnTo>
+                  <a:pt x="0" y="120000"/>
+                </a:lnTo>
+                <a:close/>
+              </a:path>
+            </a:pathLst>
+          </a:custGeom>
+          <a:noFill/>
+          <a:ln w="9525" cap="flat" cmpd="sng">
+            <a:solidFill>
+              <a:srgbClr val="000000"/>
+            </a:solidFill>
+            <a:prstDash val="solid"/>
+            <a:round/>
+            <a:headEnd type="none" w="sm" len="sm"/>
+            <a:tailEnd type="none" w="sm" len="sm"/>
+          </a:ln>
+        </p:spPr>
+      </p:sp>
+    </p:spTree>
+  </p:cSld>
+  <p:clrMapOvr>
+    <a:masterClrMapping/>
+  </p:clrMapOvr>
+</p:notes>
+</file>
+
+<file path=ppt\notesSlides\notesSlide4.xml><?xml version="1.0" encoding="utf-8"?>
+<p:notes xmlns:a="http://schemas.openxmlformats.org/drawingml/2006/main" xmlns:r="http://schemas.openxmlformats.org/officeDocument/2006/relationships" xmlns:p="http://schemas.openxmlformats.org/presentationml/2006/main" showMasterSp="0" showMasterPhAnim="0">
+  <p:cSld>
+    <p:spTree>
+      <p:nvGrpSpPr>
+        <p:cNvPr id="1" name="Shape 432"/>
+        <p:cNvGrpSpPr/>
+        <p:nvPr/>
+      </p:nvGrpSpPr>
+      <p:grpSpPr>
+        <a:xfrm>
+          <a:off x="0" y="0"/>
+          <a:ext cx="0" cy="0"/>
+          <a:chOff x="0" y="0"/>
+          <a:chExt cx="0" cy="0"/>
+        </a:xfrm>
+      </p:grpSpPr>
+      <p:sp>
+        <p:nvSpPr>
+          <p:cNvPr id="433" name="Google Shape;433;g3072d353d33_0_216:notes"/>
+          <p:cNvSpPr txBox="1">
+            <a:spLocks noGrp="1"/>
+          </p:cNvSpPr>
+          <p:nvPr>
+            <p:ph type="body" idx="1"/>
+          </p:nvPr>
+        </p:nvSpPr>
+        <p:spPr>
+          <a:xfrm>
+            <a:off x="691886" y="4022836"/>
+            <a:ext cx="5535000" cy="3811200"/>
+          </a:xfrm>
+          <a:prstGeom prst="rect">
+            <a:avLst/>
+          </a:prstGeom>
+          <a:noFill/>
+          <a:ln>
+            <a:noFill/>
+          </a:ln>
+        </p:spPr>
+        <p:txBody>
+          <a:bodyPr spcFirstLastPara="1" wrap="square" lIns="91425" tIns="91425" rIns="91425" bIns="91425" anchor="t" anchorCtr="0">
+            <a:noAutofit/>
+          </a:bodyPr>
+          <a:lstStyle/>
+          <a:p>
+            <a:pPr marL="0" lvl="0" indent="0" algn="l" rtl="0">
+              <a:lnSpc>
+                <a:spcPct val="100000"/>
+              </a:lnSpc>
+              <a:spcBef>
+                <a:spcPts val="0"/>
+              </a:spcBef>
+              <a:spcAft>
+                <a:spcPts val="0"/>
+              </a:spcAft>
+              <a:buSzPts val="1400"/>
+              <a:buNone/>
+            </a:pPr>
+            <a:endParaRPr/>
+          </a:p>
+        </p:txBody>
+      </p:sp>
+      <p:sp>
+        <p:nvSpPr>
+          <p:cNvPr id="434" name="Google Shape;434;g3072d353d33_0_216:notes"/>
+          <p:cNvSpPr>
+            <a:spLocks noGrp="1" noRot="1" noChangeAspect="1"/>
+          </p:cNvSpPr>
+          <p:nvPr>
+            <p:ph type="sldImg" idx="2"/>
+          </p:nvPr>
+        </p:nvSpPr>
+        <p:spPr>
+          <a:xfrm>
+            <a:off x="635000" y="635000"/>
+            <a:ext cx="5648325" cy="3176588"/>
+          </a:xfrm>
+          <a:custGeom>
+            <a:avLst/>
+            <a:gdLst/>
+            <a:ahLst/>
+            <a:cxnLst/>
+            <a:rect l="l" t="t" r="r" b="b"/>
+            <a:pathLst>
+              <a:path w="120000" h="120000" extrusionOk="0">
+                <a:moveTo>
+                  <a:pt x="0" y="0"/>
+                </a:moveTo>
+                <a:lnTo>
+                  <a:pt x="120000" y="0"/>
+                </a:lnTo>
+                <a:lnTo>
+                  <a:pt x="120000" y="120000"/>
+                </a:lnTo>
+                <a:lnTo>
+                  <a:pt x="0" y="120000"/>
+                </a:lnTo>
+                <a:close/>
+              </a:path>
+            </a:pathLst>
+          </a:custGeom>
+          <a:noFill/>
+          <a:ln w="9525" cap="flat" cmpd="sng">
+            <a:solidFill>
+              <a:srgbClr val="000000"/>
+            </a:solidFill>
+            <a:prstDash val="solid"/>
+            <a:round/>
+            <a:headEnd type="none" w="sm" len="sm"/>
+            <a:tailEnd type="none" w="sm" len="sm"/>
+          </a:ln>
+        </p:spPr>
+      </p:sp>
+    </p:spTree>
+  </p:cSld>
+  <p:clrMapOvr>
+    <a:masterClrMapping/>
+  </p:clrMapOvr>
+</p:notes>
+</file>
+
+<file path=ppt\presProps.xml><?xml version="1.0" encoding="utf-8"?>
+<p:presentationPr xmlns:a="http://schemas.openxmlformats.org/drawingml/2006/main" xmlns:r="http://schemas.openxmlformats.org/officeDocument/2006/relationships" xmlns:p="http://schemas.openxmlformats.org/presentationml/2006/main">
+  <p:extLst>
+    <p:ext uri="{E76CE94A-603C-4142-B9EB-6D1370010A27}">
+      <p14:discardImageEditData xmlns:p14="http://schemas.microsoft.com/office/powerpoint/2010/main" val="0"/>
+    </p:ext>
+    <p:ext uri="{D31A062A-798A-4329-ABDD-BBA856620510}">
+      <p14:defaultImageDpi xmlns:p14="http://schemas.microsoft.com/office/powerpoint/2010/main" val="220"/>
+    </p:ext>
+    <p:ext uri="{FD5EFAAD-0ECE-453E-9831-46B23BE46B34}">
+      <p15:chartTrackingRefBased xmlns:p15="http://schemas.microsoft.com/office/powerpoint/2012/main" val="0"/>
+    </p:ext>
+  </p:extLst>
+</p:presentationPr>
+</file>
+
+<file path=ppt\presentation.xml><?xml version="1.0" encoding="utf-8"?>
 <p:presentation xmlns:a="http://schemas.openxmlformats.org/drawingml/2006/main" xmlns:r="http://schemas.openxmlformats.org/officeDocument/2006/relationships" xmlns:p="http://schemas.openxmlformats.org/presentationml/2006/main" strictFirstAndLastChars="0" embedTrueTypeFonts="1" saveSubsetFonts="1" autoCompressPictures="0">
   <p:sldMasterIdLst>
     <p:sldMasterId id="2147483648" r:id="rId1"/>
@@ -324,1074 +1512,7 @@
 </p:presentation>
 </file>
 
-<file path=ppt/notesMasters/notesMaster1.xml><?xml version="1.0" encoding="utf-8"?>
-<p:notesMaster xmlns:a="http://schemas.openxmlformats.org/drawingml/2006/main" xmlns:r="http://schemas.openxmlformats.org/officeDocument/2006/relationships" xmlns:p="http://schemas.openxmlformats.org/presentationml/2006/main">
-  <p:cSld>
-    <p:bg>
-      <p:bgPr>
-        <a:solidFill>
-          <a:schemeClr val="lt1"/>
-        </a:solidFill>
-        <a:effectLst/>
-      </p:bgPr>
-    </p:bg>
-    <p:spTree>
-      <p:nvGrpSpPr>
-        <p:cNvPr id="1" name="Shape 2"/>
-        <p:cNvGrpSpPr/>
-        <p:nvPr/>
-      </p:nvGrpSpPr>
-      <p:grpSpPr>
-        <a:xfrm>
-          <a:off x="0" y="0"/>
-          <a:ext cx="0" cy="0"/>
-          <a:chOff x="0" y="0"/>
-          <a:chExt cx="0" cy="0"/>
-        </a:xfrm>
-      </p:grpSpPr>
-      <p:sp>
-        <p:nvSpPr>
-          <p:cNvPr id="3" name="Google Shape;3;n"/>
-          <p:cNvSpPr>
-            <a:spLocks noGrp="1" noRot="1" noChangeAspect="1"/>
-          </p:cNvSpPr>
-          <p:nvPr>
-            <p:ph type="sldImg" idx="2"/>
-          </p:nvPr>
-        </p:nvSpPr>
-        <p:spPr>
-          <a:xfrm>
-            <a:off x="381309" y="685800"/>
-            <a:ext cx="6096000" cy="3429000"/>
-          </a:xfrm>
-          <a:custGeom>
-            <a:avLst/>
-            <a:gdLst/>
-            <a:ahLst/>
-            <a:cxnLst/>
-            <a:rect l="l" t="t" r="r" b="b"/>
-            <a:pathLst>
-              <a:path w="120000" h="120000" extrusionOk="0">
-                <a:moveTo>
-                  <a:pt x="0" y="0"/>
-                </a:moveTo>
-                <a:lnTo>
-                  <a:pt x="120000" y="0"/>
-                </a:lnTo>
-                <a:lnTo>
-                  <a:pt x="120000" y="120000"/>
-                </a:lnTo>
-                <a:lnTo>
-                  <a:pt x="0" y="120000"/>
-                </a:lnTo>
-                <a:close/>
-              </a:path>
-            </a:pathLst>
-          </a:custGeom>
-          <a:noFill/>
-          <a:ln w="9525" cap="flat" cmpd="sng">
-            <a:solidFill>
-              <a:srgbClr val="000000"/>
-            </a:solidFill>
-            <a:prstDash val="solid"/>
-            <a:round/>
-            <a:headEnd type="none" w="sm" len="sm"/>
-            <a:tailEnd type="none" w="sm" len="sm"/>
-          </a:ln>
-        </p:spPr>
-      </p:sp>
-      <p:sp>
-        <p:nvSpPr>
-          <p:cNvPr id="4" name="Google Shape;4;n"/>
-          <p:cNvSpPr txBox="1">
-            <a:spLocks noGrp="1"/>
-          </p:cNvSpPr>
-          <p:nvPr>
-            <p:ph type="body" idx="1"/>
-          </p:nvPr>
-        </p:nvSpPr>
-        <p:spPr>
-          <a:xfrm>
-            <a:off x="685800" y="4343400"/>
-            <a:ext cx="5486400" cy="4114800"/>
-          </a:xfrm>
-          <a:prstGeom prst="rect">
-            <a:avLst/>
-          </a:prstGeom>
-          <a:noFill/>
-          <a:ln>
-            <a:noFill/>
-          </a:ln>
-        </p:spPr>
-        <p:txBody>
-          <a:bodyPr spcFirstLastPara="1" wrap="square" lIns="91425" tIns="91425" rIns="91425" bIns="91425" anchor="t" anchorCtr="0">
-            <a:noAutofit/>
-          </a:bodyPr>
-          <a:lstStyle>
-            <a:lvl1pPr marL="457200" marR="0" lvl="0" indent="-317500" algn="l" rtl="0">
-              <a:lnSpc>
-                <a:spcPct val="100000"/>
-              </a:lnSpc>
-              <a:spcBef>
-                <a:spcPts val="0"/>
-              </a:spcBef>
-              <a:spcAft>
-                <a:spcPts val="0"/>
-              </a:spcAft>
-              <a:buClr>
-                <a:schemeClr val="accent6"/>
-              </a:buClr>
-              <a:buSzPts val="1400"/>
-              <a:buFont typeface="Century Gothic"/>
-              <a:buChar char="๏"/>
-              <a:defRPr sz="1400" b="0" i="0" u="none" strike="noStrike" cap="none">
-                <a:solidFill>
-                  <a:schemeClr val="dk1"/>
-                </a:solidFill>
-                <a:latin typeface="Century Gothic"/>
-                <a:ea typeface="Century Gothic"/>
-                <a:cs typeface="Century Gothic"/>
-                <a:sym typeface="Century Gothic"/>
-              </a:defRPr>
-            </a:lvl1pPr>
-            <a:lvl2pPr marL="914400" marR="0" lvl="1" indent="-304800" algn="l" rtl="0">
-              <a:lnSpc>
-                <a:spcPct val="100000"/>
-              </a:lnSpc>
-              <a:spcBef>
-                <a:spcPts val="0"/>
-              </a:spcBef>
-              <a:spcAft>
-                <a:spcPts val="0"/>
-              </a:spcAft>
-              <a:buClr>
-                <a:schemeClr val="accent6"/>
-              </a:buClr>
-              <a:buSzPts val="1200"/>
-              <a:buFont typeface="Century Gothic"/>
-              <a:buChar char="&gt;"/>
-              <a:defRPr sz="1200" b="0" i="0" u="none" strike="noStrike" cap="none">
-                <a:solidFill>
-                  <a:schemeClr val="dk1"/>
-                </a:solidFill>
-                <a:latin typeface="Century Gothic"/>
-                <a:ea typeface="Century Gothic"/>
-                <a:cs typeface="Century Gothic"/>
-                <a:sym typeface="Century Gothic"/>
-              </a:defRPr>
-            </a:lvl2pPr>
-            <a:lvl3pPr marL="1371600" marR="0" lvl="2" indent="-292100" algn="l" rtl="0">
-              <a:lnSpc>
-                <a:spcPct val="100000"/>
-              </a:lnSpc>
-              <a:spcBef>
-                <a:spcPts val="0"/>
-              </a:spcBef>
-              <a:spcAft>
-                <a:spcPts val="0"/>
-              </a:spcAft>
-              <a:buClr>
-                <a:schemeClr val="accent6"/>
-              </a:buClr>
-              <a:buSzPts val="1000"/>
-              <a:buFont typeface="Century Gothic"/>
-              <a:buChar char="+"/>
-              <a:defRPr sz="1000" b="0" i="0" u="none" strike="noStrike" cap="none">
-                <a:solidFill>
-                  <a:schemeClr val="dk1"/>
-                </a:solidFill>
-                <a:latin typeface="Century Gothic"/>
-                <a:ea typeface="Century Gothic"/>
-                <a:cs typeface="Century Gothic"/>
-                <a:sym typeface="Century Gothic"/>
-              </a:defRPr>
-            </a:lvl3pPr>
-            <a:lvl4pPr marL="1828800" marR="0" lvl="3" indent="-285750" algn="l" rtl="0">
-              <a:lnSpc>
-                <a:spcPct val="100000"/>
-              </a:lnSpc>
-              <a:spcBef>
-                <a:spcPts val="0"/>
-              </a:spcBef>
-              <a:spcAft>
-                <a:spcPts val="0"/>
-              </a:spcAft>
-              <a:buClr>
-                <a:schemeClr val="accent6"/>
-              </a:buClr>
-              <a:buSzPts val="900"/>
-              <a:buFont typeface="Courier New"/>
-              <a:buChar char="o"/>
-              <a:defRPr sz="900" b="0" i="0" u="none" strike="noStrike" cap="none">
-                <a:solidFill>
-                  <a:schemeClr val="dk1"/>
-                </a:solidFill>
-                <a:latin typeface="Century Gothic"/>
-                <a:ea typeface="Century Gothic"/>
-                <a:cs typeface="Century Gothic"/>
-                <a:sym typeface="Century Gothic"/>
-              </a:defRPr>
-            </a:lvl4pPr>
-            <a:lvl5pPr marL="2286000" marR="0" lvl="4" indent="-279400" algn="l" rtl="0">
-              <a:lnSpc>
-                <a:spcPct val="100000"/>
-              </a:lnSpc>
-              <a:spcBef>
-                <a:spcPts val="0"/>
-              </a:spcBef>
-              <a:spcAft>
-                <a:spcPts val="0"/>
-              </a:spcAft>
-              <a:buClr>
-                <a:schemeClr val="accent6"/>
-              </a:buClr>
-              <a:buSzPts val="800"/>
-              <a:buFont typeface="Century Gothic"/>
-              <a:buChar char="○"/>
-              <a:defRPr sz="800" b="0" i="0" u="none" strike="noStrike" cap="none">
-                <a:solidFill>
-                  <a:schemeClr val="dk1"/>
-                </a:solidFill>
-                <a:latin typeface="Century Gothic"/>
-                <a:ea typeface="Century Gothic"/>
-                <a:cs typeface="Century Gothic"/>
-                <a:sym typeface="Century Gothic"/>
-              </a:defRPr>
-            </a:lvl5pPr>
-            <a:lvl6pPr marL="2743200" marR="0" lvl="5" indent="-273050" algn="l" rtl="0">
-              <a:lnSpc>
-                <a:spcPct val="100000"/>
-              </a:lnSpc>
-              <a:spcBef>
-                <a:spcPts val="0"/>
-              </a:spcBef>
-              <a:spcAft>
-                <a:spcPts val="0"/>
-              </a:spcAft>
-              <a:buClr>
-                <a:schemeClr val="accent6"/>
-              </a:buClr>
-              <a:buSzPts val="700"/>
-              <a:buFont typeface="Century Gothic"/>
-              <a:buChar char="○"/>
-              <a:defRPr sz="700" b="0" i="0" u="none" strike="noStrike" cap="none">
-                <a:solidFill>
-                  <a:schemeClr val="dk1"/>
-                </a:solidFill>
-                <a:latin typeface="Century Gothic"/>
-                <a:ea typeface="Century Gothic"/>
-                <a:cs typeface="Century Gothic"/>
-                <a:sym typeface="Century Gothic"/>
-              </a:defRPr>
-            </a:lvl6pPr>
-            <a:lvl7pPr marL="3200400" marR="0" lvl="6" indent="-266700" algn="l" rtl="0">
-              <a:lnSpc>
-                <a:spcPct val="100000"/>
-              </a:lnSpc>
-              <a:spcBef>
-                <a:spcPts val="0"/>
-              </a:spcBef>
-              <a:spcAft>
-                <a:spcPts val="0"/>
-              </a:spcAft>
-              <a:buClr>
-                <a:schemeClr val="accent6"/>
-              </a:buClr>
-              <a:buSzPts val="600"/>
-              <a:buFont typeface="Century Gothic"/>
-              <a:buChar char="○"/>
-              <a:defRPr sz="600" b="0" i="0" u="none" strike="noStrike" cap="none">
-                <a:solidFill>
-                  <a:schemeClr val="dk1"/>
-                </a:solidFill>
-                <a:latin typeface="Century Gothic"/>
-                <a:ea typeface="Century Gothic"/>
-                <a:cs typeface="Century Gothic"/>
-                <a:sym typeface="Century Gothic"/>
-              </a:defRPr>
-            </a:lvl7pPr>
-            <a:lvl8pPr marL="3657600" marR="0" lvl="7" indent="-266700" algn="l" rtl="0">
-              <a:lnSpc>
-                <a:spcPct val="100000"/>
-              </a:lnSpc>
-              <a:spcBef>
-                <a:spcPts val="0"/>
-              </a:spcBef>
-              <a:spcAft>
-                <a:spcPts val="0"/>
-              </a:spcAft>
-              <a:buClr>
-                <a:schemeClr val="accent6"/>
-              </a:buClr>
-              <a:buSzPts val="600"/>
-              <a:buFont typeface="Century Gothic"/>
-              <a:buChar char="○"/>
-              <a:defRPr sz="600" b="0" i="0" u="none" strike="noStrike" cap="none">
-                <a:solidFill>
-                  <a:schemeClr val="dk1"/>
-                </a:solidFill>
-                <a:latin typeface="Century Gothic"/>
-                <a:ea typeface="Century Gothic"/>
-                <a:cs typeface="Century Gothic"/>
-                <a:sym typeface="Century Gothic"/>
-              </a:defRPr>
-            </a:lvl8pPr>
-            <a:lvl9pPr marL="4114800" marR="0" lvl="8" indent="-266700" algn="l" rtl="0">
-              <a:lnSpc>
-                <a:spcPct val="100000"/>
-              </a:lnSpc>
-              <a:spcBef>
-                <a:spcPts val="0"/>
-              </a:spcBef>
-              <a:spcAft>
-                <a:spcPts val="0"/>
-              </a:spcAft>
-              <a:buClr>
-                <a:schemeClr val="accent6"/>
-              </a:buClr>
-              <a:buSzPts val="600"/>
-              <a:buFont typeface="Century Gothic"/>
-              <a:buChar char="○"/>
-              <a:defRPr sz="600" b="0" i="0" u="none" strike="noStrike" cap="none">
-                <a:solidFill>
-                  <a:schemeClr val="accent6"/>
-                </a:solidFill>
-                <a:latin typeface="Century Gothic"/>
-                <a:ea typeface="Century Gothic"/>
-                <a:cs typeface="Century Gothic"/>
-                <a:sym typeface="Century Gothic"/>
-              </a:defRPr>
-            </a:lvl9pPr>
-          </a:lstStyle>
-          <a:p>
-            <a:endParaRPr/>
-          </a:p>
-        </p:txBody>
-      </p:sp>
-    </p:spTree>
-  </p:cSld>
-  <p:clrMap bg1="lt1" tx1="dk1" bg2="dk2" tx2="lt2" accent1="accent1" accent2="accent2" accent3="accent3" accent4="accent4" accent5="accent5" accent6="accent6" hlink="hlink" folHlink="folHlink"/>
-  <p:notesStyle>
-    <a:defPPr marR="0" lvl="0" algn="l" rtl="0">
-      <a:lnSpc>
-        <a:spcPct val="100000"/>
-      </a:lnSpc>
-      <a:spcBef>
-        <a:spcPts val="0"/>
-      </a:spcBef>
-      <a:spcAft>
-        <a:spcPts val="0"/>
-      </a:spcAft>
-    </a:defPPr>
-    <a:lvl1pPr marR="0" lvl="0" algn="l" rtl="0">
-      <a:lnSpc>
-        <a:spcPct val="100000"/>
-      </a:lnSpc>
-      <a:spcBef>
-        <a:spcPts val="0"/>
-      </a:spcBef>
-      <a:spcAft>
-        <a:spcPts val="0"/>
-      </a:spcAft>
-      <a:buClr>
-        <a:srgbClr val="000000"/>
-      </a:buClr>
-      <a:buFont typeface="Arial"/>
-      <a:defRPr sz="1400" b="0" i="0" u="none" strike="noStrike" cap="none">
-        <a:solidFill>
-          <a:srgbClr val="000000"/>
-        </a:solidFill>
-        <a:latin typeface="Arial"/>
-        <a:ea typeface="Arial"/>
-        <a:cs typeface="Arial"/>
-        <a:sym typeface="Arial"/>
-      </a:defRPr>
-    </a:lvl1pPr>
-    <a:lvl2pPr marR="0" lvl="1" algn="l" rtl="0">
-      <a:lnSpc>
-        <a:spcPct val="100000"/>
-      </a:lnSpc>
-      <a:spcBef>
-        <a:spcPts val="0"/>
-      </a:spcBef>
-      <a:spcAft>
-        <a:spcPts val="0"/>
-      </a:spcAft>
-      <a:buClr>
-        <a:srgbClr val="000000"/>
-      </a:buClr>
-      <a:buFont typeface="Arial"/>
-      <a:defRPr sz="1400" b="0" i="0" u="none" strike="noStrike" cap="none">
-        <a:solidFill>
-          <a:srgbClr val="000000"/>
-        </a:solidFill>
-        <a:latin typeface="Arial"/>
-        <a:ea typeface="Arial"/>
-        <a:cs typeface="Arial"/>
-        <a:sym typeface="Arial"/>
-      </a:defRPr>
-    </a:lvl2pPr>
-    <a:lvl3pPr marR="0" lvl="2" algn="l" rtl="0">
-      <a:lnSpc>
-        <a:spcPct val="100000"/>
-      </a:lnSpc>
-      <a:spcBef>
-        <a:spcPts val="0"/>
-      </a:spcBef>
-      <a:spcAft>
-        <a:spcPts val="0"/>
-      </a:spcAft>
-      <a:buClr>
-        <a:srgbClr val="000000"/>
-      </a:buClr>
-      <a:buFont typeface="Arial"/>
-      <a:defRPr sz="1400" b="0" i="0" u="none" strike="noStrike" cap="none">
-        <a:solidFill>
-          <a:srgbClr val="000000"/>
-        </a:solidFill>
-        <a:latin typeface="Arial"/>
-        <a:ea typeface="Arial"/>
-        <a:cs typeface="Arial"/>
-        <a:sym typeface="Arial"/>
-      </a:defRPr>
-    </a:lvl3pPr>
-    <a:lvl4pPr marR="0" lvl="3" algn="l" rtl="0">
-      <a:lnSpc>
-        <a:spcPct val="100000"/>
-      </a:lnSpc>
-      <a:spcBef>
-        <a:spcPts val="0"/>
-      </a:spcBef>
-      <a:spcAft>
-        <a:spcPts val="0"/>
-      </a:spcAft>
-      <a:buClr>
-        <a:srgbClr val="000000"/>
-      </a:buClr>
-      <a:buFont typeface="Arial"/>
-      <a:defRPr sz="1400" b="0" i="0" u="none" strike="noStrike" cap="none">
-        <a:solidFill>
-          <a:srgbClr val="000000"/>
-        </a:solidFill>
-        <a:latin typeface="Arial"/>
-        <a:ea typeface="Arial"/>
-        <a:cs typeface="Arial"/>
-        <a:sym typeface="Arial"/>
-      </a:defRPr>
-    </a:lvl4pPr>
-    <a:lvl5pPr marR="0" lvl="4" algn="l" rtl="0">
-      <a:lnSpc>
-        <a:spcPct val="100000"/>
-      </a:lnSpc>
-      <a:spcBef>
-        <a:spcPts val="0"/>
-      </a:spcBef>
-      <a:spcAft>
-        <a:spcPts val="0"/>
-      </a:spcAft>
-      <a:buClr>
-        <a:srgbClr val="000000"/>
-      </a:buClr>
-      <a:buFont typeface="Arial"/>
-      <a:defRPr sz="1400" b="0" i="0" u="none" strike="noStrike" cap="none">
-        <a:solidFill>
-          <a:srgbClr val="000000"/>
-        </a:solidFill>
-        <a:latin typeface="Arial"/>
-        <a:ea typeface="Arial"/>
-        <a:cs typeface="Arial"/>
-        <a:sym typeface="Arial"/>
-      </a:defRPr>
-    </a:lvl5pPr>
-    <a:lvl6pPr marR="0" lvl="5" algn="l" rtl="0">
-      <a:lnSpc>
-        <a:spcPct val="100000"/>
-      </a:lnSpc>
-      <a:spcBef>
-        <a:spcPts val="0"/>
-      </a:spcBef>
-      <a:spcAft>
-        <a:spcPts val="0"/>
-      </a:spcAft>
-      <a:buClr>
-        <a:srgbClr val="000000"/>
-      </a:buClr>
-      <a:buFont typeface="Arial"/>
-      <a:defRPr sz="1400" b="0" i="0" u="none" strike="noStrike" cap="none">
-        <a:solidFill>
-          <a:srgbClr val="000000"/>
-        </a:solidFill>
-        <a:latin typeface="Arial"/>
-        <a:ea typeface="Arial"/>
-        <a:cs typeface="Arial"/>
-        <a:sym typeface="Arial"/>
-      </a:defRPr>
-    </a:lvl6pPr>
-    <a:lvl7pPr marR="0" lvl="6" algn="l" rtl="0">
-      <a:lnSpc>
-        <a:spcPct val="100000"/>
-      </a:lnSpc>
-      <a:spcBef>
-        <a:spcPts val="0"/>
-      </a:spcBef>
-      <a:spcAft>
-        <a:spcPts val="0"/>
-      </a:spcAft>
-      <a:buClr>
-        <a:srgbClr val="000000"/>
-      </a:buClr>
-      <a:buFont typeface="Arial"/>
-      <a:defRPr sz="1400" b="0" i="0" u="none" strike="noStrike" cap="none">
-        <a:solidFill>
-          <a:srgbClr val="000000"/>
-        </a:solidFill>
-        <a:latin typeface="Arial"/>
-        <a:ea typeface="Arial"/>
-        <a:cs typeface="Arial"/>
-        <a:sym typeface="Arial"/>
-      </a:defRPr>
-    </a:lvl7pPr>
-    <a:lvl8pPr marR="0" lvl="7" algn="l" rtl="0">
-      <a:lnSpc>
-        <a:spcPct val="100000"/>
-      </a:lnSpc>
-      <a:spcBef>
-        <a:spcPts val="0"/>
-      </a:spcBef>
-      <a:spcAft>
-        <a:spcPts val="0"/>
-      </a:spcAft>
-      <a:buClr>
-        <a:srgbClr val="000000"/>
-      </a:buClr>
-      <a:buFont typeface="Arial"/>
-      <a:defRPr sz="1400" b="0" i="0" u="none" strike="noStrike" cap="none">
-        <a:solidFill>
-          <a:srgbClr val="000000"/>
-        </a:solidFill>
-        <a:latin typeface="Arial"/>
-        <a:ea typeface="Arial"/>
-        <a:cs typeface="Arial"/>
-        <a:sym typeface="Arial"/>
-      </a:defRPr>
-    </a:lvl8pPr>
-    <a:lvl9pPr marR="0" lvl="8" algn="l" rtl="0">
-      <a:lnSpc>
-        <a:spcPct val="100000"/>
-      </a:lnSpc>
-      <a:spcBef>
-        <a:spcPts val="0"/>
-      </a:spcBef>
-      <a:spcAft>
-        <a:spcPts val="0"/>
-      </a:spcAft>
-      <a:buClr>
-        <a:srgbClr val="000000"/>
-      </a:buClr>
-      <a:buFont typeface="Arial"/>
-      <a:defRPr sz="1400" b="0" i="0" u="none" strike="noStrike" cap="none">
-        <a:solidFill>
-          <a:srgbClr val="000000"/>
-        </a:solidFill>
-        <a:latin typeface="Arial"/>
-        <a:ea typeface="Arial"/>
-        <a:cs typeface="Arial"/>
-        <a:sym typeface="Arial"/>
-      </a:defRPr>
-    </a:lvl9pPr>
-  </p:notesStyle>
-</p:notesMaster>
-</file>
-
-<file path=ppt/notesSlides/notesSlide1.xml><?xml version="1.0" encoding="utf-8"?>
-<p:notes xmlns:a="http://schemas.openxmlformats.org/drawingml/2006/main" xmlns:r="http://schemas.openxmlformats.org/officeDocument/2006/relationships" xmlns:p="http://schemas.openxmlformats.org/presentationml/2006/main" showMasterSp="0" showMasterPhAnim="0">
-  <p:cSld>
-    <p:spTree>
-      <p:nvGrpSpPr>
-        <p:cNvPr id="1" name="Shape 206"/>
-        <p:cNvGrpSpPr/>
-        <p:nvPr/>
-      </p:nvGrpSpPr>
-      <p:grpSpPr>
-        <a:xfrm>
-          <a:off x="0" y="0"/>
-          <a:ext cx="0" cy="0"/>
-          <a:chOff x="0" y="0"/>
-          <a:chExt cx="0" cy="0"/>
-        </a:xfrm>
-      </p:grpSpPr>
-      <p:sp>
-        <p:nvSpPr>
-          <p:cNvPr id="207" name="Google Shape;207;g20c3afcc4d7_0_44918:notes"/>
-          <p:cNvSpPr txBox="1">
-            <a:spLocks noGrp="1"/>
-          </p:cNvSpPr>
-          <p:nvPr>
-            <p:ph type="body" idx="1"/>
-          </p:nvPr>
-        </p:nvSpPr>
-        <p:spPr>
-          <a:xfrm>
-            <a:off x="679780" y="4689516"/>
-            <a:ext cx="5438100" cy="4442700"/>
-          </a:xfrm>
-          <a:prstGeom prst="rect">
-            <a:avLst/>
-          </a:prstGeom>
-          <a:noFill/>
-          <a:ln>
-            <a:noFill/>
-          </a:ln>
-        </p:spPr>
-        <p:txBody>
-          <a:bodyPr spcFirstLastPara="1" wrap="square" lIns="91425" tIns="91425" rIns="91425" bIns="91425" anchor="t" anchorCtr="0">
-            <a:noAutofit/>
-          </a:bodyPr>
-          <a:lstStyle/>
-          <a:p>
-            <a:pPr marL="0" lvl="0" indent="0" algn="l" rtl="0">
-              <a:lnSpc>
-                <a:spcPct val="100000"/>
-              </a:lnSpc>
-              <a:spcBef>
-                <a:spcPts val="0"/>
-              </a:spcBef>
-              <a:spcAft>
-                <a:spcPts val="0"/>
-              </a:spcAft>
-              <a:buSzPts val="1400"/>
-              <a:buNone/>
-            </a:pPr>
-            <a:endParaRPr/>
-          </a:p>
-        </p:txBody>
-      </p:sp>
-      <p:sp>
-        <p:nvSpPr>
-          <p:cNvPr id="208" name="Google Shape;208;g20c3afcc4d7_0_44918:notes"/>
-          <p:cNvSpPr>
-            <a:spLocks noGrp="1" noRot="1" noChangeAspect="1"/>
-          </p:cNvSpPr>
-          <p:nvPr>
-            <p:ph type="sldImg" idx="2"/>
-          </p:nvPr>
-        </p:nvSpPr>
-        <p:spPr>
-          <a:xfrm>
-            <a:off x="103188" y="738188"/>
-            <a:ext cx="6591300" cy="3708400"/>
-          </a:xfrm>
-          <a:custGeom>
-            <a:avLst/>
-            <a:gdLst/>
-            <a:ahLst/>
-            <a:cxnLst/>
-            <a:rect l="l" t="t" r="r" b="b"/>
-            <a:pathLst>
-              <a:path w="120000" h="120000" extrusionOk="0">
-                <a:moveTo>
-                  <a:pt x="0" y="0"/>
-                </a:moveTo>
-                <a:lnTo>
-                  <a:pt x="120000" y="0"/>
-                </a:lnTo>
-                <a:lnTo>
-                  <a:pt x="120000" y="120000"/>
-                </a:lnTo>
-                <a:lnTo>
-                  <a:pt x="0" y="120000"/>
-                </a:lnTo>
-                <a:close/>
-              </a:path>
-            </a:pathLst>
-          </a:custGeom>
-          <a:noFill/>
-          <a:ln w="9525" cap="flat" cmpd="sng">
-            <a:solidFill>
-              <a:srgbClr val="000000"/>
-            </a:solidFill>
-            <a:prstDash val="solid"/>
-            <a:round/>
-            <a:headEnd type="none" w="sm" len="sm"/>
-            <a:tailEnd type="none" w="sm" len="sm"/>
-          </a:ln>
-        </p:spPr>
-      </p:sp>
-    </p:spTree>
-  </p:cSld>
-  <p:clrMapOvr>
-    <a:masterClrMapping/>
-  </p:clrMapOvr>
-</p:notes>
-</file>
-
-<file path=ppt/notesSlides/notesSlide2.xml><?xml version="1.0" encoding="utf-8"?>
-<p:notes xmlns:a="http://schemas.openxmlformats.org/drawingml/2006/main" xmlns:r="http://schemas.openxmlformats.org/officeDocument/2006/relationships" xmlns:p="http://schemas.openxmlformats.org/presentationml/2006/main" showMasterSp="0" showMasterPhAnim="0">
-  <p:cSld>
-    <p:spTree>
-      <p:nvGrpSpPr>
-        <p:cNvPr id="1" name="Shape 291"/>
-        <p:cNvGrpSpPr/>
-        <p:nvPr/>
-      </p:nvGrpSpPr>
-      <p:grpSpPr>
-        <a:xfrm>
-          <a:off x="0" y="0"/>
-          <a:ext cx="0" cy="0"/>
-          <a:chOff x="0" y="0"/>
-          <a:chExt cx="0" cy="0"/>
-        </a:xfrm>
-      </p:grpSpPr>
-      <p:sp>
-        <p:nvSpPr>
-          <p:cNvPr id="292" name="Google Shape;292;g3072d353d33_0_186:notes"/>
-          <p:cNvSpPr txBox="1">
-            <a:spLocks noGrp="1"/>
-          </p:cNvSpPr>
-          <p:nvPr>
-            <p:ph type="body" idx="1"/>
-          </p:nvPr>
-        </p:nvSpPr>
-        <p:spPr>
-          <a:xfrm>
-            <a:off x="691886" y="4022836"/>
-            <a:ext cx="5535000" cy="3811200"/>
-          </a:xfrm>
-          <a:prstGeom prst="rect">
-            <a:avLst/>
-          </a:prstGeom>
-          <a:noFill/>
-          <a:ln>
-            <a:noFill/>
-          </a:ln>
-        </p:spPr>
-        <p:txBody>
-          <a:bodyPr spcFirstLastPara="1" wrap="square" lIns="91425" tIns="91425" rIns="91425" bIns="91425" anchor="t" anchorCtr="0">
-            <a:noAutofit/>
-          </a:bodyPr>
-          <a:lstStyle/>
-          <a:p>
-            <a:pPr marL="0" lvl="0" indent="0" algn="l" rtl="0">
-              <a:lnSpc>
-                <a:spcPct val="100000"/>
-              </a:lnSpc>
-              <a:spcBef>
-                <a:spcPts val="0"/>
-              </a:spcBef>
-              <a:spcAft>
-                <a:spcPts val="0"/>
-              </a:spcAft>
-              <a:buSzPts val="1400"/>
-              <a:buNone/>
-            </a:pPr>
-            <a:endParaRPr/>
-          </a:p>
-        </p:txBody>
-      </p:sp>
-      <p:sp>
-        <p:nvSpPr>
-          <p:cNvPr id="293" name="Google Shape;293;g3072d353d33_0_186:notes"/>
-          <p:cNvSpPr>
-            <a:spLocks noGrp="1" noRot="1" noChangeAspect="1"/>
-          </p:cNvSpPr>
-          <p:nvPr>
-            <p:ph type="sldImg" idx="2"/>
-          </p:nvPr>
-        </p:nvSpPr>
-        <p:spPr>
-          <a:xfrm>
-            <a:off x="635000" y="635000"/>
-            <a:ext cx="5648325" cy="3176588"/>
-          </a:xfrm>
-          <a:custGeom>
-            <a:avLst/>
-            <a:gdLst/>
-            <a:ahLst/>
-            <a:cxnLst/>
-            <a:rect l="l" t="t" r="r" b="b"/>
-            <a:pathLst>
-              <a:path w="120000" h="120000" extrusionOk="0">
-                <a:moveTo>
-                  <a:pt x="0" y="0"/>
-                </a:moveTo>
-                <a:lnTo>
-                  <a:pt x="120000" y="0"/>
-                </a:lnTo>
-                <a:lnTo>
-                  <a:pt x="120000" y="120000"/>
-                </a:lnTo>
-                <a:lnTo>
-                  <a:pt x="0" y="120000"/>
-                </a:lnTo>
-                <a:close/>
-              </a:path>
-            </a:pathLst>
-          </a:custGeom>
-          <a:noFill/>
-          <a:ln w="9525" cap="flat" cmpd="sng">
-            <a:solidFill>
-              <a:srgbClr val="000000"/>
-            </a:solidFill>
-            <a:prstDash val="solid"/>
-            <a:round/>
-            <a:headEnd type="none" w="sm" len="sm"/>
-            <a:tailEnd type="none" w="sm" len="sm"/>
-          </a:ln>
-        </p:spPr>
-      </p:sp>
-    </p:spTree>
-  </p:cSld>
-  <p:clrMapOvr>
-    <a:masterClrMapping/>
-  </p:clrMapOvr>
-</p:notes>
-</file>
-
-<file path=ppt/notesSlides/notesSlide3.xml><?xml version="1.0" encoding="utf-8"?>
-<p:notes xmlns:a="http://schemas.openxmlformats.org/drawingml/2006/main" xmlns:r="http://schemas.openxmlformats.org/officeDocument/2006/relationships" xmlns:p="http://schemas.openxmlformats.org/presentationml/2006/main" showMasterSp="0" showMasterPhAnim="0">
-  <p:cSld>
-    <p:spTree>
-      <p:nvGrpSpPr>
-        <p:cNvPr id="1" name="Shape 363"/>
-        <p:cNvGrpSpPr/>
-        <p:nvPr/>
-      </p:nvGrpSpPr>
-      <p:grpSpPr>
-        <a:xfrm>
-          <a:off x="0" y="0"/>
-          <a:ext cx="0" cy="0"/>
-          <a:chOff x="0" y="0"/>
-          <a:chExt cx="0" cy="0"/>
-        </a:xfrm>
-      </p:grpSpPr>
-      <p:sp>
-        <p:nvSpPr>
-          <p:cNvPr id="364" name="Google Shape;364;g3072d353d33_0_212:notes"/>
-          <p:cNvSpPr txBox="1">
-            <a:spLocks noGrp="1"/>
-          </p:cNvSpPr>
-          <p:nvPr>
-            <p:ph type="body" idx="1"/>
-          </p:nvPr>
-        </p:nvSpPr>
-        <p:spPr>
-          <a:xfrm>
-            <a:off x="691886" y="4022836"/>
-            <a:ext cx="5535000" cy="3811200"/>
-          </a:xfrm>
-          <a:prstGeom prst="rect">
-            <a:avLst/>
-          </a:prstGeom>
-          <a:noFill/>
-          <a:ln>
-            <a:noFill/>
-          </a:ln>
-        </p:spPr>
-        <p:txBody>
-          <a:bodyPr spcFirstLastPara="1" wrap="square" lIns="91425" tIns="91425" rIns="91425" bIns="91425" anchor="t" anchorCtr="0">
-            <a:noAutofit/>
-          </a:bodyPr>
-          <a:lstStyle/>
-          <a:p>
-            <a:pPr marL="0" lvl="0" indent="0" algn="l" rtl="0">
-              <a:lnSpc>
-                <a:spcPct val="100000"/>
-              </a:lnSpc>
-              <a:spcBef>
-                <a:spcPts val="0"/>
-              </a:spcBef>
-              <a:spcAft>
-                <a:spcPts val="0"/>
-              </a:spcAft>
-              <a:buSzPts val="1400"/>
-              <a:buNone/>
-            </a:pPr>
-            <a:endParaRPr/>
-          </a:p>
-        </p:txBody>
-      </p:sp>
-      <p:sp>
-        <p:nvSpPr>
-          <p:cNvPr id="365" name="Google Shape;365;g3072d353d33_0_212:notes"/>
-          <p:cNvSpPr>
-            <a:spLocks noGrp="1" noRot="1" noChangeAspect="1"/>
-          </p:cNvSpPr>
-          <p:nvPr>
-            <p:ph type="sldImg" idx="2"/>
-          </p:nvPr>
-        </p:nvSpPr>
-        <p:spPr>
-          <a:xfrm>
-            <a:off x="635000" y="635000"/>
-            <a:ext cx="5648325" cy="3176588"/>
-          </a:xfrm>
-          <a:custGeom>
-            <a:avLst/>
-            <a:gdLst/>
-            <a:ahLst/>
-            <a:cxnLst/>
-            <a:rect l="l" t="t" r="r" b="b"/>
-            <a:pathLst>
-              <a:path w="120000" h="120000" extrusionOk="0">
-                <a:moveTo>
-                  <a:pt x="0" y="0"/>
-                </a:moveTo>
-                <a:lnTo>
-                  <a:pt x="120000" y="0"/>
-                </a:lnTo>
-                <a:lnTo>
-                  <a:pt x="120000" y="120000"/>
-                </a:lnTo>
-                <a:lnTo>
-                  <a:pt x="0" y="120000"/>
-                </a:lnTo>
-                <a:close/>
-              </a:path>
-            </a:pathLst>
-          </a:custGeom>
-          <a:noFill/>
-          <a:ln w="9525" cap="flat" cmpd="sng">
-            <a:solidFill>
-              <a:srgbClr val="000000"/>
-            </a:solidFill>
-            <a:prstDash val="solid"/>
-            <a:round/>
-            <a:headEnd type="none" w="sm" len="sm"/>
-            <a:tailEnd type="none" w="sm" len="sm"/>
-          </a:ln>
-        </p:spPr>
-      </p:sp>
-    </p:spTree>
-  </p:cSld>
-  <p:clrMapOvr>
-    <a:masterClrMapping/>
-  </p:clrMapOvr>
-</p:notes>
-</file>
-
-<file path=ppt/notesSlides/notesSlide4.xml><?xml version="1.0" encoding="utf-8"?>
-<p:notes xmlns:a="http://schemas.openxmlformats.org/drawingml/2006/main" xmlns:r="http://schemas.openxmlformats.org/officeDocument/2006/relationships" xmlns:p="http://schemas.openxmlformats.org/presentationml/2006/main" showMasterSp="0" showMasterPhAnim="0">
-  <p:cSld>
-    <p:spTree>
-      <p:nvGrpSpPr>
-        <p:cNvPr id="1" name="Shape 432"/>
-        <p:cNvGrpSpPr/>
-        <p:nvPr/>
-      </p:nvGrpSpPr>
-      <p:grpSpPr>
-        <a:xfrm>
-          <a:off x="0" y="0"/>
-          <a:ext cx="0" cy="0"/>
-          <a:chOff x="0" y="0"/>
-          <a:chExt cx="0" cy="0"/>
-        </a:xfrm>
-      </p:grpSpPr>
-      <p:sp>
-        <p:nvSpPr>
-          <p:cNvPr id="433" name="Google Shape;433;g3072d353d33_0_216:notes"/>
-          <p:cNvSpPr txBox="1">
-            <a:spLocks noGrp="1"/>
-          </p:cNvSpPr>
-          <p:nvPr>
-            <p:ph type="body" idx="1"/>
-          </p:nvPr>
-        </p:nvSpPr>
-        <p:spPr>
-          <a:xfrm>
-            <a:off x="691886" y="4022836"/>
-            <a:ext cx="5535000" cy="3811200"/>
-          </a:xfrm>
-          <a:prstGeom prst="rect">
-            <a:avLst/>
-          </a:prstGeom>
-          <a:noFill/>
-          <a:ln>
-            <a:noFill/>
-          </a:ln>
-        </p:spPr>
-        <p:txBody>
-          <a:bodyPr spcFirstLastPara="1" wrap="square" lIns="91425" tIns="91425" rIns="91425" bIns="91425" anchor="t" anchorCtr="0">
-            <a:noAutofit/>
-          </a:bodyPr>
-          <a:lstStyle/>
-          <a:p>
-            <a:pPr marL="0" lvl="0" indent="0" algn="l" rtl="0">
-              <a:lnSpc>
-                <a:spcPct val="100000"/>
-              </a:lnSpc>
-              <a:spcBef>
-                <a:spcPts val="0"/>
-              </a:spcBef>
-              <a:spcAft>
-                <a:spcPts val="0"/>
-              </a:spcAft>
-              <a:buSzPts val="1400"/>
-              <a:buNone/>
-            </a:pPr>
-            <a:endParaRPr/>
-          </a:p>
-        </p:txBody>
-      </p:sp>
-      <p:sp>
-        <p:nvSpPr>
-          <p:cNvPr id="434" name="Google Shape;434;g3072d353d33_0_216:notes"/>
-          <p:cNvSpPr>
-            <a:spLocks noGrp="1" noRot="1" noChangeAspect="1"/>
-          </p:cNvSpPr>
-          <p:nvPr>
-            <p:ph type="sldImg" idx="2"/>
-          </p:nvPr>
-        </p:nvSpPr>
-        <p:spPr>
-          <a:xfrm>
-            <a:off x="635000" y="635000"/>
-            <a:ext cx="5648325" cy="3176588"/>
-          </a:xfrm>
-          <a:custGeom>
-            <a:avLst/>
-            <a:gdLst/>
-            <a:ahLst/>
-            <a:cxnLst/>
-            <a:rect l="l" t="t" r="r" b="b"/>
-            <a:pathLst>
-              <a:path w="120000" h="120000" extrusionOk="0">
-                <a:moveTo>
-                  <a:pt x="0" y="0"/>
-                </a:moveTo>
-                <a:lnTo>
-                  <a:pt x="120000" y="0"/>
-                </a:lnTo>
-                <a:lnTo>
-                  <a:pt x="120000" y="120000"/>
-                </a:lnTo>
-                <a:lnTo>
-                  <a:pt x="0" y="120000"/>
-                </a:lnTo>
-                <a:close/>
-              </a:path>
-            </a:pathLst>
-          </a:custGeom>
-          <a:noFill/>
-          <a:ln w="9525" cap="flat" cmpd="sng">
-            <a:solidFill>
-              <a:srgbClr val="000000"/>
-            </a:solidFill>
-            <a:prstDash val="solid"/>
-            <a:round/>
-            <a:headEnd type="none" w="sm" len="sm"/>
-            <a:tailEnd type="none" w="sm" len="sm"/>
-          </a:ln>
-        </p:spPr>
-      </p:sp>
-    </p:spTree>
-  </p:cSld>
-  <p:clrMapOvr>
-    <a:masterClrMapping/>
-  </p:clrMapOvr>
-</p:notes>
-</file>
-
-<file path=ppt/slideLayouts/slideLayout1.xml><?xml version="1.0" encoding="utf-8"?>
+<file path=ppt\slideLayouts\slideLayout1.xml><?xml version="1.0" encoding="utf-8"?>
 <p:sldLayout xmlns:a="http://schemas.openxmlformats.org/drawingml/2006/main" xmlns:r="http://schemas.openxmlformats.org/officeDocument/2006/relationships" xmlns:p="http://schemas.openxmlformats.org/presentationml/2006/main" showMasterSp="0" matchingName="3_Titre">
   <p:cSld name="3_Titre">
     <p:spTree>
@@ -2143,7 +2264,7 @@
 </p:sldLayout>
 </file>
 
-<file path=ppt/slideLayouts/slideLayout10.xml><?xml version="1.0" encoding="utf-8"?>
+<file path=ppt\slideLayouts\slideLayout10.xml><?xml version="1.0" encoding="utf-8"?>
 <p:sldLayout xmlns:a="http://schemas.openxmlformats.org/drawingml/2006/main" xmlns:r="http://schemas.openxmlformats.org/officeDocument/2006/relationships" xmlns:p="http://schemas.openxmlformats.org/presentationml/2006/main" showMasterSp="0" matchingName="51 - Chapitre [2]">
   <p:cSld name="51 - Chapitre [2]">
     <p:bg>
@@ -2635,7 +2756,7 @@
 </p:sldLayout>
 </file>
 
-<file path=ppt/slideLayouts/slideLayout11.xml><?xml version="1.0" encoding="utf-8"?>
+<file path=ppt\slideLayouts\slideLayout11.xml><?xml version="1.0" encoding="utf-8"?>
 <p:sldLayout xmlns:a="http://schemas.openxmlformats.org/drawingml/2006/main" xmlns:r="http://schemas.openxmlformats.org/officeDocument/2006/relationships" xmlns:p="http://schemas.openxmlformats.org/presentationml/2006/main" showMasterSp="0" matchingName="59 - There is a better way">
   <p:cSld name="59 - There is a better way">
     <p:bg>
@@ -2668,7 +2789,7 @@
 </p:sldLayout>
 </file>
 
-<file path=ppt/slideLayouts/slideLayout12.xml><?xml version="1.0" encoding="utf-8"?>
+<file path=ppt\slideLayouts\slideLayout12.xml><?xml version="1.0" encoding="utf-8"?>
 <p:sldLayout xmlns:a="http://schemas.openxmlformats.org/drawingml/2006/main" xmlns:r="http://schemas.openxmlformats.org/officeDocument/2006/relationships" xmlns:p="http://schemas.openxmlformats.org/presentationml/2006/main" matchingName="TItre et sous-titre">
   <p:cSld name="TItre et sous-titre">
     <p:spTree>
@@ -3338,7 +3459,7 @@
 </p:sldLayout>
 </file>
 
-<file path=ppt/slideLayouts/slideLayout13.xml><?xml version="1.0" encoding="utf-8"?>
+<file path=ppt\slideLayouts\slideLayout13.xml><?xml version="1.0" encoding="utf-8"?>
 <p:sldLayout xmlns:a="http://schemas.openxmlformats.org/drawingml/2006/main" xmlns:r="http://schemas.openxmlformats.org/officeDocument/2006/relationships" xmlns:p="http://schemas.openxmlformats.org/presentationml/2006/main" showMasterSp="0" matchingName="Titre, sous-titre et visuel">
   <p:cSld name="Titre, sous-titre et visuel">
     <p:spTree>
@@ -4578,7 +4699,7 @@
 </p:sldLayout>
 </file>
 
-<file path=ppt/slideLayouts/slideLayout14.xml><?xml version="1.0" encoding="utf-8"?>
+<file path=ppt\slideLayouts\slideLayout14.xml><?xml version="1.0" encoding="utf-8"?>
 <p:sldLayout xmlns:a="http://schemas.openxmlformats.org/drawingml/2006/main" xmlns:r="http://schemas.openxmlformats.org/officeDocument/2006/relationships" xmlns:p="http://schemas.openxmlformats.org/presentationml/2006/main" matchingName="2_Disposition personnalisée">
   <p:cSld name="2_Disposition personnalisée">
     <p:spTree>
@@ -5140,7 +5261,7 @@
 </p:sldLayout>
 </file>
 
-<file path=ppt/slideLayouts/slideLayout15.xml><?xml version="1.0" encoding="utf-8"?>
+<file path=ppt\slideLayouts\slideLayout15.xml><?xml version="1.0" encoding="utf-8"?>
 <p:sldLayout xmlns:a="http://schemas.openxmlformats.org/drawingml/2006/main" xmlns:r="http://schemas.openxmlformats.org/officeDocument/2006/relationships" xmlns:p="http://schemas.openxmlformats.org/presentationml/2006/main" matchingName="3_Disposition personnalisée 1">
   <p:cSld name="6_Disposition personnalisée_1">
     <p:spTree>
@@ -5878,7 +5999,7 @@
 </p:sldLayout>
 </file>
 
-<file path=ppt/slideLayouts/slideLayout16.xml><?xml version="1.0" encoding="utf-8"?>
+<file path=ppt\slideLayouts\slideLayout16.xml><?xml version="1.0" encoding="utf-8"?>
 <p:sldLayout xmlns:a="http://schemas.openxmlformats.org/drawingml/2006/main" xmlns:r="http://schemas.openxmlformats.org/officeDocument/2006/relationships" xmlns:p="http://schemas.openxmlformats.org/presentationml/2006/main" matchingName="3_Disposition personnalisée 2">
   <p:cSld name="6_Disposition personnalisée_2">
     <p:spTree>
@@ -6616,7 +6737,7 @@
 </p:sldLayout>
 </file>
 
-<file path=ppt/slideLayouts/slideLayout17.xml><?xml version="1.0" encoding="utf-8"?>
+<file path=ppt\slideLayouts\slideLayout17.xml><?xml version="1.0" encoding="utf-8"?>
 <p:sldLayout xmlns:a="http://schemas.openxmlformats.org/drawingml/2006/main" xmlns:r="http://schemas.openxmlformats.org/officeDocument/2006/relationships" xmlns:p="http://schemas.openxmlformats.org/presentationml/2006/main" matchingName="1_Titre, sous titre et contenu">
   <p:cSld name="1_Titre, sous titre et contenu">
     <p:spTree>
@@ -7726,7 +7847,7 @@
 </p:sldLayout>
 </file>
 
-<file path=ppt/slideLayouts/slideLayout18.xml><?xml version="1.0" encoding="utf-8"?>
+<file path=ppt\slideLayouts\slideLayout18.xml><?xml version="1.0" encoding="utf-8"?>
 <p:sldLayout xmlns:a="http://schemas.openxmlformats.org/drawingml/2006/main" xmlns:r="http://schemas.openxmlformats.org/officeDocument/2006/relationships" xmlns:p="http://schemas.openxmlformats.org/presentationml/2006/main" matchingName="Titre seul">
   <p:cSld name="Titre seul 2">
     <p:spTree>
@@ -7911,7 +8032,7 @@
 </p:sldLayout>
 </file>
 
-<file path=ppt/slideLayouts/slideLayout19.xml><?xml version="1.0" encoding="utf-8"?>
+<file path=ppt\slideLayouts\slideLayout19.xml><?xml version="1.0" encoding="utf-8"?>
 <p:sldLayout xmlns:a="http://schemas.openxmlformats.org/drawingml/2006/main" xmlns:r="http://schemas.openxmlformats.org/officeDocument/2006/relationships" xmlns:p="http://schemas.openxmlformats.org/presentationml/2006/main" matchingName="04/ TItre seul, sans ligne">
   <p:cSld name="04/ TItre seul, sans ligne">
     <p:spTree>
@@ -8445,7 +8566,7 @@
 </p:sldLayout>
 </file>
 
-<file path=ppt/slideLayouts/slideLayout2.xml><?xml version="1.0" encoding="utf-8"?>
+<file path=ppt\slideLayouts\slideLayout2.xml><?xml version="1.0" encoding="utf-8"?>
 <p:sldLayout xmlns:a="http://schemas.openxmlformats.org/drawingml/2006/main" xmlns:r="http://schemas.openxmlformats.org/officeDocument/2006/relationships" xmlns:p="http://schemas.openxmlformats.org/presentationml/2006/main" matchingName="2_Disposition personnalisée">
   <p:cSld name="2_Disposition personnalisée 3">
     <p:spTree>
@@ -9007,7 +9128,7 @@
 </p:sldLayout>
 </file>
 
-<file path=ppt/slideLayouts/slideLayout20.xml><?xml version="1.0" encoding="utf-8"?>
+<file path=ppt\slideLayouts\slideLayout20.xml><?xml version="1.0" encoding="utf-8"?>
 <p:sldLayout xmlns:a="http://schemas.openxmlformats.org/drawingml/2006/main" xmlns:r="http://schemas.openxmlformats.org/officeDocument/2006/relationships" xmlns:p="http://schemas.openxmlformats.org/presentationml/2006/main" matchingName="TItre et sous-titre, sans ligne">
   <p:cSld name="TItre et sous-titre, sans ligne">
     <p:spTree>
@@ -9726,7 +9847,7 @@
 </p:sldLayout>
 </file>
 
-<file path=ppt/slideLayouts/slideLayout21.xml><?xml version="1.0" encoding="utf-8"?>
+<file path=ppt\slideLayouts\slideLayout21.xml><?xml version="1.0" encoding="utf-8"?>
 <p:sldLayout xmlns:a="http://schemas.openxmlformats.org/drawingml/2006/main" xmlns:r="http://schemas.openxmlformats.org/officeDocument/2006/relationships" xmlns:p="http://schemas.openxmlformats.org/presentationml/2006/main" matchingName="2_Disposition personnalisée">
   <p:cSld name="2_Disposition personnalisée 2">
     <p:spTree>
@@ -10288,7 +10409,7 @@
 </p:sldLayout>
 </file>
 
-<file path=ppt/slideLayouts/slideLayout22.xml><?xml version="1.0" encoding="utf-8"?>
+<file path=ppt\slideLayouts\slideLayout22.xml><?xml version="1.0" encoding="utf-8"?>
 <p:sldLayout xmlns:a="http://schemas.openxmlformats.org/drawingml/2006/main" xmlns:r="http://schemas.openxmlformats.org/officeDocument/2006/relationships" xmlns:p="http://schemas.openxmlformats.org/presentationml/2006/main" matchingName="4_Disposition personnalisée">
   <p:cSld name="4_Disposition personnalisée 2">
     <p:spTree>
@@ -10675,7 +10796,7 @@
 </p:sldLayout>
 </file>
 
-<file path=ppt/slideLayouts/slideLayout23.xml><?xml version="1.0" encoding="utf-8"?>
+<file path=ppt\slideLayouts\slideLayout23.xml><?xml version="1.0" encoding="utf-8"?>
 <p:sldLayout xmlns:a="http://schemas.openxmlformats.org/drawingml/2006/main" xmlns:r="http://schemas.openxmlformats.org/officeDocument/2006/relationships" xmlns:p="http://schemas.openxmlformats.org/presentationml/2006/main" matchingName="3_Disposition personnalisée 1">
   <p:cSld name="6_Disposition personnalisée_1 2">
     <p:spTree>
@@ -11413,7 +11534,7 @@
 </p:sldLayout>
 </file>
 
-<file path=ppt/slideLayouts/slideLayout24.xml><?xml version="1.0" encoding="utf-8"?>
+<file path=ppt\slideLayouts\slideLayout24.xml><?xml version="1.0" encoding="utf-8"?>
 <p:sldLayout xmlns:a="http://schemas.openxmlformats.org/drawingml/2006/main" xmlns:r="http://schemas.openxmlformats.org/officeDocument/2006/relationships" xmlns:p="http://schemas.openxmlformats.org/presentationml/2006/main" matchingName="Titre seul">
   <p:cSld name="Titre seul 2 2">
     <p:spTree>
@@ -11598,7 +11719,7 @@
 </p:sldLayout>
 </file>
 
-<file path=ppt/slideLayouts/slideLayout25.xml><?xml version="1.0" encoding="utf-8"?>
+<file path=ppt\slideLayouts\slideLayout25.xml><?xml version="1.0" encoding="utf-8"?>
 <p:sldLayout xmlns:a="http://schemas.openxmlformats.org/drawingml/2006/main" xmlns:r="http://schemas.openxmlformats.org/officeDocument/2006/relationships" xmlns:p="http://schemas.openxmlformats.org/presentationml/2006/main" matchingName="TItre et sous-titre">
   <p:cSld name="TItre et sous-titre 2">
     <p:spTree>
@@ -12268,7 +12389,7 @@
 </p:sldLayout>
 </file>
 
-<file path=ppt/slideLayouts/slideLayout26.xml><?xml version="1.0" encoding="utf-8"?>
+<file path=ppt\slideLayouts\slideLayout26.xml><?xml version="1.0" encoding="utf-8"?>
 <p:sldLayout xmlns:a="http://schemas.openxmlformats.org/drawingml/2006/main" xmlns:r="http://schemas.openxmlformats.org/officeDocument/2006/relationships" xmlns:p="http://schemas.openxmlformats.org/presentationml/2006/main" matchingName="04/ TItre seul, sans ligne">
   <p:cSld name="04/ TItre seul, sans ligne 2">
     <p:spTree>
@@ -12802,7 +12923,7 @@
 </p:sldLayout>
 </file>
 
-<file path=ppt/slideLayouts/slideLayout27.xml><?xml version="1.0" encoding="utf-8"?>
+<file path=ppt\slideLayouts\slideLayout27.xml><?xml version="1.0" encoding="utf-8"?>
 <p:sldLayout xmlns:a="http://schemas.openxmlformats.org/drawingml/2006/main" xmlns:r="http://schemas.openxmlformats.org/officeDocument/2006/relationships" xmlns:p="http://schemas.openxmlformats.org/presentationml/2006/main" matchingName="TItre et sous-titre, sans ligne">
   <p:cSld name="TItre et sous-titre, sans ligne 2">
     <p:spTree>
@@ -13521,7 +13642,7 @@
 </p:sldLayout>
 </file>
 
-<file path=ppt/slideLayouts/slideLayout28.xml><?xml version="1.0" encoding="utf-8"?>
+<file path=ppt\slideLayouts\slideLayout28.xml><?xml version="1.0" encoding="utf-8"?>
 <p:sldLayout xmlns:a="http://schemas.openxmlformats.org/drawingml/2006/main" xmlns:r="http://schemas.openxmlformats.org/officeDocument/2006/relationships" xmlns:p="http://schemas.openxmlformats.org/presentationml/2006/main" matchingName="2_Disposition personnalisée">
   <p:cSld name="2_Disposition personnalisée 2 2">
     <p:spTree>
@@ -14083,7 +14204,7 @@
 </p:sldLayout>
 </file>
 
-<file path=ppt/slideLayouts/slideLayout29.xml><?xml version="1.0" encoding="utf-8"?>
+<file path=ppt\slideLayouts\slideLayout29.xml><?xml version="1.0" encoding="utf-8"?>
 <p:sldLayout xmlns:a="http://schemas.openxmlformats.org/drawingml/2006/main" xmlns:r="http://schemas.openxmlformats.org/officeDocument/2006/relationships" xmlns:p="http://schemas.openxmlformats.org/presentationml/2006/main" matchingName="3_Disposition personnalisée">
   <p:cSld name="3_Disposition personnalisée 2">
     <p:spTree>
@@ -14820,7 +14941,7 @@
 </p:sldLayout>
 </file>
 
-<file path=ppt/slideLayouts/slideLayout3.xml><?xml version="1.0" encoding="utf-8"?>
+<file path=ppt\slideLayouts\slideLayout3.xml><?xml version="1.0" encoding="utf-8"?>
 <p:sldLayout xmlns:a="http://schemas.openxmlformats.org/drawingml/2006/main" xmlns:r="http://schemas.openxmlformats.org/officeDocument/2006/relationships" xmlns:p="http://schemas.openxmlformats.org/presentationml/2006/main" matchingName="3_Disposition personnalisée">
   <p:cSld name="3_Disposition personnalisée">
     <p:spTree>
@@ -15557,7 +15678,7 @@
 </p:sldLayout>
 </file>
 
-<file path=ppt/slideLayouts/slideLayout30.xml><?xml version="1.0" encoding="utf-8"?>
+<file path=ppt\slideLayouts\slideLayout30.xml><?xml version="1.0" encoding="utf-8"?>
 <p:sldLayout xmlns:a="http://schemas.openxmlformats.org/drawingml/2006/main" xmlns:r="http://schemas.openxmlformats.org/officeDocument/2006/relationships" xmlns:p="http://schemas.openxmlformats.org/presentationml/2006/main" matchingName="4_Disposition personnalisée">
   <p:cSld name="4_Disposition personnalisée 2 2">
     <p:spTree>
@@ -15944,7 +16065,7 @@
 </p:sldLayout>
 </file>
 
-<file path=ppt/slideLayouts/slideLayout4.xml><?xml version="1.0" encoding="utf-8"?>
+<file path=ppt\slideLayouts\slideLayout4.xml><?xml version="1.0" encoding="utf-8"?>
 <p:sldLayout xmlns:a="http://schemas.openxmlformats.org/drawingml/2006/main" xmlns:r="http://schemas.openxmlformats.org/officeDocument/2006/relationships" xmlns:p="http://schemas.openxmlformats.org/presentationml/2006/main" matchingName="1_Sommaire">
   <p:cSld name="1_Sommaire 4">
     <p:spTree>
@@ -18452,7 +18573,7 @@
 </p:sldLayout>
 </file>
 
-<file path=ppt/slideLayouts/slideLayout5.xml><?xml version="1.0" encoding="utf-8"?>
+<file path=ppt\slideLayouts\slideLayout5.xml><?xml version="1.0" encoding="utf-8"?>
 <p:sldLayout xmlns:a="http://schemas.openxmlformats.org/drawingml/2006/main" xmlns:r="http://schemas.openxmlformats.org/officeDocument/2006/relationships" xmlns:p="http://schemas.openxmlformats.org/presentationml/2006/main" showMasterSp="0" matchingName="1_Titre 1">
   <p:cSld name="1_Titre 2_1">
     <p:spTree>
@@ -21560,7 +21681,7 @@
 </p:sldLayout>
 </file>
 
-<file path=ppt/slideLayouts/slideLayout6.xml><?xml version="1.0" encoding="utf-8"?>
+<file path=ppt\slideLayouts\slideLayout6.xml><?xml version="1.0" encoding="utf-8"?>
 <p:sldLayout xmlns:a="http://schemas.openxmlformats.org/drawingml/2006/main" xmlns:r="http://schemas.openxmlformats.org/officeDocument/2006/relationships" xmlns:p="http://schemas.openxmlformats.org/presentationml/2006/main" showMasterSp="0" matchingName="17/ Slide vide fond clair">
   <p:cSld name="17/ Slide vide fond clair">
     <p:bg>
@@ -21874,7 +21995,7 @@
 </p:sldLayout>
 </file>
 
-<file path=ppt/slideLayouts/slideLayout7.xml><?xml version="1.0" encoding="utf-8"?>
+<file path=ppt\slideLayouts\slideLayout7.xml><?xml version="1.0" encoding="utf-8"?>
 <p:sldLayout xmlns:a="http://schemas.openxmlformats.org/drawingml/2006/main" xmlns:r="http://schemas.openxmlformats.org/officeDocument/2006/relationships" xmlns:p="http://schemas.openxmlformats.org/presentationml/2006/main" showMasterSp="0" matchingName="06 - Slide vide">
   <p:cSld name="06 - Slide vide">
     <p:bg>
@@ -21907,7 +22028,7 @@
 </p:sldLayout>
 </file>
 
-<file path=ppt/slideLayouts/slideLayout8.xml><?xml version="1.0" encoding="utf-8"?>
+<file path=ppt\slideLayouts\slideLayout8.xml><?xml version="1.0" encoding="utf-8"?>
 <p:sldLayout xmlns:a="http://schemas.openxmlformats.org/drawingml/2006/main" xmlns:r="http://schemas.openxmlformats.org/officeDocument/2006/relationships" xmlns:p="http://schemas.openxmlformats.org/presentationml/2006/main" matchingName="02/ Titre, sous-titre et contenu">
   <p:cSld name="02/ Titre, sous-titre et contenu">
     <p:spTree>
@@ -22787,7 +22908,7 @@
 </p:sldLayout>
 </file>
 
-<file path=ppt/slideLayouts/slideLayout9.xml><?xml version="1.0" encoding="utf-8"?>
+<file path=ppt\slideLayouts\slideLayout9.xml><?xml version="1.0" encoding="utf-8"?>
 <p:sldLayout xmlns:a="http://schemas.openxmlformats.org/drawingml/2006/main" xmlns:r="http://schemas.openxmlformats.org/officeDocument/2006/relationships" xmlns:p="http://schemas.openxmlformats.org/presentationml/2006/main" matchingName="Disposition personnalisée">
   <p:cSld name="7_Disposition personnalisée">
     <p:spTree>
@@ -23689,7 +23810,7 @@
 </p:sldLayout>
 </file>
 
-<file path=ppt/slideMasters/slideMaster1.xml><?xml version="1.0" encoding="utf-8"?>
+<file path=ppt\slideMasters\slideMaster1.xml><?xml version="1.0" encoding="utf-8"?>
 <p:sldMaster xmlns:a="http://schemas.openxmlformats.org/drawingml/2006/main" xmlns:r="http://schemas.openxmlformats.org/officeDocument/2006/relationships" xmlns:p="http://schemas.openxmlformats.org/presentationml/2006/main">
   <p:cSld>
     <p:bg>
@@ -25232,7 +25353,7 @@
 </p:sldMaster>
 </file>
 
-<file path=ppt/slides/slide1.xml><?xml version="1.0" encoding="utf-8"?>
+<file path=ppt\slides\slide1.xml><?xml version="1.0" encoding="utf-8"?>
 <p:sld xmlns:a="http://schemas.openxmlformats.org/drawingml/2006/main" xmlns:r="http://schemas.openxmlformats.org/officeDocument/2006/relationships" xmlns:p="http://schemas.openxmlformats.org/presentationml/2006/main">
   <p:cSld>
     <p:spTree>
@@ -25319,7 +25440,7 @@
 </p:sld>
 </file>
 
-<file path=ppt/slides/slide2.xml><?xml version="1.0" encoding="utf-8"?>
+<file path=ppt\slides\slide2.xml><?xml version="1.0" encoding="utf-8"?>
 <p:sld xmlns:a="http://schemas.openxmlformats.org/drawingml/2006/main" xmlns:r="http://schemas.openxmlformats.org/officeDocument/2006/relationships" xmlns:p="http://schemas.openxmlformats.org/presentationml/2006/main">
   <p:cSld>
     <p:spTree>
@@ -26287,6 +26408,42 @@
           </a:p>
         </p:txBody>
       </p:sp>
+      <p:pic>
+        <p:nvPicPr>
+          <p:cNvPr id="305" name="Google Shape;305;g3072d353d33_0_186"/>
+          <p:cNvPicPr preferRelativeResize="0"/>
+          <p:nvPr/>
+        </p:nvPicPr>
+        <p:blipFill>
+          <a:blip r:embed="rId3">
+            <a:alphaModFix/>
+          </a:blip>
+          <a:stretch>
+            <a:fillRect/>
+          </a:stretch>
+        </p:blipFill>
+        <p:spPr>
+          <a:xfrm>
+            <a:off x="7274250" y="1819800"/>
+            <a:ext cx="1788900" cy="1254885"/>
+          </a:xfrm>
+          <a:prstGeom prst="rect">
+            <a:avLst/>
+          </a:prstGeom>
+          <a:solidFill>
+            <a:srgbClr val="FFFFFF"/>
+          </a:solidFill>
+          <a:ln w="9525" cap="flat" cmpd="sng">
+            <a:solidFill>
+              <a:srgbClr val="0E2356"/>
+            </a:solidFill>
+            <a:prstDash val="solid"/>
+            <a:miter lim="8000"/>
+            <a:headEnd type="none" w="sm" len="sm"/>
+            <a:tailEnd type="none" w="sm" len="sm"/>
+          </a:ln>
+        </p:spPr>
+      </p:pic>
       <p:sp>
         <p:nvSpPr>
           <p:cNvPr id="306" name="Google Shape;306;g3072d353d33_0_186"/>
@@ -31148,7 +31305,7 @@
 </p:sld>
 </file>
 
-<file path=ppt/slides/slide3.xml><?xml version="1.0" encoding="utf-8"?>
+<file path=ppt\slides\slide3.xml><?xml version="1.0" encoding="utf-8"?>
 <p:sld xmlns:a="http://schemas.openxmlformats.org/drawingml/2006/main" xmlns:r="http://schemas.openxmlformats.org/officeDocument/2006/relationships" xmlns:p="http://schemas.openxmlformats.org/presentationml/2006/main">
   <p:cSld>
     <p:spTree>
@@ -31474,6 +31631,34 @@
           </p:txBody>
         </p:sp>
       </p:grpSp>
+      <p:pic>
+        <p:nvPicPr>
+          <p:cNvPr id="371" name="Google Shape;371;g3072d353d33_0_212"/>
+          <p:cNvPicPr preferRelativeResize="0"/>
+          <p:nvPr/>
+        </p:nvPicPr>
+        <p:blipFill>
+          <a:blip r:embed="rId3">
+            <a:alphaModFix/>
+          </a:blip>
+          <a:stretch>
+            <a:fillRect/>
+          </a:stretch>
+        </p:blipFill>
+        <p:spPr>
+          <a:xfrm>
+            <a:off x="396400" y="1014450"/>
+            <a:ext cx="5570299" cy="2613793"/>
+          </a:xfrm>
+          <a:prstGeom prst="rect">
+            <a:avLst/>
+          </a:prstGeom>
+          <a:noFill/>
+          <a:ln>
+            <a:noFill/>
+          </a:ln>
+        </p:spPr>
+      </p:pic>
       <p:sp>
         <p:nvSpPr>
           <p:cNvPr id="372" name="Google Shape;372;g3072d353d33_0_212"/>
@@ -31760,6 +31945,654 @@
           </a:p>
         </p:txBody>
       </p:sp>
+      <p:graphicFrame>
+        <p:nvGraphicFramePr>
+          <p:cNvPr id="375" name="Google Shape;375;g3072d353d33_0_212"/>
+          <p:cNvGraphicFramePr/>
+          <p:nvPr/>
+        </p:nvGraphicFramePr>
+        <p:xfrm>
+          <a:off x="155327" y="3879095"/>
+          <a:ext cx="8901300" cy="775360"/>
+        </p:xfrm>
+        <a:graphic>
+          <a:graphicData uri="http://schemas.openxmlformats.org/drawingml/2006/table">
+            <a:tbl>
+              <a:tblPr>
+                <a:noFill/>
+                <a:tableStyleId>{0E937493-311C-4B09-AB42-98F83098D3E6}</a:tableStyleId>
+              </a:tblPr>
+              <a:tblGrid>
+                <a:gridCol w="580825">
+                  <a:extLst>
+                    <a:ext uri="{9D8B030D-6E8A-4147-A177-3AD203B41FA5}">
+                      <a16:colId xmlns:a16="http://schemas.microsoft.com/office/drawing/2014/main" val="20000"/>
+                    </a:ext>
+                  </a:extLst>
+                </a:gridCol>
+                <a:gridCol w="5230550">
+                  <a:extLst>
+                    <a:ext uri="{9D8B030D-6E8A-4147-A177-3AD203B41FA5}">
+                      <a16:colId xmlns:a16="http://schemas.microsoft.com/office/drawing/2014/main" val="20001"/>
+                    </a:ext>
+                  </a:extLst>
+                </a:gridCol>
+                <a:gridCol w="3089925">
+                  <a:extLst>
+                    <a:ext uri="{9D8B030D-6E8A-4147-A177-3AD203B41FA5}">
+                      <a16:colId xmlns:a16="http://schemas.microsoft.com/office/drawing/2014/main" val="20002"/>
+                    </a:ext>
+                  </a:extLst>
+                </a:gridCol>
+              </a:tblGrid>
+              <a:tr h="188125">
+                <a:tc>
+                  <a:txBody>
+                    <a:bodyPr/>
+                    <a:lstStyle/>
+                    <a:p>
+                      <a:pPr marL="0" marR="0" lvl="0" indent="0" algn="ctr" rtl="0">
+                        <a:lnSpc>
+                          <a:spcPct val="100000"/>
+                        </a:lnSpc>
+                        <a:spcBef>
+                          <a:spcPts val="0"/>
+                        </a:spcBef>
+                        <a:spcAft>
+                          <a:spcPts val="0"/>
+                        </a:spcAft>
+                        <a:buClr>
+                          <a:srgbClr val="FFFFFF"/>
+                        </a:buClr>
+                        <a:buSzPts val="1400"/>
+                        <a:buFont typeface="Outfit"/>
+                        <a:buNone/>
+                      </a:pPr>
+                      <a:r>
+                        <a:rPr lang="en-US" sz="1400" b="1" i="0" u="none" strike="noStrike" cap="none">
+                          <a:solidFill>
+                            <a:srgbClr val="FFFFFF"/>
+                          </a:solidFill>
+                          <a:latin typeface="Outfit"/>
+                          <a:ea typeface="Outfit"/>
+                          <a:cs typeface="Outfit"/>
+                          <a:sym typeface="Outfit"/>
+                        </a:rPr>
+                        <a:t>🕭</a:t>
+                      </a:r>
+                      <a:endParaRPr sz="2000" b="1" u="none" strike="noStrike" cap="none">
+                        <a:solidFill>
+                          <a:srgbClr val="FFFFFF"/>
+                        </a:solidFill>
+                        <a:latin typeface="Outfit"/>
+                        <a:ea typeface="Outfit"/>
+                        <a:cs typeface="Outfit"/>
+                        <a:sym typeface="Outfit"/>
+                      </a:endParaRPr>
+                    </a:p>
+                  </a:txBody>
+                  <a:tcPr marL="68575" marR="68575" marT="0" marB="0" anchor="ctr">
+                    <a:lnL w="12700" cap="flat" cmpd="sng">
+                      <a:solidFill>
+                        <a:srgbClr val="0E2356"/>
+                      </a:solidFill>
+                      <a:prstDash val="solid"/>
+                      <a:round/>
+                      <a:headEnd type="none" w="sm" len="sm"/>
+                      <a:tailEnd type="none" w="sm" len="sm"/>
+                    </a:lnL>
+                    <a:lnR w="12700" cap="flat" cmpd="sng">
+                      <a:solidFill>
+                        <a:srgbClr val="0E2356"/>
+                      </a:solidFill>
+                      <a:prstDash val="solid"/>
+                      <a:round/>
+                      <a:headEnd type="none" w="sm" len="sm"/>
+                      <a:tailEnd type="none" w="sm" len="sm"/>
+                    </a:lnR>
+                    <a:lnT w="12700" cap="flat" cmpd="sng">
+                      <a:solidFill>
+                        <a:srgbClr val="0E2356"/>
+                      </a:solidFill>
+                      <a:prstDash val="solid"/>
+                      <a:round/>
+                      <a:headEnd type="none" w="sm" len="sm"/>
+                      <a:tailEnd type="none" w="sm" len="sm"/>
+                    </a:lnT>
+                    <a:lnB w="12700" cap="flat" cmpd="sng">
+                      <a:solidFill>
+                        <a:srgbClr val="0E2356"/>
+                      </a:solidFill>
+                      <a:prstDash val="solid"/>
+                      <a:round/>
+                      <a:headEnd type="none" w="sm" len="sm"/>
+                      <a:tailEnd type="none" w="sm" len="sm"/>
+                    </a:lnB>
+                    <a:solidFill>
+                      <a:srgbClr val="C5D9E8"/>
+                    </a:solidFill>
+                  </a:tcPr>
+                </a:tc>
+                <a:tc>
+                  <a:txBody>
+                    <a:bodyPr/>
+                    <a:lstStyle/>
+                    <a:p>
+                      <a:pPr marL="0" marR="0" lvl="0" indent="0" algn="ctr" rtl="0">
+                        <a:lnSpc>
+                          <a:spcPct val="100000"/>
+                        </a:lnSpc>
+                        <a:spcBef>
+                          <a:spcPts val="0"/>
+                        </a:spcBef>
+                        <a:spcAft>
+                          <a:spcPts val="0"/>
+                        </a:spcAft>
+                        <a:buClr>
+                          <a:srgbClr val="0E2356"/>
+                        </a:buClr>
+                        <a:buSzPts val="700"/>
+                        <a:buFont typeface="Outfit"/>
+                        <a:buNone/>
+                      </a:pPr>
+                      <a:r>
+                        <a:rPr lang="en-US" sz="900" b="1" i="0" u="none" strike="noStrike" cap="none">
+                          <a:solidFill>
+                            <a:srgbClr val="0E2356"/>
+                          </a:solidFill>
+                          <a:latin typeface="Outfit"/>
+                          <a:ea typeface="Outfit"/>
+                          <a:cs typeface="Outfit"/>
+                          <a:sym typeface="Outfit"/>
+                        </a:rPr>
+                        <a:t>Sujets pour décision</a:t>
+                      </a:r>
+                      <a:r>
+                        <a:rPr lang="en-US" sz="900" b="1">
+                          <a:latin typeface="Outfit"/>
+                          <a:ea typeface="Outfit"/>
+                          <a:cs typeface="Outfit"/>
+                          <a:sym typeface="Outfit"/>
+                        </a:rPr>
+                        <a:t>(s)</a:t>
+                      </a:r>
+                      <a:endParaRPr sz="900" b="1" i="0" u="none" strike="noStrike" cap="none">
+                        <a:solidFill>
+                          <a:srgbClr val="0E2356"/>
+                        </a:solidFill>
+                        <a:latin typeface="Outfit"/>
+                        <a:ea typeface="Outfit"/>
+                        <a:cs typeface="Outfit"/>
+                        <a:sym typeface="Outfit"/>
+                      </a:endParaRPr>
+                    </a:p>
+                  </a:txBody>
+                  <a:tcPr marL="68575" marR="68575" marT="0" marB="0" anchor="ctr">
+                    <a:lnL w="12700" cap="flat" cmpd="sng">
+                      <a:solidFill>
+                        <a:srgbClr val="0E2356"/>
+                      </a:solidFill>
+                      <a:prstDash val="solid"/>
+                      <a:round/>
+                      <a:headEnd type="none" w="sm" len="sm"/>
+                      <a:tailEnd type="none" w="sm" len="sm"/>
+                    </a:lnL>
+                    <a:lnR w="12700" cap="flat" cmpd="sng">
+                      <a:solidFill>
+                        <a:srgbClr val="0E2356"/>
+                      </a:solidFill>
+                      <a:prstDash val="solid"/>
+                      <a:round/>
+                      <a:headEnd type="none" w="sm" len="sm"/>
+                      <a:tailEnd type="none" w="sm" len="sm"/>
+                    </a:lnR>
+                    <a:lnT w="12700" cap="flat" cmpd="sng">
+                      <a:solidFill>
+                        <a:srgbClr val="0E2356"/>
+                      </a:solidFill>
+                      <a:prstDash val="solid"/>
+                      <a:round/>
+                      <a:headEnd type="none" w="sm" len="sm"/>
+                      <a:tailEnd type="none" w="sm" len="sm"/>
+                    </a:lnT>
+                    <a:lnB w="12700" cap="flat" cmpd="sng">
+                      <a:solidFill>
+                        <a:srgbClr val="0E2356"/>
+                      </a:solidFill>
+                      <a:prstDash val="solid"/>
+                      <a:round/>
+                      <a:headEnd type="none" w="sm" len="sm"/>
+                      <a:tailEnd type="none" w="sm" len="sm"/>
+                    </a:lnB>
+                    <a:solidFill>
+                      <a:srgbClr val="C5D9E8"/>
+                    </a:solidFill>
+                  </a:tcPr>
+                </a:tc>
+                <a:tc>
+                  <a:txBody>
+                    <a:bodyPr/>
+                    <a:lstStyle/>
+                    <a:p>
+                      <a:pPr marL="82550" marR="0" lvl="0" indent="-82550" algn="ctr" rtl="0">
+                        <a:lnSpc>
+                          <a:spcPct val="100000"/>
+                        </a:lnSpc>
+                        <a:spcBef>
+                          <a:spcPts val="0"/>
+                        </a:spcBef>
+                        <a:spcAft>
+                          <a:spcPts val="0"/>
+                        </a:spcAft>
+                        <a:buClr>
+                          <a:srgbClr val="0E2356"/>
+                        </a:buClr>
+                        <a:buSzPts val="700"/>
+                        <a:buFont typeface="Outfit"/>
+                        <a:buNone/>
+                      </a:pPr>
+                      <a:r>
+                        <a:rPr lang="en-US" sz="700" b="1" i="0" u="none" strike="noStrike" cap="none">
+                          <a:solidFill>
+                            <a:srgbClr val="0E2356"/>
+                          </a:solidFill>
+                          <a:latin typeface="Outfit"/>
+                          <a:ea typeface="Outfit"/>
+                          <a:cs typeface="Outfit"/>
+                          <a:sym typeface="Outfit"/>
+                        </a:rPr>
+                        <a:t>Décision(s) </a:t>
+                      </a:r>
+                      <a:r>
+                        <a:rPr lang="en-US" sz="700" b="1">
+                          <a:latin typeface="Outfit"/>
+                          <a:ea typeface="Outfit"/>
+                          <a:cs typeface="Outfit"/>
+                          <a:sym typeface="Outfit"/>
+                        </a:rPr>
+                        <a:t>prises en séance</a:t>
+                      </a:r>
+                      <a:endParaRPr sz="1400" u="none" strike="noStrike" cap="none"/>
+                    </a:p>
+                  </a:txBody>
+                  <a:tcPr marL="68575" marR="68575" marT="0" marB="0" anchor="ctr">
+                    <a:lnL w="12700" cap="flat" cmpd="sng">
+                      <a:solidFill>
+                        <a:srgbClr val="0E2356"/>
+                      </a:solidFill>
+                      <a:prstDash val="solid"/>
+                      <a:round/>
+                      <a:headEnd type="none" w="sm" len="sm"/>
+                      <a:tailEnd type="none" w="sm" len="sm"/>
+                    </a:lnL>
+                    <a:lnR w="12700" cap="flat" cmpd="sng">
+                      <a:solidFill>
+                        <a:srgbClr val="0E2356"/>
+                      </a:solidFill>
+                      <a:prstDash val="solid"/>
+                      <a:round/>
+                      <a:headEnd type="none" w="sm" len="sm"/>
+                      <a:tailEnd type="none" w="sm" len="sm"/>
+                    </a:lnR>
+                    <a:lnT w="12700" cap="flat" cmpd="sng">
+                      <a:solidFill>
+                        <a:srgbClr val="0E2356"/>
+                      </a:solidFill>
+                      <a:prstDash val="solid"/>
+                      <a:round/>
+                      <a:headEnd type="none" w="sm" len="sm"/>
+                      <a:tailEnd type="none" w="sm" len="sm"/>
+                    </a:lnT>
+                    <a:lnB w="12700" cap="flat" cmpd="sng">
+                      <a:solidFill>
+                        <a:srgbClr val="0E2356"/>
+                      </a:solidFill>
+                      <a:prstDash val="solid"/>
+                      <a:round/>
+                      <a:headEnd type="none" w="sm" len="sm"/>
+                      <a:tailEnd type="none" w="sm" len="sm"/>
+                    </a:lnB>
+                    <a:solidFill>
+                      <a:srgbClr val="C5D9E8"/>
+                    </a:solidFill>
+                  </a:tcPr>
+                </a:tc>
+                <a:extLst>
+                  <a:ext uri="{0D108BD9-81ED-4DB2-BD59-A6C34878D82A}">
+                    <a16:rowId xmlns:a16="http://schemas.microsoft.com/office/drawing/2014/main" val="10000"/>
+                  </a:ext>
+                </a:extLst>
+              </a:tr>
+              <a:tr h="279000">
+                <a:tc gridSpan="2">
+                  <a:txBody>
+                    <a:bodyPr/>
+                    <a:lstStyle/>
+                    <a:p>
+                      <a:pPr marL="0" marR="0" lvl="0" indent="0" algn="l" rtl="0">
+                        <a:lnSpc>
+                          <a:spcPct val="100000"/>
+                        </a:lnSpc>
+                        <a:spcBef>
+                          <a:spcPts val="0"/>
+                        </a:spcBef>
+                        <a:spcAft>
+                          <a:spcPts val="0"/>
+                        </a:spcAft>
+                        <a:buClr>
+                          <a:srgbClr val="0E2356"/>
+                        </a:buClr>
+                        <a:buSzPts val="800"/>
+                        <a:buFont typeface="Outfit"/>
+                        <a:buNone/>
+                      </a:pPr>
+                      <a:r>
+                        <a:rPr lang="en-US" sz="800"/>
+                        <a:t>{{sujets_decision}}</a:t>
+                      </a:r>
+                      <a:endParaRPr sz="1400" u="none" strike="noStrike" cap="none"/>
+                    </a:p>
+                  </a:txBody>
+                  <a:tcPr marL="45725" marR="45725" marT="45725" marB="45725" anchor="ctr">
+                    <a:lnL w="12700" cap="flat" cmpd="sng">
+                      <a:solidFill>
+                        <a:srgbClr val="0E2356"/>
+                      </a:solidFill>
+                      <a:prstDash val="solid"/>
+                      <a:round/>
+                      <a:headEnd type="none" w="sm" len="sm"/>
+                      <a:tailEnd type="none" w="sm" len="sm"/>
+                    </a:lnL>
+                    <a:lnR w="12700" cap="flat" cmpd="sng">
+                      <a:solidFill>
+                        <a:srgbClr val="0E2356"/>
+                      </a:solidFill>
+                      <a:prstDash val="solid"/>
+                      <a:round/>
+                      <a:headEnd type="none" w="sm" len="sm"/>
+                      <a:tailEnd type="none" w="sm" len="sm"/>
+                    </a:lnR>
+                    <a:lnT w="12700" cap="flat" cmpd="sng">
+                      <a:solidFill>
+                        <a:srgbClr val="0E2356"/>
+                      </a:solidFill>
+                      <a:prstDash val="solid"/>
+                      <a:round/>
+                      <a:headEnd type="none" w="sm" len="sm"/>
+                      <a:tailEnd type="none" w="sm" len="sm"/>
+                    </a:lnT>
+                    <a:lnB w="12700" cap="flat" cmpd="sng">
+                      <a:solidFill>
+                        <a:srgbClr val="0E2356"/>
+                      </a:solidFill>
+                      <a:prstDash val="solid"/>
+                      <a:round/>
+                      <a:headEnd type="none" w="sm" len="sm"/>
+                      <a:tailEnd type="none" w="sm" len="sm"/>
+                    </a:lnB>
+                  </a:tcPr>
+                </a:tc>
+                <a:tc hMerge="1">
+                  <a:txBody>
+                    <a:bodyPr/>
+                    <a:lstStyle/>
+                    <a:p>
+                      <a:endParaRPr lang="fr-FR"/>
+                    </a:p>
+                  </a:txBody>
+                  <a:tcPr/>
+                </a:tc>
+                <a:tc>
+                  <a:txBody>
+                    <a:bodyPr/>
+                    <a:lstStyle/>
+                    <a:p>
+                      <a:pPr marL="0" marR="0" lvl="0" indent="0" algn="l" rtl="0">
+                        <a:lnSpc>
+                          <a:spcPct val="100000"/>
+                        </a:lnSpc>
+                        <a:spcBef>
+                          <a:spcPts val="0"/>
+                        </a:spcBef>
+                        <a:spcAft>
+                          <a:spcPts val="0"/>
+                        </a:spcAft>
+                        <a:buClr>
+                          <a:srgbClr val="0E2356"/>
+                        </a:buClr>
+                        <a:buSzPts val="800"/>
+                        <a:buFont typeface="Outfit"/>
+                        <a:buNone/>
+                      </a:pPr>
+                      <a:endParaRPr sz="1400" u="none" strike="noStrike" cap="none"/>
+                    </a:p>
+                  </a:txBody>
+                  <a:tcPr marL="68575" marR="68575" marT="0" marB="0" anchor="ctr">
+                    <a:lnL w="12700" cap="flat" cmpd="sng">
+                      <a:solidFill>
+                        <a:srgbClr val="0E2356"/>
+                      </a:solidFill>
+                      <a:prstDash val="solid"/>
+                      <a:round/>
+                      <a:headEnd type="none" w="sm" len="sm"/>
+                      <a:tailEnd type="none" w="sm" len="sm"/>
+                    </a:lnL>
+                    <a:lnR w="12700" cap="flat" cmpd="sng">
+                      <a:solidFill>
+                        <a:srgbClr val="0E2356"/>
+                      </a:solidFill>
+                      <a:prstDash val="solid"/>
+                      <a:round/>
+                      <a:headEnd type="none" w="sm" len="sm"/>
+                      <a:tailEnd type="none" w="sm" len="sm"/>
+                    </a:lnR>
+                    <a:lnT w="12700" cap="flat" cmpd="sng">
+                      <a:solidFill>
+                        <a:srgbClr val="0E2356"/>
+                      </a:solidFill>
+                      <a:prstDash val="solid"/>
+                      <a:round/>
+                      <a:headEnd type="none" w="sm" len="sm"/>
+                      <a:tailEnd type="none" w="sm" len="sm"/>
+                    </a:lnT>
+                    <a:lnB w="12700" cap="flat" cmpd="sng">
+                      <a:solidFill>
+                        <a:srgbClr val="0E2356"/>
+                      </a:solidFill>
+                      <a:prstDash val="solid"/>
+                      <a:round/>
+                      <a:headEnd type="none" w="sm" len="sm"/>
+                      <a:tailEnd type="none" w="sm" len="sm"/>
+                    </a:lnB>
+                  </a:tcPr>
+                </a:tc>
+                <a:extLst>
+                  <a:ext uri="{0D108BD9-81ED-4DB2-BD59-A6C34878D82A}">
+                    <a16:rowId xmlns:a16="http://schemas.microsoft.com/office/drawing/2014/main" val="10001"/>
+                  </a:ext>
+                </a:extLst>
+              </a:tr>
+              <a:tr h="283000">
+                <a:tc gridSpan="2">
+                  <a:txBody>
+                    <a:bodyPr/>
+                    <a:lstStyle/>
+                    <a:p>
+                      <a:pPr marL="0" marR="0" lvl="0" indent="0" algn="l" rtl="0">
+                        <a:lnSpc>
+                          <a:spcPct val="100000"/>
+                        </a:lnSpc>
+                        <a:spcBef>
+                          <a:spcPts val="0"/>
+                        </a:spcBef>
+                        <a:spcAft>
+                          <a:spcPts val="0"/>
+                        </a:spcAft>
+                        <a:buClr>
+                          <a:srgbClr val="0E2356"/>
+                        </a:buClr>
+                        <a:buSzPts val="800"/>
+                        <a:buFont typeface="Outfit"/>
+                        <a:buNone/>
+                      </a:pPr>
+                      <a:r>
+                        <a:rPr lang="en-US" sz="800"/>
+                        <a:t>{{decisions}}</a:t>
+                      </a:r>
+                      <a:endParaRPr sz="800" b="0" i="0" u="none" strike="noStrike" cap="none">
+                        <a:solidFill>
+                          <a:srgbClr val="0E2356"/>
+                        </a:solidFill>
+                        <a:latin typeface="Outfit"/>
+                        <a:ea typeface="Outfit"/>
+                        <a:cs typeface="Outfit"/>
+                        <a:sym typeface="Outfit"/>
+                      </a:endParaRPr>
+                    </a:p>
+                  </a:txBody>
+                  <a:tcPr marL="45725" marR="45725" marT="45725" marB="45725" anchor="ctr">
+                    <a:lnL w="12700" cap="flat" cmpd="sng">
+                      <a:solidFill>
+                        <a:srgbClr val="0E2356"/>
+                      </a:solidFill>
+                      <a:prstDash val="solid"/>
+                      <a:round/>
+                      <a:headEnd type="none" w="sm" len="sm"/>
+                      <a:tailEnd type="none" w="sm" len="sm"/>
+                    </a:lnL>
+                    <a:lnR w="12700" cap="flat" cmpd="sng">
+                      <a:solidFill>
+                        <a:srgbClr val="0E2356"/>
+                      </a:solidFill>
+                      <a:prstDash val="solid"/>
+                      <a:round/>
+                      <a:headEnd type="none" w="sm" len="sm"/>
+                      <a:tailEnd type="none" w="sm" len="sm"/>
+                    </a:lnR>
+                    <a:lnT w="12700" cap="flat" cmpd="sng">
+                      <a:solidFill>
+                        <a:srgbClr val="0E2356"/>
+                      </a:solidFill>
+                      <a:prstDash val="solid"/>
+                      <a:round/>
+                      <a:headEnd type="none" w="sm" len="sm"/>
+                      <a:tailEnd type="none" w="sm" len="sm"/>
+                    </a:lnT>
+                    <a:lnB w="12700" cap="flat" cmpd="sng">
+                      <a:solidFill>
+                        <a:srgbClr val="0E2356"/>
+                      </a:solidFill>
+                      <a:prstDash val="solid"/>
+                      <a:round/>
+                      <a:headEnd type="none" w="sm" len="sm"/>
+                      <a:tailEnd type="none" w="sm" len="sm"/>
+                    </a:lnB>
+                  </a:tcPr>
+                </a:tc>
+                <a:tc hMerge="1">
+                  <a:txBody>
+                    <a:bodyPr/>
+                    <a:lstStyle/>
+                    <a:p>
+                      <a:endParaRPr lang="fr-FR"/>
+                    </a:p>
+                  </a:txBody>
+                  <a:tcPr/>
+                </a:tc>
+                <a:tc>
+                  <a:txBody>
+                    <a:bodyPr/>
+                    <a:lstStyle/>
+                    <a:p>
+                      <a:pPr marL="0" marR="0" lvl="0" indent="0" algn="l" rtl="0">
+                        <a:lnSpc>
+                          <a:spcPct val="100000"/>
+                        </a:lnSpc>
+                        <a:spcBef>
+                          <a:spcPts val="0"/>
+                        </a:spcBef>
+                        <a:spcAft>
+                          <a:spcPts val="0"/>
+                        </a:spcAft>
+                        <a:buClr>
+                          <a:srgbClr val="0E2356"/>
+                        </a:buClr>
+                        <a:buSzPts val="800"/>
+                        <a:buFont typeface="Outfit"/>
+                        <a:buNone/>
+                      </a:pPr>
+                      <a:r>
+                        <a:rPr lang="en-US" sz="800" b="0" i="0" u="none" strike="noStrike" cap="none">
+                          <a:solidFill>
+                            <a:srgbClr val="0E2356"/>
+                          </a:solidFill>
+                          <a:latin typeface="Outfit"/>
+                          <a:ea typeface="Outfit"/>
+                          <a:cs typeface="Outfit"/>
+                          <a:sym typeface="Outfit"/>
+                        </a:rPr>
+                        <a:t>{{chantiers_3_mois}} - {{jalons_livrables}} - {{avancement_chantiers}} - {{difficultes_roadmap}}</a:t>
+                      </a:r>
+                      <a:endParaRPr sz="800" b="0" i="0" u="none" strike="noStrike" cap="none">
+                        <a:solidFill>
+                          <a:srgbClr val="0E2356"/>
+                        </a:solidFill>
+                        <a:latin typeface="Outfit"/>
+                        <a:ea typeface="Outfit"/>
+                        <a:cs typeface="Outfit"/>
+                        <a:sym typeface="Outfit"/>
+                      </a:endParaRPr>
+                    </a:p>
+                  </a:txBody>
+                  <a:tcPr marL="68575" marR="68575" marT="0" marB="0" anchor="ctr">
+                    <a:lnL w="12700" cap="flat" cmpd="sng">
+                      <a:solidFill>
+                        <a:srgbClr val="0E2356"/>
+                      </a:solidFill>
+                      <a:prstDash val="solid"/>
+                      <a:round/>
+                      <a:headEnd type="none" w="sm" len="sm"/>
+                      <a:tailEnd type="none" w="sm" len="sm"/>
+                    </a:lnL>
+                    <a:lnR w="12700" cap="flat" cmpd="sng">
+                      <a:solidFill>
+                        <a:srgbClr val="0E2356"/>
+                      </a:solidFill>
+                      <a:prstDash val="solid"/>
+                      <a:round/>
+                      <a:headEnd type="none" w="sm" len="sm"/>
+                      <a:tailEnd type="none" w="sm" len="sm"/>
+                    </a:lnR>
+                    <a:lnT w="12700" cap="flat" cmpd="sng">
+                      <a:solidFill>
+                        <a:srgbClr val="0E2356"/>
+                      </a:solidFill>
+                      <a:prstDash val="solid"/>
+                      <a:round/>
+                      <a:headEnd type="none" w="sm" len="sm"/>
+                      <a:tailEnd type="none" w="sm" len="sm"/>
+                    </a:lnT>
+                    <a:lnB w="12700" cap="flat" cmpd="sng">
+                      <a:solidFill>
+                        <a:srgbClr val="0E2356"/>
+                      </a:solidFill>
+                      <a:prstDash val="solid"/>
+                      <a:round/>
+                      <a:headEnd type="none" w="sm" len="sm"/>
+                      <a:tailEnd type="none" w="sm" len="sm"/>
+                    </a:lnB>
+                  </a:tcPr>
+                </a:tc>
+                <a:extLst>
+                  <a:ext uri="{0D108BD9-81ED-4DB2-BD59-A6C34878D82A}">
+                    <a16:rowId xmlns:a16="http://schemas.microsoft.com/office/drawing/2014/main" val="10002"/>
+                  </a:ext>
+                </a:extLst>
+              </a:tr>
+            </a:tbl>
+          </a:graphicData>
+        </a:graphic>
+      </p:graphicFrame>
       <p:sp>
         <p:nvSpPr>
           <p:cNvPr id="376" name="Google Shape;376;g3072d353d33_0_212"/>
@@ -36462,7 +37295,7 @@
 </p:sld>
 </file>
 
-<file path=ppt/slides/slide4.xml><?xml version="1.0" encoding="utf-8"?>
+<file path=ppt\slides\slide4.xml><?xml version="1.0" encoding="utf-8"?>
 <p:sld xmlns:a="http://schemas.openxmlformats.org/drawingml/2006/main" xmlns:r="http://schemas.openxmlformats.org/officeDocument/2006/relationships" xmlns:p="http://schemas.openxmlformats.org/presentationml/2006/main">
   <p:cSld>
     <p:spTree>
@@ -41969,7 +42802,99 @@
 </p:sld>
 </file>
 
-<file path=ppt/theme/theme1.xml><?xml version="1.0" encoding="utf-8"?>
+<file path=ppt\tableStyles.xml><?xml version="1.0" encoding="utf-8"?>
+<a:tblStyleLst xmlns:a="http://schemas.openxmlformats.org/drawingml/2006/main" def="{0E937493-311C-4B09-AB42-98F83098D3E6}">
+  <a:tblStyle styleId="{0E937493-311C-4B09-AB42-98F83098D3E6}" styleName="Table_0">
+    <a:wholeTbl>
+      <a:tcTxStyle>
+        <a:font>
+          <a:latin typeface="Arial"/>
+          <a:ea typeface="Arial"/>
+          <a:cs typeface="Arial"/>
+        </a:font>
+        <a:srgbClr val="000000"/>
+      </a:tcTxStyle>
+      <a:tcStyle>
+        <a:tcBdr/>
+      </a:tcStyle>
+    </a:wholeTbl>
+    <a:band1H>
+      <a:tcTxStyle/>
+      <a:tcStyle>
+        <a:tcBdr/>
+      </a:tcStyle>
+    </a:band1H>
+    <a:band2H>
+      <a:tcTxStyle/>
+      <a:tcStyle>
+        <a:tcBdr/>
+      </a:tcStyle>
+    </a:band2H>
+    <a:band1V>
+      <a:tcTxStyle/>
+      <a:tcStyle>
+        <a:tcBdr/>
+      </a:tcStyle>
+    </a:band1V>
+    <a:band2V>
+      <a:tcTxStyle/>
+      <a:tcStyle>
+        <a:tcBdr/>
+      </a:tcStyle>
+    </a:band2V>
+    <a:lastCol>
+      <a:tcTxStyle/>
+      <a:tcStyle>
+        <a:tcBdr/>
+      </a:tcStyle>
+    </a:lastCol>
+    <a:firstCol>
+      <a:tcTxStyle/>
+      <a:tcStyle>
+        <a:tcBdr/>
+      </a:tcStyle>
+    </a:firstCol>
+    <a:lastRow>
+      <a:tcTxStyle/>
+      <a:tcStyle>
+        <a:tcBdr/>
+      </a:tcStyle>
+    </a:lastRow>
+    <a:seCell>
+      <a:tcTxStyle/>
+      <a:tcStyle>
+        <a:tcBdr/>
+      </a:tcStyle>
+    </a:seCell>
+    <a:swCell>
+      <a:tcTxStyle/>
+      <a:tcStyle>
+        <a:tcBdr/>
+      </a:tcStyle>
+    </a:swCell>
+    <a:firstRow>
+      <a:tcTxStyle/>
+      <a:tcStyle>
+        <a:tcBdr/>
+      </a:tcStyle>
+    </a:firstRow>
+    <a:neCell>
+      <a:tcTxStyle/>
+      <a:tcStyle>
+        <a:tcBdr/>
+      </a:tcStyle>
+    </a:neCell>
+    <a:nwCell>
+      <a:tcTxStyle/>
+      <a:tcStyle>
+        <a:tcBdr/>
+      </a:tcStyle>
+    </a:nwCell>
+  </a:tblStyle>
+</a:tblStyleLst>
+</file>
+
+<file path=ppt\theme\theme1.xml><?xml version="1.0" encoding="utf-8"?>
 <a:theme xmlns:a="http://schemas.openxmlformats.org/drawingml/2006/main" name="Conception personnalisée">
   <a:themeElements>
     <a:clrScheme name="OCTO">
@@ -42250,7 +43175,7 @@
 </a:theme>
 </file>
 
-<file path=ppt/theme/theme2.xml><?xml version="1.0" encoding="utf-8"?>
+<file path=ppt\theme\theme2.xml><?xml version="1.0" encoding="utf-8"?>
 <a:theme xmlns:a="http://schemas.openxmlformats.org/drawingml/2006/main">
   <a:themeElements>
     <a:clrScheme name="Custom">
@@ -42529,4 +43454,38 @@
   <a:objectDefaults/>
   <a:extraClrSchemeLst/>
 </a:theme>
+</file>
+
+<file path=ppt\viewProps.xml><?xml version="1.0" encoding="utf-8"?>
+<p:viewPr xmlns:a="http://schemas.openxmlformats.org/drawingml/2006/main" xmlns:r="http://schemas.openxmlformats.org/officeDocument/2006/relationships" xmlns:p="http://schemas.openxmlformats.org/presentationml/2006/main" lastView="sldThumbnailView">
+  <p:normalViewPr>
+    <p:restoredLeft sz="15620"/>
+    <p:restoredTop sz="94660"/>
+  </p:normalViewPr>
+  <p:slideViewPr>
+    <p:cSldViewPr snapToGrid="0">
+      <p:cViewPr varScale="1">
+        <p:scale>
+          <a:sx n="93" d="100"/>
+          <a:sy n="93" d="100"/>
+        </p:scale>
+        <p:origin x="252" y="56"/>
+      </p:cViewPr>
+      <p:guideLst>
+        <p:guide orient="horz"/>
+        <p:guide pos="2880"/>
+      </p:guideLst>
+    </p:cSldViewPr>
+  </p:slideViewPr>
+  <p:notesTextViewPr>
+    <p:cViewPr>
+      <p:scale>
+        <a:sx n="1" d="1"/>
+        <a:sy n="1" d="1"/>
+      </p:scale>
+      <p:origin x="0" y="0"/>
+    </p:cViewPr>
+  </p:notesTextViewPr>
+  <p:gridSpacing cx="72008" cy="72008"/>
+</p:viewPr>
 </file>